--- a/答辩交付物/答辩PPT.pptx
+++ b/答辩交付物/答辩PPT.pptx
@@ -1,25 +1,28 @@
 
 <file path=ppt/presentation.xml><?xml version="1.0" encoding="utf-8"?>
-<p:presentation xmlns:a="http://schemas.openxmlformats.org/drawingml/2006/main" xmlns:r="http://schemas.openxmlformats.org/officeDocument/2006/relationships" xmlns:p="http://schemas.openxmlformats.org/presentationml/2006/main" saveSubsetFonts="1" autoCompressPictures="0">
+<p:presentation xmlns:a="http://schemas.openxmlformats.org/drawingml/2006/main" xmlns:r="http://schemas.openxmlformats.org/officeDocument/2006/relationships" xmlns:p="http://schemas.openxmlformats.org/presentationml/2006/main" autoCompressPictures="0">
   <p:sldMasterIdLst>
     <p:sldMasterId id="2147483648" r:id="rId1"/>
   </p:sldMasterIdLst>
+  <p:notesMasterIdLst>
+    <p:notesMasterId r:id="rId4"/>
+  </p:notesMasterIdLst>
   <p:sldIdLst>
-    <p:sldId id="256" r:id="rId7"/>
-    <p:sldId id="257" r:id="rId9"/>
-    <p:sldId id="258" r:id="rId10"/>
-    <p:sldId id="259" r:id="rId11"/>
-    <p:sldId id="260" r:id="rId12"/>
-    <p:sldId id="261" r:id="rId13"/>
-    <p:sldId id="262" r:id="rId14"/>
-    <p:sldId id="263" r:id="rId15"/>
-    <p:sldId id="264" r:id="rId16"/>
-    <p:sldId id="265" r:id="rId17"/>
-    <p:sldId id="266" r:id="rId18"/>
-    <p:sldId id="267" r:id="rId19"/>
-    <p:sldId id="268" r:id="rId20"/>
+    <p:sldId id="256" r:id="rId3"/>
+    <p:sldId id="257" r:id="rId5"/>
+    <p:sldId id="258" r:id="rId6"/>
+    <p:sldId id="259" r:id="rId7"/>
+    <p:sldId id="260" r:id="rId8"/>
+    <p:sldId id="261" r:id="rId9"/>
+    <p:sldId id="262" r:id="rId10"/>
+    <p:sldId id="263" r:id="rId11"/>
+    <p:sldId id="264" r:id="rId12"/>
+    <p:sldId id="265" r:id="rId13"/>
+    <p:sldId id="266" r:id="rId14"/>
+    <p:sldId id="267" r:id="rId15"/>
+    <p:sldId id="268" r:id="rId16"/>
   </p:sldIdLst>
-  <p:sldSz cx="12191695" cy="6858000" type="screen4x3"/>
+  <p:sldSz cx="12191365" cy="6858000" type="screen4x3"/>
   <p:notesSz cx="6858000" cy="9144000"/>
   <p:defaultTextStyle>
     <a:defPPr>
@@ -116,11 +119,27 @@
       </a:defRPr>
     </a:lvl9pPr>
   </p:defaultTextStyle>
+  <p:extLst>
+    <p:ext uri="{EFAFB233-063F-42B5-8137-9DF3F51BA10A}">
+      <p15:sldGuideLst xmlns:p15="http://schemas.microsoft.com/office/powerpoint/2012/main">
+        <p15:guide id="1" orient="horz" pos="2160" userDrawn="1">
+          <p15:clr>
+            <a:srgbClr val="A4A3A4"/>
+          </p15:clr>
+        </p15:guide>
+        <p15:guide id="2" pos="2880" userDrawn="1">
+          <p15:clr>
+            <a:srgbClr val="A4A3A4"/>
+          </p15:clr>
+        </p15:guide>
+      </p15:sldGuideLst>
+    </p:ext>
+  </p:extLst>
 </p:presentation>
 </file>
 
 <file path=ppt/notesMasters/notesMaster1.xml><?xml version="1.0" encoding="utf-8"?>
-<p:notesMaster xmlns:a="http://schemas.openxmlformats.org/drawingml/2006/main" xmlns:p="http://schemas.openxmlformats.org/presentationml/2006/main" xmlns:r="http://schemas.openxmlformats.org/officeDocument/2006/relationships">
+<p:notesMaster xmlns:a="http://schemas.openxmlformats.org/drawingml/2006/main" xmlns:r="http://schemas.openxmlformats.org/officeDocument/2006/relationships" xmlns:p="http://schemas.openxmlformats.org/presentationml/2006/main">
   <p:cSld>
     <p:bg>
       <p:bgRef idx="1001">
@@ -201,7 +220,6 @@
           <a:p>
             <a:fld id="{0F89C1C7-3DCD-1040-A9CF-14679D8B5DDD}" type="datetimeFigureOut">
               <a:rPr lang="en-US" smtClean="0"/>
-              <a:t>10/17/16</a:t>
             </a:fld>
             <a:endParaRPr lang="en-US"/>
           </a:p>
@@ -268,6 +286,7 @@
               <a:rPr lang="en-US" smtClean="0"/>
               <a:t>Click to edit Master text styles</a:t>
             </a:r>
+            <a:endParaRPr lang="en-US" smtClean="0"/>
           </a:p>
           <a:p>
             <a:pPr lvl="1"/>
@@ -275,6 +294,7 @@
               <a:rPr lang="en-US" smtClean="0"/>
               <a:t>Second level</a:t>
             </a:r>
+            <a:endParaRPr lang="en-US" smtClean="0"/>
           </a:p>
           <a:p>
             <a:pPr lvl="2"/>
@@ -282,6 +302,7 @@
               <a:rPr lang="en-US" smtClean="0"/>
               <a:t>Third level</a:t>
             </a:r>
+            <a:endParaRPr lang="en-US" smtClean="0"/>
           </a:p>
           <a:p>
             <a:pPr lvl="3"/>
@@ -289,6 +310,7 @@
               <a:rPr lang="en-US" smtClean="0"/>
               <a:t>Fourth level</a:t>
             </a:r>
+            <a:endParaRPr lang="en-US" smtClean="0"/>
           </a:p>
           <a:p>
             <a:pPr lvl="4"/>
@@ -360,18 +382,12 @@
           <a:p>
             <a:fld id="{BB5E49A5-4136-284D-997B-48E1D791AD67}" type="slidenum">
               <a:rPr lang="en-US" smtClean="0"/>
-              <a:t>‹#›</a:t>
             </a:fld>
             <a:endParaRPr lang="en-US"/>
           </a:p>
         </p:txBody>
       </p:sp>
     </p:spTree>
-    <p:extLst>
-      <p:ext uri="{BB962C8B-B14F-4D97-AF65-F5344CB8AC3E}">
-        <p14:creationId xmlns:p14="http://schemas.microsoft.com/office/powerpoint/2010/main" val="2623252185"/>
-      </p:ext>
-    </p:extLst>
   </p:cSld>
   <p:clrMap bg1="lt1" tx1="dk1" bg2="lt2" tx2="dk2" accent1="accent1" accent2="accent2" accent3="accent3" accent4="accent4" accent5="accent5" accent6="accent6" hlink="hlink" folHlink="folHlink"/>
   <p:notesStyle>
@@ -470,7 +486,7 @@
 </file>
 
 <file path=ppt/notesSlides/notesSlide1.xml><?xml version="1.0" encoding="utf-8"?>
-<p:notes xmlns:a="http://schemas.openxmlformats.org/drawingml/2006/main" xmlns:p="http://schemas.openxmlformats.org/presentationml/2006/main" xmlns:r="http://schemas.openxmlformats.org/officeDocument/2006/relationships">
+<p:notes xmlns:a="http://schemas.openxmlformats.org/drawingml/2006/main" xmlns:r="http://schemas.openxmlformats.org/officeDocument/2006/relationships" xmlns:p="http://schemas.openxmlformats.org/presentationml/2006/main">
   <p:cSld>
     <p:spTree>
       <p:nvGrpSpPr>
@@ -505,7 +521,7 @@
             <a:spLocks noGrp="1"/>
           </p:cNvSpPr>
           <p:nvPr>
-            <p:ph type="body" idx="3" sz="quarter"/>
+            <p:ph type="body" sz="quarter" idx="3"/>
           </p:nvPr>
         </p:nvSpPr>
         <p:spPr/>
@@ -526,7 +542,7 @@
             <a:spLocks noGrp="1"/>
           </p:cNvSpPr>
           <p:nvPr>
-            <p:ph type="sldNum" idx="5" sz="quarter"/>
+            <p:ph type="sldNum" sz="quarter" idx="5"/>
           </p:nvPr>
         </p:nvSpPr>
         <p:spPr/>
@@ -540,7 +556,7 @@
 </file>
 
 <file path=ppt/notesSlides/notesSlide10.xml><?xml version="1.0" encoding="utf-8"?>
-<p:notes xmlns:a="http://schemas.openxmlformats.org/drawingml/2006/main" xmlns:p="http://schemas.openxmlformats.org/presentationml/2006/main" xmlns:r="http://schemas.openxmlformats.org/officeDocument/2006/relationships">
+<p:notes xmlns:a="http://schemas.openxmlformats.org/drawingml/2006/main" xmlns:r="http://schemas.openxmlformats.org/officeDocument/2006/relationships" xmlns:p="http://schemas.openxmlformats.org/presentationml/2006/main">
   <p:cSld>
     <p:spTree>
       <p:nvGrpSpPr>
@@ -575,7 +591,7 @@
             <a:spLocks noGrp="1"/>
           </p:cNvSpPr>
           <p:nvPr>
-            <p:ph type="body" idx="3" sz="quarter"/>
+            <p:ph type="body" sz="quarter" idx="3"/>
           </p:nvPr>
         </p:nvSpPr>
         <p:spPr/>
@@ -596,7 +612,7 @@
             <a:spLocks noGrp="1"/>
           </p:cNvSpPr>
           <p:nvPr>
-            <p:ph type="sldNum" idx="5" sz="quarter"/>
+            <p:ph type="sldNum" sz="quarter" idx="5"/>
           </p:nvPr>
         </p:nvSpPr>
         <p:spPr/>
@@ -610,7 +626,7 @@
 </file>
 
 <file path=ppt/notesSlides/notesSlide11.xml><?xml version="1.0" encoding="utf-8"?>
-<p:notes xmlns:a="http://schemas.openxmlformats.org/drawingml/2006/main" xmlns:p="http://schemas.openxmlformats.org/presentationml/2006/main" xmlns:r="http://schemas.openxmlformats.org/officeDocument/2006/relationships">
+<p:notes xmlns:a="http://schemas.openxmlformats.org/drawingml/2006/main" xmlns:r="http://schemas.openxmlformats.org/officeDocument/2006/relationships" xmlns:p="http://schemas.openxmlformats.org/presentationml/2006/main">
   <p:cSld>
     <p:spTree>
       <p:nvGrpSpPr>
@@ -645,7 +661,7 @@
             <a:spLocks noGrp="1"/>
           </p:cNvSpPr>
           <p:nvPr>
-            <p:ph type="body" idx="3" sz="quarter"/>
+            <p:ph type="body" sz="quarter" idx="3"/>
           </p:nvPr>
         </p:nvSpPr>
         <p:spPr/>
@@ -666,7 +682,7 @@
             <a:spLocks noGrp="1"/>
           </p:cNvSpPr>
           <p:nvPr>
-            <p:ph type="sldNum" idx="5" sz="quarter"/>
+            <p:ph type="sldNum" sz="quarter" idx="5"/>
           </p:nvPr>
         </p:nvSpPr>
         <p:spPr/>
@@ -680,7 +696,7 @@
 </file>
 
 <file path=ppt/notesSlides/notesSlide12.xml><?xml version="1.0" encoding="utf-8"?>
-<p:notes xmlns:a="http://schemas.openxmlformats.org/drawingml/2006/main" xmlns:p="http://schemas.openxmlformats.org/presentationml/2006/main" xmlns:r="http://schemas.openxmlformats.org/officeDocument/2006/relationships">
+<p:notes xmlns:a="http://schemas.openxmlformats.org/drawingml/2006/main" xmlns:r="http://schemas.openxmlformats.org/officeDocument/2006/relationships" xmlns:p="http://schemas.openxmlformats.org/presentationml/2006/main">
   <p:cSld>
     <p:spTree>
       <p:nvGrpSpPr>
@@ -715,7 +731,7 @@
             <a:spLocks noGrp="1"/>
           </p:cNvSpPr>
           <p:nvPr>
-            <p:ph type="body" idx="3" sz="quarter"/>
+            <p:ph type="body" sz="quarter" idx="3"/>
           </p:nvPr>
         </p:nvSpPr>
         <p:spPr/>
@@ -736,7 +752,7 @@
             <a:spLocks noGrp="1"/>
           </p:cNvSpPr>
           <p:nvPr>
-            <p:ph type="sldNum" idx="5" sz="quarter"/>
+            <p:ph type="sldNum" sz="quarter" idx="5"/>
           </p:nvPr>
         </p:nvSpPr>
         <p:spPr/>
@@ -750,7 +766,7 @@
 </file>
 
 <file path=ppt/notesSlides/notesSlide13.xml><?xml version="1.0" encoding="utf-8"?>
-<p:notes xmlns:a="http://schemas.openxmlformats.org/drawingml/2006/main" xmlns:p="http://schemas.openxmlformats.org/presentationml/2006/main" xmlns:r="http://schemas.openxmlformats.org/officeDocument/2006/relationships">
+<p:notes xmlns:a="http://schemas.openxmlformats.org/drawingml/2006/main" xmlns:r="http://schemas.openxmlformats.org/officeDocument/2006/relationships" xmlns:p="http://schemas.openxmlformats.org/presentationml/2006/main">
   <p:cSld>
     <p:spTree>
       <p:nvGrpSpPr>
@@ -785,7 +801,7 @@
             <a:spLocks noGrp="1"/>
           </p:cNvSpPr>
           <p:nvPr>
-            <p:ph type="body" idx="3" sz="quarter"/>
+            <p:ph type="body" sz="quarter" idx="3"/>
           </p:nvPr>
         </p:nvSpPr>
         <p:spPr/>
@@ -806,7 +822,7 @@
             <a:spLocks noGrp="1"/>
           </p:cNvSpPr>
           <p:nvPr>
-            <p:ph type="sldNum" idx="5" sz="quarter"/>
+            <p:ph type="sldNum" sz="quarter" idx="5"/>
           </p:nvPr>
         </p:nvSpPr>
         <p:spPr/>
@@ -820,7 +836,7 @@
 </file>
 
 <file path=ppt/notesSlides/notesSlide2.xml><?xml version="1.0" encoding="utf-8"?>
-<p:notes xmlns:a="http://schemas.openxmlformats.org/drawingml/2006/main" xmlns:p="http://schemas.openxmlformats.org/presentationml/2006/main" xmlns:r="http://schemas.openxmlformats.org/officeDocument/2006/relationships">
+<p:notes xmlns:a="http://schemas.openxmlformats.org/drawingml/2006/main" xmlns:r="http://schemas.openxmlformats.org/officeDocument/2006/relationships" xmlns:p="http://schemas.openxmlformats.org/presentationml/2006/main">
   <p:cSld>
     <p:spTree>
       <p:nvGrpSpPr>
@@ -855,7 +871,7 @@
             <a:spLocks noGrp="1"/>
           </p:cNvSpPr>
           <p:nvPr>
-            <p:ph type="body" idx="3" sz="quarter"/>
+            <p:ph type="body" sz="quarter" idx="3"/>
           </p:nvPr>
         </p:nvSpPr>
         <p:spPr/>
@@ -876,7 +892,7 @@
             <a:spLocks noGrp="1"/>
           </p:cNvSpPr>
           <p:nvPr>
-            <p:ph type="sldNum" idx="5" sz="quarter"/>
+            <p:ph type="sldNum" sz="quarter" idx="5"/>
           </p:nvPr>
         </p:nvSpPr>
         <p:spPr/>
@@ -890,7 +906,7 @@
 </file>
 
 <file path=ppt/notesSlides/notesSlide3.xml><?xml version="1.0" encoding="utf-8"?>
-<p:notes xmlns:a="http://schemas.openxmlformats.org/drawingml/2006/main" xmlns:p="http://schemas.openxmlformats.org/presentationml/2006/main" xmlns:r="http://schemas.openxmlformats.org/officeDocument/2006/relationships">
+<p:notes xmlns:a="http://schemas.openxmlformats.org/drawingml/2006/main" xmlns:r="http://schemas.openxmlformats.org/officeDocument/2006/relationships" xmlns:p="http://schemas.openxmlformats.org/presentationml/2006/main">
   <p:cSld>
     <p:spTree>
       <p:nvGrpSpPr>
@@ -925,7 +941,7 @@
             <a:spLocks noGrp="1"/>
           </p:cNvSpPr>
           <p:nvPr>
-            <p:ph type="body" idx="3" sz="quarter"/>
+            <p:ph type="body" sz="quarter" idx="3"/>
           </p:nvPr>
         </p:nvSpPr>
         <p:spPr/>
@@ -946,7 +962,7 @@
             <a:spLocks noGrp="1"/>
           </p:cNvSpPr>
           <p:nvPr>
-            <p:ph type="sldNum" idx="5" sz="quarter"/>
+            <p:ph type="sldNum" sz="quarter" idx="5"/>
           </p:nvPr>
         </p:nvSpPr>
         <p:spPr/>
@@ -960,7 +976,7 @@
 </file>
 
 <file path=ppt/notesSlides/notesSlide4.xml><?xml version="1.0" encoding="utf-8"?>
-<p:notes xmlns:a="http://schemas.openxmlformats.org/drawingml/2006/main" xmlns:p="http://schemas.openxmlformats.org/presentationml/2006/main" xmlns:r="http://schemas.openxmlformats.org/officeDocument/2006/relationships">
+<p:notes xmlns:a="http://schemas.openxmlformats.org/drawingml/2006/main" xmlns:r="http://schemas.openxmlformats.org/officeDocument/2006/relationships" xmlns:p="http://schemas.openxmlformats.org/presentationml/2006/main">
   <p:cSld>
     <p:spTree>
       <p:nvGrpSpPr>
@@ -995,7 +1011,7 @@
             <a:spLocks noGrp="1"/>
           </p:cNvSpPr>
           <p:nvPr>
-            <p:ph type="body" idx="3" sz="quarter"/>
+            <p:ph type="body" sz="quarter" idx="3"/>
           </p:nvPr>
         </p:nvSpPr>
         <p:spPr/>
@@ -1016,7 +1032,7 @@
             <a:spLocks noGrp="1"/>
           </p:cNvSpPr>
           <p:nvPr>
-            <p:ph type="sldNum" idx="5" sz="quarter"/>
+            <p:ph type="sldNum" sz="quarter" idx="5"/>
           </p:nvPr>
         </p:nvSpPr>
         <p:spPr/>
@@ -1030,7 +1046,7 @@
 </file>
 
 <file path=ppt/notesSlides/notesSlide5.xml><?xml version="1.0" encoding="utf-8"?>
-<p:notes xmlns:a="http://schemas.openxmlformats.org/drawingml/2006/main" xmlns:p="http://schemas.openxmlformats.org/presentationml/2006/main" xmlns:r="http://schemas.openxmlformats.org/officeDocument/2006/relationships">
+<p:notes xmlns:a="http://schemas.openxmlformats.org/drawingml/2006/main" xmlns:r="http://schemas.openxmlformats.org/officeDocument/2006/relationships" xmlns:p="http://schemas.openxmlformats.org/presentationml/2006/main">
   <p:cSld>
     <p:spTree>
       <p:nvGrpSpPr>
@@ -1065,7 +1081,7 @@
             <a:spLocks noGrp="1"/>
           </p:cNvSpPr>
           <p:nvPr>
-            <p:ph type="body" idx="3" sz="quarter"/>
+            <p:ph type="body" sz="quarter" idx="3"/>
           </p:nvPr>
         </p:nvSpPr>
         <p:spPr/>
@@ -1086,7 +1102,7 @@
             <a:spLocks noGrp="1"/>
           </p:cNvSpPr>
           <p:nvPr>
-            <p:ph type="sldNum" idx="5" sz="quarter"/>
+            <p:ph type="sldNum" sz="quarter" idx="5"/>
           </p:nvPr>
         </p:nvSpPr>
         <p:spPr/>
@@ -1100,7 +1116,7 @@
 </file>
 
 <file path=ppt/notesSlides/notesSlide6.xml><?xml version="1.0" encoding="utf-8"?>
-<p:notes xmlns:a="http://schemas.openxmlformats.org/drawingml/2006/main" xmlns:p="http://schemas.openxmlformats.org/presentationml/2006/main" xmlns:r="http://schemas.openxmlformats.org/officeDocument/2006/relationships">
+<p:notes xmlns:a="http://schemas.openxmlformats.org/drawingml/2006/main" xmlns:r="http://schemas.openxmlformats.org/officeDocument/2006/relationships" xmlns:p="http://schemas.openxmlformats.org/presentationml/2006/main">
   <p:cSld>
     <p:spTree>
       <p:nvGrpSpPr>
@@ -1135,7 +1151,7 @@
             <a:spLocks noGrp="1"/>
           </p:cNvSpPr>
           <p:nvPr>
-            <p:ph type="body" idx="3" sz="quarter"/>
+            <p:ph type="body" sz="quarter" idx="3"/>
           </p:nvPr>
         </p:nvSpPr>
         <p:spPr/>
@@ -1156,7 +1172,7 @@
             <a:spLocks noGrp="1"/>
           </p:cNvSpPr>
           <p:nvPr>
-            <p:ph type="sldNum" idx="5" sz="quarter"/>
+            <p:ph type="sldNum" sz="quarter" idx="5"/>
           </p:nvPr>
         </p:nvSpPr>
         <p:spPr/>
@@ -1170,7 +1186,7 @@
 </file>
 
 <file path=ppt/notesSlides/notesSlide7.xml><?xml version="1.0" encoding="utf-8"?>
-<p:notes xmlns:a="http://schemas.openxmlformats.org/drawingml/2006/main" xmlns:p="http://schemas.openxmlformats.org/presentationml/2006/main" xmlns:r="http://schemas.openxmlformats.org/officeDocument/2006/relationships">
+<p:notes xmlns:a="http://schemas.openxmlformats.org/drawingml/2006/main" xmlns:r="http://schemas.openxmlformats.org/officeDocument/2006/relationships" xmlns:p="http://schemas.openxmlformats.org/presentationml/2006/main">
   <p:cSld>
     <p:spTree>
       <p:nvGrpSpPr>
@@ -1205,7 +1221,7 @@
             <a:spLocks noGrp="1"/>
           </p:cNvSpPr>
           <p:nvPr>
-            <p:ph type="body" idx="3" sz="quarter"/>
+            <p:ph type="body" sz="quarter" idx="3"/>
           </p:nvPr>
         </p:nvSpPr>
         <p:spPr/>
@@ -1226,7 +1242,7 @@
             <a:spLocks noGrp="1"/>
           </p:cNvSpPr>
           <p:nvPr>
-            <p:ph type="sldNum" idx="5" sz="quarter"/>
+            <p:ph type="sldNum" sz="quarter" idx="5"/>
           </p:nvPr>
         </p:nvSpPr>
         <p:spPr/>
@@ -1240,7 +1256,7 @@
 </file>
 
 <file path=ppt/notesSlides/notesSlide8.xml><?xml version="1.0" encoding="utf-8"?>
-<p:notes xmlns:a="http://schemas.openxmlformats.org/drawingml/2006/main" xmlns:p="http://schemas.openxmlformats.org/presentationml/2006/main" xmlns:r="http://schemas.openxmlformats.org/officeDocument/2006/relationships">
+<p:notes xmlns:a="http://schemas.openxmlformats.org/drawingml/2006/main" xmlns:r="http://schemas.openxmlformats.org/officeDocument/2006/relationships" xmlns:p="http://schemas.openxmlformats.org/presentationml/2006/main">
   <p:cSld>
     <p:spTree>
       <p:nvGrpSpPr>
@@ -1275,7 +1291,7 @@
             <a:spLocks noGrp="1"/>
           </p:cNvSpPr>
           <p:nvPr>
-            <p:ph type="body" idx="3" sz="quarter"/>
+            <p:ph type="body" sz="quarter" idx="3"/>
           </p:nvPr>
         </p:nvSpPr>
         <p:spPr/>
@@ -1296,7 +1312,7 @@
             <a:spLocks noGrp="1"/>
           </p:cNvSpPr>
           <p:nvPr>
-            <p:ph type="sldNum" idx="5" sz="quarter"/>
+            <p:ph type="sldNum" sz="quarter" idx="5"/>
           </p:nvPr>
         </p:nvSpPr>
         <p:spPr/>
@@ -1310,7 +1326,7 @@
 </file>
 
 <file path=ppt/notesSlides/notesSlide9.xml><?xml version="1.0" encoding="utf-8"?>
-<p:notes xmlns:a="http://schemas.openxmlformats.org/drawingml/2006/main" xmlns:p="http://schemas.openxmlformats.org/presentationml/2006/main" xmlns:r="http://schemas.openxmlformats.org/officeDocument/2006/relationships">
+<p:notes xmlns:a="http://schemas.openxmlformats.org/drawingml/2006/main" xmlns:r="http://schemas.openxmlformats.org/officeDocument/2006/relationships" xmlns:p="http://schemas.openxmlformats.org/presentationml/2006/main">
   <p:cSld>
     <p:spTree>
       <p:nvGrpSpPr>
@@ -1345,7 +1361,7 @@
             <a:spLocks noGrp="1"/>
           </p:cNvSpPr>
           <p:nvPr>
-            <p:ph type="body" idx="3" sz="quarter"/>
+            <p:ph type="body" sz="quarter" idx="3"/>
           </p:nvPr>
         </p:nvSpPr>
         <p:spPr/>
@@ -1366,7 +1382,7 @@
             <a:spLocks noGrp="1"/>
           </p:cNvSpPr>
           <p:nvPr>
-            <p:ph type="sldNum" idx="5" sz="quarter"/>
+            <p:ph type="sldNum" sz="quarter" idx="5"/>
           </p:nvPr>
         </p:nvSpPr>
         <p:spPr/>
@@ -1560,7 +1576,6 @@
           <a:p>
             <a:fld id="{5BCAD085-E8A6-8845-BD4E-CB4CCA059FC4}" type="datetimeFigureOut">
               <a:rPr lang="en-US" smtClean="0"/>
-              <a:t>1/27/13</a:t>
             </a:fld>
             <a:endParaRPr lang="en-US"/>
           </a:p>
@@ -1602,18 +1617,12 @@
           <a:p>
             <a:fld id="{C1FF6DA9-008F-8B48-92A6-B652298478BF}" type="slidenum">
               <a:rPr lang="en-US" smtClean="0"/>
-              <a:t>‹#›</a:t>
             </a:fld>
             <a:endParaRPr lang="en-US"/>
           </a:p>
         </p:txBody>
       </p:sp>
     </p:spTree>
-    <p:extLst>
-      <p:ext uri="{BB962C8B-B14F-4D97-AF65-F5344CB8AC3E}">
-        <p14:creationId xmlns:p14="http://schemas.microsoft.com/office/powerpoint/2010/main" val="3168075583"/>
-      </p:ext>
-    </p:extLst>
   </p:cSld>
   <p:clrMapOvr>
     <a:masterClrMapping/>
@@ -1681,6 +1690,7 @@
               <a:rPr lang="en-US" smtClean="0"/>
               <a:t>Click to edit Master text styles</a:t>
             </a:r>
+            <a:endParaRPr lang="en-US" smtClean="0"/>
           </a:p>
           <a:p>
             <a:pPr lvl="1"/>
@@ -1688,6 +1698,7 @@
               <a:rPr lang="en-US" smtClean="0"/>
               <a:t>Second level</a:t>
             </a:r>
+            <a:endParaRPr lang="en-US" smtClean="0"/>
           </a:p>
           <a:p>
             <a:pPr lvl="2"/>
@@ -1695,6 +1706,7 @@
               <a:rPr lang="en-US" smtClean="0"/>
               <a:t>Third level</a:t>
             </a:r>
+            <a:endParaRPr lang="en-US" smtClean="0"/>
           </a:p>
           <a:p>
             <a:pPr lvl="3"/>
@@ -1702,6 +1714,7 @@
               <a:rPr lang="en-US" smtClean="0"/>
               <a:t>Fourth level</a:t>
             </a:r>
+            <a:endParaRPr lang="en-US" smtClean="0"/>
           </a:p>
           <a:p>
             <a:pPr lvl="4"/>
@@ -1730,7 +1743,6 @@
           <a:p>
             <a:fld id="{5BCAD085-E8A6-8845-BD4E-CB4CCA059FC4}" type="datetimeFigureOut">
               <a:rPr lang="en-US" smtClean="0"/>
-              <a:t>1/27/13</a:t>
             </a:fld>
             <a:endParaRPr lang="en-US"/>
           </a:p>
@@ -1772,18 +1784,12 @@
           <a:p>
             <a:fld id="{C1FF6DA9-008F-8B48-92A6-B652298478BF}" type="slidenum">
               <a:rPr lang="en-US" smtClean="0"/>
-              <a:t>‹#›</a:t>
             </a:fld>
             <a:endParaRPr lang="en-US"/>
           </a:p>
         </p:txBody>
       </p:sp>
     </p:spTree>
-    <p:extLst>
-      <p:ext uri="{BB962C8B-B14F-4D97-AF65-F5344CB8AC3E}">
-        <p14:creationId xmlns:p14="http://schemas.microsoft.com/office/powerpoint/2010/main" val="2910927964"/>
-      </p:ext>
-    </p:extLst>
   </p:cSld>
   <p:clrMapOvr>
     <a:masterClrMapping/>
@@ -1861,6 +1867,7 @@
               <a:rPr lang="en-US" smtClean="0"/>
               <a:t>Click to edit Master text styles</a:t>
             </a:r>
+            <a:endParaRPr lang="en-US" smtClean="0"/>
           </a:p>
           <a:p>
             <a:pPr lvl="1"/>
@@ -1868,6 +1875,7 @@
               <a:rPr lang="en-US" smtClean="0"/>
               <a:t>Second level</a:t>
             </a:r>
+            <a:endParaRPr lang="en-US" smtClean="0"/>
           </a:p>
           <a:p>
             <a:pPr lvl="2"/>
@@ -1875,6 +1883,7 @@
               <a:rPr lang="en-US" smtClean="0"/>
               <a:t>Third level</a:t>
             </a:r>
+            <a:endParaRPr lang="en-US" smtClean="0"/>
           </a:p>
           <a:p>
             <a:pPr lvl="3"/>
@@ -1882,6 +1891,7 @@
               <a:rPr lang="en-US" smtClean="0"/>
               <a:t>Fourth level</a:t>
             </a:r>
+            <a:endParaRPr lang="en-US" smtClean="0"/>
           </a:p>
           <a:p>
             <a:pPr lvl="4"/>
@@ -1910,7 +1920,6 @@
           <a:p>
             <a:fld id="{5BCAD085-E8A6-8845-BD4E-CB4CCA059FC4}" type="datetimeFigureOut">
               <a:rPr lang="en-US" smtClean="0"/>
-              <a:t>1/27/13</a:t>
             </a:fld>
             <a:endParaRPr lang="en-US"/>
           </a:p>
@@ -1952,18 +1961,12 @@
           <a:p>
             <a:fld id="{C1FF6DA9-008F-8B48-92A6-B652298478BF}" type="slidenum">
               <a:rPr lang="en-US" smtClean="0"/>
-              <a:t>‹#›</a:t>
             </a:fld>
             <a:endParaRPr lang="en-US"/>
           </a:p>
         </p:txBody>
       </p:sp>
     </p:spTree>
-    <p:extLst>
-      <p:ext uri="{BB962C8B-B14F-4D97-AF65-F5344CB8AC3E}">
-        <p14:creationId xmlns:p14="http://schemas.microsoft.com/office/powerpoint/2010/main" val="3612223792"/>
-      </p:ext>
-    </p:extLst>
   </p:cSld>
   <p:clrMapOvr>
     <a:masterClrMapping/>
@@ -2031,6 +2034,7 @@
               <a:rPr lang="en-US" smtClean="0"/>
               <a:t>Click to edit Master text styles</a:t>
             </a:r>
+            <a:endParaRPr lang="en-US" smtClean="0"/>
           </a:p>
           <a:p>
             <a:pPr lvl="1"/>
@@ -2038,6 +2042,7 @@
               <a:rPr lang="en-US" smtClean="0"/>
               <a:t>Second level</a:t>
             </a:r>
+            <a:endParaRPr lang="en-US" smtClean="0"/>
           </a:p>
           <a:p>
             <a:pPr lvl="2"/>
@@ -2045,6 +2050,7 @@
               <a:rPr lang="en-US" smtClean="0"/>
               <a:t>Third level</a:t>
             </a:r>
+            <a:endParaRPr lang="en-US" smtClean="0"/>
           </a:p>
           <a:p>
             <a:pPr lvl="3"/>
@@ -2052,6 +2058,7 @@
               <a:rPr lang="en-US" smtClean="0"/>
               <a:t>Fourth level</a:t>
             </a:r>
+            <a:endParaRPr lang="en-US" smtClean="0"/>
           </a:p>
           <a:p>
             <a:pPr lvl="4"/>
@@ -2080,7 +2087,6 @@
           <a:p>
             <a:fld id="{5BCAD085-E8A6-8845-BD4E-CB4CCA059FC4}" type="datetimeFigureOut">
               <a:rPr lang="en-US" smtClean="0"/>
-              <a:t>1/27/13</a:t>
             </a:fld>
             <a:endParaRPr lang="en-US"/>
           </a:p>
@@ -2122,18 +2128,12 @@
           <a:p>
             <a:fld id="{C1FF6DA9-008F-8B48-92A6-B652298478BF}" type="slidenum">
               <a:rPr lang="en-US" smtClean="0"/>
-              <a:t>‹#›</a:t>
             </a:fld>
             <a:endParaRPr lang="en-US"/>
           </a:p>
         </p:txBody>
       </p:sp>
     </p:spTree>
-    <p:extLst>
-      <p:ext uri="{BB962C8B-B14F-4D97-AF65-F5344CB8AC3E}">
-        <p14:creationId xmlns:p14="http://schemas.microsoft.com/office/powerpoint/2010/main" val="2614314258"/>
-      </p:ext>
-    </p:extLst>
   </p:cSld>
   <p:clrMapOvr>
     <a:masterClrMapping/>
@@ -2306,6 +2306,7 @@
               <a:rPr lang="en-US" smtClean="0"/>
               <a:t>Click to edit Master text styles</a:t>
             </a:r>
+            <a:endParaRPr lang="en-US" smtClean="0"/>
           </a:p>
         </p:txBody>
       </p:sp>
@@ -2326,7 +2327,6 @@
           <a:p>
             <a:fld id="{5BCAD085-E8A6-8845-BD4E-CB4CCA059FC4}" type="datetimeFigureOut">
               <a:rPr lang="en-US" smtClean="0"/>
-              <a:t>1/27/13</a:t>
             </a:fld>
             <a:endParaRPr lang="en-US"/>
           </a:p>
@@ -2368,18 +2368,12 @@
           <a:p>
             <a:fld id="{C1FF6DA9-008F-8B48-92A6-B652298478BF}" type="slidenum">
               <a:rPr lang="en-US" smtClean="0"/>
-              <a:t>‹#›</a:t>
             </a:fld>
             <a:endParaRPr lang="en-US"/>
           </a:p>
         </p:txBody>
       </p:sp>
     </p:spTree>
-    <p:extLst>
-      <p:ext uri="{BB962C8B-B14F-4D97-AF65-F5344CB8AC3E}">
-        <p14:creationId xmlns:p14="http://schemas.microsoft.com/office/powerpoint/2010/main" val="960648375"/>
-      </p:ext>
-    </p:extLst>
   </p:cSld>
   <p:clrMapOvr>
     <a:masterClrMapping/>
@@ -2480,6 +2474,7 @@
               <a:rPr lang="en-US" smtClean="0"/>
               <a:t>Click to edit Master text styles</a:t>
             </a:r>
+            <a:endParaRPr lang="en-US" smtClean="0"/>
           </a:p>
           <a:p>
             <a:pPr lvl="1"/>
@@ -2487,6 +2482,7 @@
               <a:rPr lang="en-US" smtClean="0"/>
               <a:t>Second level</a:t>
             </a:r>
+            <a:endParaRPr lang="en-US" smtClean="0"/>
           </a:p>
           <a:p>
             <a:pPr lvl="2"/>
@@ -2494,6 +2490,7 @@
               <a:rPr lang="en-US" smtClean="0"/>
               <a:t>Third level</a:t>
             </a:r>
+            <a:endParaRPr lang="en-US" smtClean="0"/>
           </a:p>
           <a:p>
             <a:pPr lvl="3"/>
@@ -2501,6 +2498,7 @@
               <a:rPr lang="en-US" smtClean="0"/>
               <a:t>Fourth level</a:t>
             </a:r>
+            <a:endParaRPr lang="en-US" smtClean="0"/>
           </a:p>
           <a:p>
             <a:pPr lvl="4"/>
@@ -2565,6 +2563,7 @@
               <a:rPr lang="en-US" smtClean="0"/>
               <a:t>Click to edit Master text styles</a:t>
             </a:r>
+            <a:endParaRPr lang="en-US" smtClean="0"/>
           </a:p>
           <a:p>
             <a:pPr lvl="1"/>
@@ -2572,6 +2571,7 @@
               <a:rPr lang="en-US" smtClean="0"/>
               <a:t>Second level</a:t>
             </a:r>
+            <a:endParaRPr lang="en-US" smtClean="0"/>
           </a:p>
           <a:p>
             <a:pPr lvl="2"/>
@@ -2579,6 +2579,7 @@
               <a:rPr lang="en-US" smtClean="0"/>
               <a:t>Third level</a:t>
             </a:r>
+            <a:endParaRPr lang="en-US" smtClean="0"/>
           </a:p>
           <a:p>
             <a:pPr lvl="3"/>
@@ -2586,6 +2587,7 @@
               <a:rPr lang="en-US" smtClean="0"/>
               <a:t>Fourth level</a:t>
             </a:r>
+            <a:endParaRPr lang="en-US" smtClean="0"/>
           </a:p>
           <a:p>
             <a:pPr lvl="4"/>
@@ -2614,7 +2616,6 @@
           <a:p>
             <a:fld id="{5BCAD085-E8A6-8845-BD4E-CB4CCA059FC4}" type="datetimeFigureOut">
               <a:rPr lang="en-US" smtClean="0"/>
-              <a:t>1/27/13</a:t>
             </a:fld>
             <a:endParaRPr lang="en-US"/>
           </a:p>
@@ -2656,18 +2657,12 @@
           <a:p>
             <a:fld id="{C1FF6DA9-008F-8B48-92A6-B652298478BF}" type="slidenum">
               <a:rPr lang="en-US" smtClean="0"/>
-              <a:t>‹#›</a:t>
             </a:fld>
             <a:endParaRPr lang="en-US"/>
           </a:p>
         </p:txBody>
       </p:sp>
     </p:spTree>
-    <p:extLst>
-      <p:ext uri="{BB962C8B-B14F-4D97-AF65-F5344CB8AC3E}">
-        <p14:creationId xmlns:p14="http://schemas.microsoft.com/office/powerpoint/2010/main" val="2782244947"/>
-      </p:ext>
-    </p:extLst>
   </p:cSld>
   <p:clrMapOvr>
     <a:masterClrMapping/>
@@ -2781,6 +2776,7 @@
               <a:rPr lang="en-US" smtClean="0"/>
               <a:t>Click to edit Master text styles</a:t>
             </a:r>
+            <a:endParaRPr lang="en-US" smtClean="0"/>
           </a:p>
         </p:txBody>
       </p:sp>
@@ -2837,6 +2833,7 @@
               <a:rPr lang="en-US" smtClean="0"/>
               <a:t>Click to edit Master text styles</a:t>
             </a:r>
+            <a:endParaRPr lang="en-US" smtClean="0"/>
           </a:p>
           <a:p>
             <a:pPr lvl="1"/>
@@ -2844,6 +2841,7 @@
               <a:rPr lang="en-US" smtClean="0"/>
               <a:t>Second level</a:t>
             </a:r>
+            <a:endParaRPr lang="en-US" smtClean="0"/>
           </a:p>
           <a:p>
             <a:pPr lvl="2"/>
@@ -2851,6 +2849,7 @@
               <a:rPr lang="en-US" smtClean="0"/>
               <a:t>Third level</a:t>
             </a:r>
+            <a:endParaRPr lang="en-US" smtClean="0"/>
           </a:p>
           <a:p>
             <a:pPr lvl="3"/>
@@ -2858,6 +2857,7 @@
               <a:rPr lang="en-US" smtClean="0"/>
               <a:t>Fourth level</a:t>
             </a:r>
+            <a:endParaRPr lang="en-US" smtClean="0"/>
           </a:p>
           <a:p>
             <a:pPr lvl="4"/>
@@ -2931,6 +2931,7 @@
               <a:rPr lang="en-US" smtClean="0"/>
               <a:t>Click to edit Master text styles</a:t>
             </a:r>
+            <a:endParaRPr lang="en-US" smtClean="0"/>
           </a:p>
         </p:txBody>
       </p:sp>
@@ -2987,6 +2988,7 @@
               <a:rPr lang="en-US" smtClean="0"/>
               <a:t>Click to edit Master text styles</a:t>
             </a:r>
+            <a:endParaRPr lang="en-US" smtClean="0"/>
           </a:p>
           <a:p>
             <a:pPr lvl="1"/>
@@ -2994,6 +2996,7 @@
               <a:rPr lang="en-US" smtClean="0"/>
               <a:t>Second level</a:t>
             </a:r>
+            <a:endParaRPr lang="en-US" smtClean="0"/>
           </a:p>
           <a:p>
             <a:pPr lvl="2"/>
@@ -3001,6 +3004,7 @@
               <a:rPr lang="en-US" smtClean="0"/>
               <a:t>Third level</a:t>
             </a:r>
+            <a:endParaRPr lang="en-US" smtClean="0"/>
           </a:p>
           <a:p>
             <a:pPr lvl="3"/>
@@ -3008,6 +3012,7 @@
               <a:rPr lang="en-US" smtClean="0"/>
               <a:t>Fourth level</a:t>
             </a:r>
+            <a:endParaRPr lang="en-US" smtClean="0"/>
           </a:p>
           <a:p>
             <a:pPr lvl="4"/>
@@ -3036,7 +3041,6 @@
           <a:p>
             <a:fld id="{5BCAD085-E8A6-8845-BD4E-CB4CCA059FC4}" type="datetimeFigureOut">
               <a:rPr lang="en-US" smtClean="0"/>
-              <a:t>1/27/13</a:t>
             </a:fld>
             <a:endParaRPr lang="en-US"/>
           </a:p>
@@ -3078,18 +3082,12 @@
           <a:p>
             <a:fld id="{C1FF6DA9-008F-8B48-92A6-B652298478BF}" type="slidenum">
               <a:rPr lang="en-US" smtClean="0"/>
-              <a:t>‹#›</a:t>
             </a:fld>
             <a:endParaRPr lang="en-US"/>
           </a:p>
         </p:txBody>
       </p:sp>
     </p:spTree>
-    <p:extLst>
-      <p:ext uri="{BB962C8B-B14F-4D97-AF65-F5344CB8AC3E}">
-        <p14:creationId xmlns:p14="http://schemas.microsoft.com/office/powerpoint/2010/main" val="990158736"/>
-      </p:ext>
-    </p:extLst>
   </p:cSld>
   <p:clrMapOvr>
     <a:masterClrMapping/>
@@ -3154,7 +3152,6 @@
           <a:p>
             <a:fld id="{5BCAD085-E8A6-8845-BD4E-CB4CCA059FC4}" type="datetimeFigureOut">
               <a:rPr lang="en-US" smtClean="0"/>
-              <a:t>1/27/13</a:t>
             </a:fld>
             <a:endParaRPr lang="en-US"/>
           </a:p>
@@ -3196,18 +3193,12 @@
           <a:p>
             <a:fld id="{C1FF6DA9-008F-8B48-92A6-B652298478BF}" type="slidenum">
               <a:rPr lang="en-US" smtClean="0"/>
-              <a:t>‹#›</a:t>
             </a:fld>
             <a:endParaRPr lang="en-US"/>
           </a:p>
         </p:txBody>
       </p:sp>
     </p:spTree>
-    <p:extLst>
-      <p:ext uri="{BB962C8B-B14F-4D97-AF65-F5344CB8AC3E}">
-        <p14:creationId xmlns:p14="http://schemas.microsoft.com/office/powerpoint/2010/main" val="727027711"/>
-      </p:ext>
-    </p:extLst>
   </p:cSld>
   <p:clrMapOvr>
     <a:masterClrMapping/>
@@ -3249,7 +3240,6 @@
           <a:p>
             <a:fld id="{5BCAD085-E8A6-8845-BD4E-CB4CCA059FC4}" type="datetimeFigureOut">
               <a:rPr lang="en-US" smtClean="0"/>
-              <a:t>1/27/13</a:t>
             </a:fld>
             <a:endParaRPr lang="en-US"/>
           </a:p>
@@ -3291,18 +3281,12 @@
           <a:p>
             <a:fld id="{C1FF6DA9-008F-8B48-92A6-B652298478BF}" type="slidenum">
               <a:rPr lang="en-US" smtClean="0"/>
-              <a:t>‹#›</a:t>
             </a:fld>
             <a:endParaRPr lang="en-US"/>
           </a:p>
         </p:txBody>
       </p:sp>
     </p:spTree>
-    <p:extLst>
-      <p:ext uri="{BB962C8B-B14F-4D97-AF65-F5344CB8AC3E}">
-        <p14:creationId xmlns:p14="http://schemas.microsoft.com/office/powerpoint/2010/main" val="1212999818"/>
-      </p:ext>
-    </p:extLst>
   </p:cSld>
   <p:clrMapOvr>
     <a:masterClrMapping/>
@@ -3412,6 +3396,7 @@
               <a:rPr lang="en-US" smtClean="0"/>
               <a:t>Click to edit Master text styles</a:t>
             </a:r>
+            <a:endParaRPr lang="en-US" smtClean="0"/>
           </a:p>
           <a:p>
             <a:pPr lvl="1"/>
@@ -3419,6 +3404,7 @@
               <a:rPr lang="en-US" smtClean="0"/>
               <a:t>Second level</a:t>
             </a:r>
+            <a:endParaRPr lang="en-US" smtClean="0"/>
           </a:p>
           <a:p>
             <a:pPr lvl="2"/>
@@ -3426,6 +3412,7 @@
               <a:rPr lang="en-US" smtClean="0"/>
               <a:t>Third level</a:t>
             </a:r>
+            <a:endParaRPr lang="en-US" smtClean="0"/>
           </a:p>
           <a:p>
             <a:pPr lvl="3"/>
@@ -3433,6 +3420,7 @@
               <a:rPr lang="en-US" smtClean="0"/>
               <a:t>Fourth level</a:t>
             </a:r>
+            <a:endParaRPr lang="en-US" smtClean="0"/>
           </a:p>
           <a:p>
             <a:pPr lvl="4"/>
@@ -3506,6 +3494,7 @@
               <a:rPr lang="en-US" smtClean="0"/>
               <a:t>Click to edit Master text styles</a:t>
             </a:r>
+            <a:endParaRPr lang="en-US" smtClean="0"/>
           </a:p>
         </p:txBody>
       </p:sp>
@@ -3526,7 +3515,6 @@
           <a:p>
             <a:fld id="{5BCAD085-E8A6-8845-BD4E-CB4CCA059FC4}" type="datetimeFigureOut">
               <a:rPr lang="en-US" smtClean="0"/>
-              <a:t>1/27/13</a:t>
             </a:fld>
             <a:endParaRPr lang="en-US"/>
           </a:p>
@@ -3568,18 +3556,12 @@
           <a:p>
             <a:fld id="{C1FF6DA9-008F-8B48-92A6-B652298478BF}" type="slidenum">
               <a:rPr lang="en-US" smtClean="0"/>
-              <a:t>‹#›</a:t>
             </a:fld>
             <a:endParaRPr lang="en-US"/>
           </a:p>
         </p:txBody>
       </p:sp>
     </p:spTree>
-    <p:extLst>
-      <p:ext uri="{BB962C8B-B14F-4D97-AF65-F5344CB8AC3E}">
-        <p14:creationId xmlns:p14="http://schemas.microsoft.com/office/powerpoint/2010/main" val="1840726560"/>
-      </p:ext>
-    </p:extLst>
   </p:cSld>
   <p:clrMapOvr>
     <a:masterClrMapping/>
@@ -3759,6 +3741,7 @@
               <a:rPr lang="en-US" smtClean="0"/>
               <a:t>Click to edit Master text styles</a:t>
             </a:r>
+            <a:endParaRPr lang="en-US" smtClean="0"/>
           </a:p>
         </p:txBody>
       </p:sp>
@@ -3779,7 +3762,6 @@
           <a:p>
             <a:fld id="{5BCAD085-E8A6-8845-BD4E-CB4CCA059FC4}" type="datetimeFigureOut">
               <a:rPr lang="en-US" smtClean="0"/>
-              <a:t>1/27/13</a:t>
             </a:fld>
             <a:endParaRPr lang="en-US"/>
           </a:p>
@@ -3821,18 +3803,12 @@
           <a:p>
             <a:fld id="{C1FF6DA9-008F-8B48-92A6-B652298478BF}" type="slidenum">
               <a:rPr lang="en-US" smtClean="0"/>
-              <a:t>‹#›</a:t>
             </a:fld>
             <a:endParaRPr lang="en-US"/>
           </a:p>
         </p:txBody>
       </p:sp>
     </p:spTree>
-    <p:extLst>
-      <p:ext uri="{BB962C8B-B14F-4D97-AF65-F5344CB8AC3E}">
-        <p14:creationId xmlns:p14="http://schemas.microsoft.com/office/powerpoint/2010/main" val="3889236939"/>
-      </p:ext>
-    </p:extLst>
   </p:cSld>
   <p:clrMapOvr>
     <a:masterClrMapping/>
@@ -3925,6 +3901,7 @@
               <a:rPr lang="en-US" smtClean="0"/>
               <a:t>Click to edit Master text styles</a:t>
             </a:r>
+            <a:endParaRPr lang="en-US" smtClean="0"/>
           </a:p>
           <a:p>
             <a:pPr lvl="1"/>
@@ -3932,6 +3909,7 @@
               <a:rPr lang="en-US" smtClean="0"/>
               <a:t>Second level</a:t>
             </a:r>
+            <a:endParaRPr lang="en-US" smtClean="0"/>
           </a:p>
           <a:p>
             <a:pPr lvl="2"/>
@@ -3939,6 +3917,7 @@
               <a:rPr lang="en-US" smtClean="0"/>
               <a:t>Third level</a:t>
             </a:r>
+            <a:endParaRPr lang="en-US" smtClean="0"/>
           </a:p>
           <a:p>
             <a:pPr lvl="3"/>
@@ -3946,6 +3925,7 @@
               <a:rPr lang="en-US" smtClean="0"/>
               <a:t>Fourth level</a:t>
             </a:r>
+            <a:endParaRPr lang="en-US" smtClean="0"/>
           </a:p>
           <a:p>
             <a:pPr lvl="4"/>
@@ -3992,7 +3972,6 @@
           <a:p>
             <a:fld id="{5BCAD085-E8A6-8845-BD4E-CB4CCA059FC4}" type="datetimeFigureOut">
               <a:rPr lang="en-US" smtClean="0"/>
-              <a:t>1/27/13</a:t>
             </a:fld>
             <a:endParaRPr lang="en-US"/>
           </a:p>
@@ -4070,18 +4049,12 @@
           <a:p>
             <a:fld id="{C1FF6DA9-008F-8B48-92A6-B652298478BF}" type="slidenum">
               <a:rPr lang="en-US" smtClean="0"/>
-              <a:t>‹#›</a:t>
             </a:fld>
             <a:endParaRPr lang="en-US"/>
           </a:p>
         </p:txBody>
       </p:sp>
     </p:spTree>
-    <p:extLst>
-      <p:ext uri="{BB962C8B-B14F-4D97-AF65-F5344CB8AC3E}">
-        <p14:creationId xmlns:p14="http://schemas.microsoft.com/office/powerpoint/2010/main" val="2209977519"/>
-      </p:ext>
-    </p:extLst>
   </p:cSld>
   <p:clrMap bg1="lt1" tx1="dk1" bg2="lt2" tx2="dk2" accent1="accent1" accent2="accent2" accent3="accent3" accent4="accent4" accent5="accent5" accent6="accent6" hlink="hlink" folHlink="folHlink"/>
   <p:sldLayoutIdLst>
@@ -4119,7 +4092,7 @@
         <a:spcBef>
           <a:spcPct val="20000"/>
         </a:spcBef>
-        <a:buFont typeface="Arial"/>
+        <a:buFont typeface="Arial" panose="020B0604020202020204"/>
         <a:buChar char="•"/>
         <a:defRPr sz="3200" kern="1200">
           <a:solidFill>
@@ -4134,7 +4107,7 @@
         <a:spcBef>
           <a:spcPct val="20000"/>
         </a:spcBef>
-        <a:buFont typeface="Arial"/>
+        <a:buFont typeface="Arial" panose="020B0604020202020204"/>
         <a:buChar char="–"/>
         <a:defRPr sz="2800" kern="1200">
           <a:solidFill>
@@ -4149,7 +4122,7 @@
         <a:spcBef>
           <a:spcPct val="20000"/>
         </a:spcBef>
-        <a:buFont typeface="Arial"/>
+        <a:buFont typeface="Arial" panose="020B0604020202020204"/>
         <a:buChar char="•"/>
         <a:defRPr sz="2400" kern="1200">
           <a:solidFill>
@@ -4164,7 +4137,7 @@
         <a:spcBef>
           <a:spcPct val="20000"/>
         </a:spcBef>
-        <a:buFont typeface="Arial"/>
+        <a:buFont typeface="Arial" panose="020B0604020202020204"/>
         <a:buChar char="–"/>
         <a:defRPr sz="2000" kern="1200">
           <a:solidFill>
@@ -4179,7 +4152,7 @@
         <a:spcBef>
           <a:spcPct val="20000"/>
         </a:spcBef>
-        <a:buFont typeface="Arial"/>
+        <a:buFont typeface="Arial" panose="020B0604020202020204"/>
         <a:buChar char="»"/>
         <a:defRPr sz="2000" kern="1200">
           <a:solidFill>
@@ -4194,7 +4167,7 @@
         <a:spcBef>
           <a:spcPct val="20000"/>
         </a:spcBef>
-        <a:buFont typeface="Arial"/>
+        <a:buFont typeface="Arial" panose="020B0604020202020204"/>
         <a:buChar char="•"/>
         <a:defRPr sz="2000" kern="1200">
           <a:solidFill>
@@ -4209,7 +4182,7 @@
         <a:spcBef>
           <a:spcPct val="20000"/>
         </a:spcBef>
-        <a:buFont typeface="Arial"/>
+        <a:buFont typeface="Arial" panose="020B0604020202020204"/>
         <a:buChar char="•"/>
         <a:defRPr sz="2000" kern="1200">
           <a:solidFill>
@@ -4224,7 +4197,7 @@
         <a:spcBef>
           <a:spcPct val="20000"/>
         </a:spcBef>
-        <a:buFont typeface="Arial"/>
+        <a:buFont typeface="Arial" panose="020B0604020202020204"/>
         <a:buChar char="•"/>
         <a:defRPr sz="2000" kern="1200">
           <a:solidFill>
@@ -4239,7 +4212,7 @@
         <a:spcBef>
           <a:spcPct val="20000"/>
         </a:spcBef>
-        <a:buFont typeface="Arial"/>
+        <a:buFont typeface="Arial" panose="020B0604020202020204"/>
         <a:buChar char="•"/>
         <a:defRPr sz="2000" kern="1200">
           <a:solidFill>
@@ -4351,7 +4324,7 @@
 </file>
 
 <file path=ppt/slides/slide1.xml><?xml version="1.0" encoding="utf-8"?>
-<p:sld xmlns:a="http://schemas.openxmlformats.org/drawingml/2006/main" xmlns:p="http://schemas.openxmlformats.org/presentationml/2006/main" xmlns:r="http://schemas.openxmlformats.org/officeDocument/2006/relationships">
+<p:sld xmlns:a="http://schemas.openxmlformats.org/drawingml/2006/main" xmlns:r="http://schemas.openxmlformats.org/officeDocument/2006/relationships" xmlns:p="http://schemas.openxmlformats.org/presentationml/2006/main">
   <p:cSld>
     <p:bg>
       <p:bgPr>
@@ -4377,7 +4350,7 @@
           <p:nvPr/>
         </p:nvPicPr>
         <p:blipFill>
-          <a:blip r:embed="rId2"/>
+          <a:blip r:embed="rId1"/>
           <a:stretch>
             <a:fillRect/>
           </a:stretch>
@@ -4506,12 +4479,20 @@
                 <a:solidFill>
                   <a:srgbClr val="3B82F6"/>
                 </a:solidFill>
-                <a:latin typeface="Microsoft YaHei"/>
-                <a:ea typeface="Microsoft YaHei"/>
-                <a:cs typeface="Microsoft YaHei"/>
+                <a:latin typeface="微软雅黑" panose="020B0503020204020204" charset="-122"/>
+                <a:ea typeface="微软雅黑" panose="020B0503020204020204" charset="-122"/>
+                <a:cs typeface="微软雅黑" panose="020B0503020204020204" charset="-122"/>
               </a:rPr>
               <a:t>COURSE PROJECT DEFENSE</a:t>
             </a:r>
+            <a:endParaRPr sz="1200" b="1">
+              <a:solidFill>
+                <a:srgbClr val="3B82F6"/>
+              </a:solidFill>
+              <a:latin typeface="微软雅黑" panose="020B0503020204020204" charset="-122"/>
+              <a:ea typeface="微软雅黑" panose="020B0503020204020204" charset="-122"/>
+              <a:cs typeface="微软雅黑" panose="020B0503020204020204" charset="-122"/>
+            </a:endParaRPr>
           </a:p>
         </p:txBody>
       </p:sp>
@@ -4543,12 +4524,20 @@
                 <a:solidFill>
                   <a:srgbClr val="E8EEF7"/>
                 </a:solidFill>
-                <a:latin typeface="Microsoft YaHei"/>
-                <a:ea typeface="Microsoft YaHei"/>
-                <a:cs typeface="Microsoft YaHei"/>
+                <a:latin typeface="微软雅黑" panose="020B0503020204020204" charset="-122"/>
+                <a:ea typeface="微软雅黑" panose="020B0503020204020204" charset="-122"/>
+                <a:cs typeface="微软雅黑" panose="020B0503020204020204" charset="-122"/>
               </a:rPr>
               <a:t>指挥官战术对抗</a:t>
             </a:r>
+            <a:endParaRPr sz="4000" b="1">
+              <a:solidFill>
+                <a:srgbClr val="E8EEF7"/>
+              </a:solidFill>
+              <a:latin typeface="微软雅黑" panose="020B0503020204020204" charset="-122"/>
+              <a:ea typeface="微软雅黑" panose="020B0503020204020204" charset="-122"/>
+              <a:cs typeface="微软雅黑" panose="020B0503020204020204" charset="-122"/>
+            </a:endParaRPr>
           </a:p>
         </p:txBody>
       </p:sp>
@@ -4580,12 +4569,20 @@
                 <a:solidFill>
                   <a:srgbClr val="8B9BB4"/>
                 </a:solidFill>
-                <a:latin typeface="Microsoft YaHei"/>
-                <a:ea typeface="Microsoft YaHei"/>
-                <a:cs typeface="Microsoft YaHei"/>
+                <a:latin typeface="微软雅黑" panose="020B0503020204020204" charset="-122"/>
+                <a:ea typeface="微软雅黑" panose="020B0503020204020204" charset="-122"/>
+                <a:cs typeface="微软雅黑" panose="020B0503020204020204" charset="-122"/>
               </a:rPr>
               <a:t>基于自然语言指挥的千人战术对抗游戏</a:t>
             </a:r>
+            <a:endParaRPr sz="1600" b="0">
+              <a:solidFill>
+                <a:srgbClr val="8B9BB4"/>
+              </a:solidFill>
+              <a:latin typeface="微软雅黑" panose="020B0503020204020204" charset="-122"/>
+              <a:ea typeface="微软雅黑" panose="020B0503020204020204" charset="-122"/>
+              <a:cs typeface="微软雅黑" panose="020B0503020204020204" charset="-122"/>
+            </a:endParaRPr>
           </a:p>
         </p:txBody>
       </p:sp>
@@ -4617,12 +4614,20 @@
                 <a:solidFill>
                   <a:srgbClr val="2DD4BF"/>
                 </a:solidFill>
-                <a:latin typeface="Microsoft YaHei"/>
-                <a:ea typeface="Microsoft YaHei"/>
-                <a:cs typeface="Microsoft YaHei"/>
+                <a:latin typeface="微软雅黑" panose="020B0503020204020204" charset="-122"/>
+                <a:ea typeface="微软雅黑" panose="020B0503020204020204" charset="-122"/>
+                <a:cs typeface="微软雅黑" panose="020B0503020204020204" charset="-122"/>
               </a:rPr>
               <a:t>Python + Pygame  ·  Windows / Linux  ·  单人对战 AI</a:t>
             </a:r>
+            <a:endParaRPr sz="1300" b="0">
+              <a:solidFill>
+                <a:srgbClr val="2DD4BF"/>
+              </a:solidFill>
+              <a:latin typeface="微软雅黑" panose="020B0503020204020204" charset="-122"/>
+              <a:ea typeface="微软雅黑" panose="020B0503020204020204" charset="-122"/>
+              <a:cs typeface="微软雅黑" panose="020B0503020204020204" charset="-122"/>
+            </a:endParaRPr>
           </a:p>
         </p:txBody>
       </p:sp>
@@ -4701,12 +4706,20 @@
                 <a:solidFill>
                   <a:srgbClr val="8B9BB4"/>
                 </a:solidFill>
-                <a:latin typeface="Microsoft YaHei"/>
-                <a:ea typeface="Microsoft YaHei"/>
-                <a:cs typeface="Microsoft YaHei"/>
+                <a:latin typeface="微软雅黑" panose="020B0503020204020204" charset="-122"/>
+                <a:ea typeface="微软雅黑" panose="020B0503020204020204" charset="-122"/>
+                <a:cs typeface="微软雅黑" panose="020B0503020204020204" charset="-122"/>
               </a:rPr>
               <a:t>小组成员</a:t>
             </a:r>
+            <a:endParaRPr sz="1200" b="0">
+              <a:solidFill>
+                <a:srgbClr val="8B9BB4"/>
+              </a:solidFill>
+              <a:latin typeface="微软雅黑" panose="020B0503020204020204" charset="-122"/>
+              <a:ea typeface="微软雅黑" panose="020B0503020204020204" charset="-122"/>
+              <a:cs typeface="微软雅黑" panose="020B0503020204020204" charset="-122"/>
+            </a:endParaRPr>
           </a:p>
         </p:txBody>
       </p:sp>
@@ -4719,7 +4732,7 @@
         <p:spPr>
           <a:xfrm>
             <a:off x="868680" y="4343400"/>
-            <a:ext cx="5120640" cy="320040"/>
+            <a:ext cx="5120640" cy="306705"/>
           </a:xfrm>
           <a:prstGeom prst="rect">
             <a:avLst/>
@@ -4734,16 +4747,35 @@
           <a:p>
             <a:pPr algn="l"/>
             <a:r>
+              <a:rPr lang="zh-CN" sz="1400" b="1">
+                <a:solidFill>
+                  <a:srgbClr val="E8EEF7"/>
+                </a:solidFill>
+                <a:latin typeface="微软雅黑" panose="020B0503020204020204" charset="-122"/>
+                <a:ea typeface="微软雅黑" panose="020B0503020204020204" charset="-122"/>
+                <a:cs typeface="微软雅黑" panose="020B0503020204020204" charset="-122"/>
+              </a:rPr>
+              <a:t>赵凯旋</a:t>
+            </a:r>
+            <a:r>
               <a:rPr sz="1400" b="1">
                 <a:solidFill>
                   <a:srgbClr val="E8EEF7"/>
                 </a:solidFill>
-                <a:latin typeface="Microsoft YaHei"/>
-                <a:ea typeface="Microsoft YaHei"/>
-                <a:cs typeface="Microsoft YaHei"/>
-              </a:rPr>
-              <a:t>组员一 ｜ 模拟、性能与工程实现</a:t>
-            </a:r>
+                <a:latin typeface="微软雅黑" panose="020B0503020204020204" charset="-122"/>
+                <a:ea typeface="微软雅黑" panose="020B0503020204020204" charset="-122"/>
+                <a:cs typeface="微软雅黑" panose="020B0503020204020204" charset="-122"/>
+              </a:rPr>
+              <a:t> ｜ 模拟、性能与工程实现</a:t>
+            </a:r>
+            <a:endParaRPr sz="1400" b="1">
+              <a:solidFill>
+                <a:srgbClr val="E8EEF7"/>
+              </a:solidFill>
+              <a:latin typeface="微软雅黑" panose="020B0503020204020204" charset="-122"/>
+              <a:ea typeface="微软雅黑" panose="020B0503020204020204" charset="-122"/>
+              <a:cs typeface="微软雅黑" panose="020B0503020204020204" charset="-122"/>
+            </a:endParaRPr>
           </a:p>
         </p:txBody>
       </p:sp>
@@ -4756,7 +4788,7 @@
         <p:spPr>
           <a:xfrm>
             <a:off x="868680" y="4754880"/>
-            <a:ext cx="5120640" cy="320040"/>
+            <a:ext cx="5120640" cy="306705"/>
           </a:xfrm>
           <a:prstGeom prst="rect">
             <a:avLst/>
@@ -4771,16 +4803,35 @@
           <a:p>
             <a:pPr algn="l"/>
             <a:r>
+              <a:rPr lang="zh-CN" sz="1400" b="1">
+                <a:solidFill>
+                  <a:srgbClr val="E8EEF7"/>
+                </a:solidFill>
+                <a:latin typeface="微软雅黑" panose="020B0503020204020204" charset="-122"/>
+                <a:ea typeface="微软雅黑" panose="020B0503020204020204" charset="-122"/>
+                <a:cs typeface="微软雅黑" panose="020B0503020204020204" charset="-122"/>
+              </a:rPr>
+              <a:t>卞蕴翰</a:t>
+            </a:r>
+            <a:r>
               <a:rPr sz="1400" b="1">
                 <a:solidFill>
                   <a:srgbClr val="E8EEF7"/>
                 </a:solidFill>
-                <a:latin typeface="Microsoft YaHei"/>
-                <a:ea typeface="Microsoft YaHei"/>
-                <a:cs typeface="Microsoft YaHei"/>
-              </a:rPr>
-              <a:t>组员二 ｜ 交互、地图与智能系统</a:t>
-            </a:r>
+                <a:latin typeface="微软雅黑" panose="020B0503020204020204" charset="-122"/>
+                <a:ea typeface="微软雅黑" panose="020B0503020204020204" charset="-122"/>
+                <a:cs typeface="微软雅黑" panose="020B0503020204020204" charset="-122"/>
+              </a:rPr>
+              <a:t> ｜ 交互、地图与智能系统</a:t>
+            </a:r>
+            <a:endParaRPr sz="1400" b="1">
+              <a:solidFill>
+                <a:srgbClr val="E8EEF7"/>
+              </a:solidFill>
+              <a:latin typeface="微软雅黑" panose="020B0503020204020204" charset="-122"/>
+              <a:ea typeface="微软雅黑" panose="020B0503020204020204" charset="-122"/>
+              <a:cs typeface="微软雅黑" panose="020B0503020204020204" charset="-122"/>
+            </a:endParaRPr>
           </a:p>
         </p:txBody>
       </p:sp>
@@ -4812,12 +4863,20 @@
                 <a:solidFill>
                   <a:srgbClr val="8B9BB4"/>
                 </a:solidFill>
-                <a:latin typeface="Microsoft YaHei"/>
-                <a:ea typeface="Microsoft YaHei"/>
-                <a:cs typeface="Microsoft YaHei"/>
+                <a:latin typeface="微软雅黑" panose="020B0503020204020204" charset="-122"/>
+                <a:ea typeface="微软雅黑" panose="020B0503020204020204" charset="-122"/>
+                <a:cs typeface="微软雅黑" panose="020B0503020204020204" charset="-122"/>
               </a:rPr>
               <a:t>2026 · 小组作业答辩</a:t>
             </a:r>
+            <a:endParaRPr sz="1200" b="0">
+              <a:solidFill>
+                <a:srgbClr val="8B9BB4"/>
+              </a:solidFill>
+              <a:latin typeface="微软雅黑" panose="020B0503020204020204" charset="-122"/>
+              <a:ea typeface="微软雅黑" panose="020B0503020204020204" charset="-122"/>
+              <a:cs typeface="微软雅黑" panose="020B0503020204020204" charset="-122"/>
+            </a:endParaRPr>
           </a:p>
         </p:txBody>
       </p:sp>
@@ -4830,7 +4889,7 @@
 </file>
 
 <file path=ppt/slides/slide10.xml><?xml version="1.0" encoding="utf-8"?>
-<p:sld xmlns:a="http://schemas.openxmlformats.org/drawingml/2006/main" xmlns:p="http://schemas.openxmlformats.org/presentationml/2006/main" xmlns:r="http://schemas.openxmlformats.org/officeDocument/2006/relationships">
+<p:sld xmlns:a="http://schemas.openxmlformats.org/drawingml/2006/main" xmlns:r="http://schemas.openxmlformats.org/officeDocument/2006/relationships" xmlns:p="http://schemas.openxmlformats.org/presentationml/2006/main">
   <p:cSld>
     <p:bg>
       <p:bgPr>
@@ -4875,12 +4934,20 @@
                 <a:solidFill>
                   <a:srgbClr val="E8EEF7"/>
                 </a:solidFill>
-                <a:latin typeface="Microsoft YaHei"/>
-                <a:ea typeface="Microsoft YaHei"/>
-                <a:cs typeface="Microsoft YaHei"/>
+                <a:latin typeface="微软雅黑" panose="020B0503020204020204" charset="-122"/>
+                <a:ea typeface="微软雅黑" panose="020B0503020204020204" charset="-122"/>
+                <a:cs typeface="微软雅黑" panose="020B0503020204020204" charset="-122"/>
               </a:rPr>
               <a:t>团队协作：主责模块 + 交叉评审 + 阶段集成</a:t>
             </a:r>
+            <a:endParaRPr sz="2800" b="1">
+              <a:solidFill>
+                <a:srgbClr val="E8EEF7"/>
+              </a:solidFill>
+              <a:latin typeface="微软雅黑" panose="020B0503020204020204" charset="-122"/>
+              <a:ea typeface="微软雅黑" panose="020B0503020204020204" charset="-122"/>
+              <a:cs typeface="微软雅黑" panose="020B0503020204020204" charset="-122"/>
+            </a:endParaRPr>
           </a:p>
         </p:txBody>
       </p:sp>
@@ -4983,7 +5050,7 @@
         <p:spPr>
           <a:xfrm>
             <a:off x="731520" y="1289304"/>
-            <a:ext cx="5120640" cy="320040"/>
+            <a:ext cx="5120640" cy="306705"/>
           </a:xfrm>
           <a:prstGeom prst="rect">
             <a:avLst/>
@@ -4998,16 +5065,35 @@
           <a:p>
             <a:pPr algn="l"/>
             <a:r>
+              <a:rPr lang="zh-CN" sz="1400" b="1">
+                <a:solidFill>
+                  <a:srgbClr val="E8EEF7"/>
+                </a:solidFill>
+                <a:latin typeface="微软雅黑" panose="020B0503020204020204" charset="-122"/>
+                <a:ea typeface="微软雅黑" panose="020B0503020204020204" charset="-122"/>
+                <a:cs typeface="微软雅黑" panose="020B0503020204020204" charset="-122"/>
+              </a:rPr>
+              <a:t>赵凯旋</a:t>
+            </a:r>
+            <a:r>
               <a:rPr sz="1400" b="1">
                 <a:solidFill>
                   <a:srgbClr val="E8EEF7"/>
                 </a:solidFill>
-                <a:latin typeface="Microsoft YaHei"/>
-                <a:ea typeface="Microsoft YaHei"/>
-                <a:cs typeface="Microsoft YaHei"/>
-              </a:rPr>
-              <a:t>组员一｜模拟与性能</a:t>
-            </a:r>
+                <a:latin typeface="微软雅黑" panose="020B0503020204020204" charset="-122"/>
+                <a:ea typeface="微软雅黑" panose="020B0503020204020204" charset="-122"/>
+                <a:cs typeface="微软雅黑" panose="020B0503020204020204" charset="-122"/>
+              </a:rPr>
+              <a:t>｜模拟与性能</a:t>
+            </a:r>
+            <a:endParaRPr sz="1400" b="1">
+              <a:solidFill>
+                <a:srgbClr val="E8EEF7"/>
+              </a:solidFill>
+              <a:latin typeface="微软雅黑" panose="020B0503020204020204" charset="-122"/>
+              <a:ea typeface="微软雅黑" panose="020B0503020204020204" charset="-122"/>
+              <a:cs typeface="微软雅黑" panose="020B0503020204020204" charset="-122"/>
+            </a:endParaRPr>
           </a:p>
         </p:txBody>
       </p:sp>
@@ -5039,9 +5125,9 @@
                 <a:solidFill>
                   <a:srgbClr val="8B9BB4"/>
                 </a:solidFill>
-                <a:latin typeface="Microsoft YaHei"/>
-                <a:ea typeface="Microsoft YaHei"/>
-                <a:cs typeface="Microsoft YaHei"/>
+                <a:latin typeface="微软雅黑" panose="020B0503020204020204" charset="-122"/>
+                <a:ea typeface="微软雅黑" panose="020B0503020204020204" charset="-122"/>
+                <a:cs typeface="微软雅黑" panose="020B0503020204020204" charset="-122"/>
               </a:rPr>
               <a:t>· 固定时间步、实体模型与配置
 · 移动 / 流场寻路 / 弹性碰撞
@@ -5050,6 +5136,14 @@
 · 存档回放底层与性能基准
 · 测试：确定性、碰撞、500v500 长压</a:t>
             </a:r>
+            <a:endParaRPr sz="1300" b="0">
+              <a:solidFill>
+                <a:srgbClr val="8B9BB4"/>
+              </a:solidFill>
+              <a:latin typeface="微软雅黑" panose="020B0503020204020204" charset="-122"/>
+              <a:ea typeface="微软雅黑" panose="020B0503020204020204" charset="-122"/>
+              <a:cs typeface="微软雅黑" panose="020B0503020204020204" charset="-122"/>
+            </a:endParaRPr>
           </a:p>
         </p:txBody>
       </p:sp>
@@ -5152,7 +5246,7 @@
         <p:spPr>
           <a:xfrm>
             <a:off x="6446520" y="1289304"/>
-            <a:ext cx="5074920" cy="320040"/>
+            <a:ext cx="5074920" cy="306705"/>
           </a:xfrm>
           <a:prstGeom prst="rect">
             <a:avLst/>
@@ -5167,16 +5261,35 @@
           <a:p>
             <a:pPr algn="l"/>
             <a:r>
+              <a:rPr lang="zh-CN" sz="1400" b="1">
+                <a:solidFill>
+                  <a:srgbClr val="E8EEF7"/>
+                </a:solidFill>
+                <a:latin typeface="微软雅黑" panose="020B0503020204020204" charset="-122"/>
+                <a:ea typeface="微软雅黑" panose="020B0503020204020204" charset="-122"/>
+                <a:cs typeface="微软雅黑" panose="020B0503020204020204" charset="-122"/>
+              </a:rPr>
+              <a:t>卞蕴翰</a:t>
+            </a:r>
+            <a:r>
               <a:rPr sz="1400" b="1">
                 <a:solidFill>
                   <a:srgbClr val="E8EEF7"/>
                 </a:solidFill>
-                <a:latin typeface="Microsoft YaHei"/>
-                <a:ea typeface="Microsoft YaHei"/>
-                <a:cs typeface="Microsoft YaHei"/>
-              </a:rPr>
-              <a:t>组员二｜交互与智能</a:t>
-            </a:r>
+                <a:latin typeface="微软雅黑" panose="020B0503020204020204" charset="-122"/>
+                <a:ea typeface="微软雅黑" panose="020B0503020204020204" charset="-122"/>
+                <a:cs typeface="微软雅黑" panose="020B0503020204020204" charset="-122"/>
+              </a:rPr>
+              <a:t>｜交互与智能</a:t>
+            </a:r>
+            <a:endParaRPr sz="1400" b="1">
+              <a:solidFill>
+                <a:srgbClr val="E8EEF7"/>
+              </a:solidFill>
+              <a:latin typeface="微软雅黑" panose="020B0503020204020204" charset="-122"/>
+              <a:ea typeface="微软雅黑" panose="020B0503020204020204" charset="-122"/>
+              <a:cs typeface="微软雅黑" panose="020B0503020204020204" charset="-122"/>
+            </a:endParaRPr>
           </a:p>
         </p:txBody>
       </p:sp>
@@ -5208,9 +5321,9 @@
                 <a:solidFill>
                   <a:srgbClr val="8B9BB4"/>
                 </a:solidFill>
-                <a:latin typeface="Microsoft YaHei"/>
-                <a:ea typeface="Microsoft YaHei"/>
-                <a:cs typeface="Microsoft YaHei"/>
+                <a:latin typeface="微软雅黑" panose="020B0503020204020204" charset="-122"/>
+                <a:ea typeface="微软雅黑" panose="020B0503020204020204" charset="-122"/>
+                <a:cs typeface="微软雅黑" panose="020B0503020204020204" charset="-122"/>
               </a:rPr>
               <a:t>· Pygame 外壳、场景与摄像机
 · HUD、菜单、缩略图与教程入口
@@ -5219,6 +5332,14 @@
 · 语音/大模型适配与离线降级
 · 测试：命令解析、信息泄漏、地图公平</a:t>
             </a:r>
+            <a:endParaRPr sz="1300" b="0">
+              <a:solidFill>
+                <a:srgbClr val="8B9BB4"/>
+              </a:solidFill>
+              <a:latin typeface="微软雅黑" panose="020B0503020204020204" charset="-122"/>
+              <a:ea typeface="微软雅黑" panose="020B0503020204020204" charset="-122"/>
+              <a:cs typeface="微软雅黑" panose="020B0503020204020204" charset="-122"/>
+            </a:endParaRPr>
           </a:p>
         </p:txBody>
       </p:sp>
@@ -5297,12 +5418,20 @@
                 <a:solidFill>
                   <a:srgbClr val="3B82F6"/>
                 </a:solidFill>
-                <a:latin typeface="Microsoft YaHei"/>
-                <a:ea typeface="Microsoft YaHei"/>
-                <a:cs typeface="Microsoft YaHei"/>
+                <a:latin typeface="微软雅黑" panose="020B0503020204020204" charset="-122"/>
+                <a:ea typeface="微软雅黑" panose="020B0503020204020204" charset="-122"/>
+                <a:cs typeface="微软雅黑" panose="020B0503020204020204" charset="-122"/>
               </a:rPr>
               <a:t>协作机制</a:t>
             </a:r>
+            <a:endParaRPr sz="1400" b="1">
+              <a:solidFill>
+                <a:srgbClr val="3B82F6"/>
+              </a:solidFill>
+              <a:latin typeface="微软雅黑" panose="020B0503020204020204" charset="-122"/>
+              <a:ea typeface="微软雅黑" panose="020B0503020204020204" charset="-122"/>
+              <a:cs typeface="微软雅黑" panose="020B0503020204020204" charset="-122"/>
+            </a:endParaRPr>
           </a:p>
         </p:txBody>
       </p:sp>
@@ -5338,12 +5467,20 @@
                 <a:solidFill>
                   <a:srgbClr val="E8EEF7"/>
                 </a:solidFill>
-                <a:latin typeface="Microsoft YaHei"/>
-                <a:ea typeface="Microsoft YaHei"/>
-                <a:cs typeface="Microsoft YaHei"/>
+                <a:latin typeface="微软雅黑" panose="020B0503020204020204" charset="-122"/>
+                <a:ea typeface="微软雅黑" panose="020B0503020204020204" charset="-122"/>
+                <a:cs typeface="微软雅黑" panose="020B0503020204020204" charset="-122"/>
               </a:rPr>
               <a:t>▸  主责模块清晰，避免两人同时改核心文件</a:t>
             </a:r>
+            <a:endParaRPr sz="1400" b="0">
+              <a:solidFill>
+                <a:srgbClr val="E8EEF7"/>
+              </a:solidFill>
+              <a:latin typeface="微软雅黑" panose="020B0503020204020204" charset="-122"/>
+              <a:ea typeface="微软雅黑" panose="020B0503020204020204" charset="-122"/>
+              <a:cs typeface="微软雅黑" panose="020B0503020204020204" charset="-122"/>
+            </a:endParaRPr>
           </a:p>
           <a:p>
             <a:pPr>
@@ -5356,12 +5493,20 @@
                 <a:solidFill>
                   <a:srgbClr val="E8EEF7"/>
                 </a:solidFill>
-                <a:latin typeface="Microsoft YaHei"/>
-                <a:ea typeface="Microsoft YaHei"/>
-                <a:cs typeface="Microsoft YaHei"/>
+                <a:latin typeface="微软雅黑" panose="020B0503020204020204" charset="-122"/>
+                <a:ea typeface="微软雅黑" panose="020B0503020204020204" charset="-122"/>
+                <a:cs typeface="微软雅黑" panose="020B0503020204020204" charset="-122"/>
               </a:rPr>
               <a:t>▸  公共协议 / 存档格式 / 主循环变更需双方评审</a:t>
             </a:r>
+            <a:endParaRPr sz="1400" b="0">
+              <a:solidFill>
+                <a:srgbClr val="E8EEF7"/>
+              </a:solidFill>
+              <a:latin typeface="微软雅黑" panose="020B0503020204020204" charset="-122"/>
+              <a:ea typeface="微软雅黑" panose="020B0503020204020204" charset="-122"/>
+              <a:cs typeface="微软雅黑" panose="020B0503020204020204" charset="-122"/>
+            </a:endParaRPr>
           </a:p>
           <a:p>
             <a:pPr>
@@ -5374,12 +5519,20 @@
                 <a:solidFill>
                   <a:srgbClr val="E8EEF7"/>
                 </a:solidFill>
-                <a:latin typeface="Microsoft YaHei"/>
-                <a:ea typeface="Microsoft YaHei"/>
-                <a:cs typeface="Microsoft YaHei"/>
+                <a:latin typeface="微软雅黑" panose="020B0503020204020204" charset="-122"/>
+                <a:ea typeface="微软雅黑" panose="020B0503020204020204" charset="-122"/>
+                <a:cs typeface="微软雅黑" panose="020B0503020204020204" charset="-122"/>
               </a:rPr>
               <a:t>▸  每个内部阶段都产出可运行集成版本</a:t>
             </a:r>
+            <a:endParaRPr sz="1400" b="0">
+              <a:solidFill>
+                <a:srgbClr val="E8EEF7"/>
+              </a:solidFill>
+              <a:latin typeface="微软雅黑" panose="020B0503020204020204" charset="-122"/>
+              <a:ea typeface="微软雅黑" panose="020B0503020204020204" charset="-122"/>
+              <a:cs typeface="微软雅黑" panose="020B0503020204020204" charset="-122"/>
+            </a:endParaRPr>
           </a:p>
           <a:p>
             <a:pPr>
@@ -5392,12 +5545,20 @@
                 <a:solidFill>
                   <a:srgbClr val="E8EEF7"/>
                 </a:solidFill>
-                <a:latin typeface="Microsoft YaHei"/>
-                <a:ea typeface="Microsoft YaHei"/>
-                <a:cs typeface="Microsoft YaHei"/>
+                <a:latin typeface="微软雅黑" panose="020B0503020204020204" charset="-122"/>
+                <a:ea typeface="微软雅黑" panose="020B0503020204020204" charset="-122"/>
+                <a:cs typeface="微软雅黑" panose="020B0503020204020204" charset="-122"/>
               </a:rPr>
               <a:t>▸  共同负责：玩法规则、公平性审计、跨平台发布</a:t>
             </a:r>
+            <a:endParaRPr sz="1400" b="0">
+              <a:solidFill>
+                <a:srgbClr val="E8EEF7"/>
+              </a:solidFill>
+              <a:latin typeface="微软雅黑" panose="020B0503020204020204" charset="-122"/>
+              <a:ea typeface="微软雅黑" panose="020B0503020204020204" charset="-122"/>
+              <a:cs typeface="微软雅黑" panose="020B0503020204020204" charset="-122"/>
+            </a:endParaRPr>
           </a:p>
         </p:txBody>
       </p:sp>
@@ -5472,12 +5633,20 @@
                 <a:solidFill>
                   <a:srgbClr val="8B9BB4"/>
                 </a:solidFill>
-                <a:latin typeface="Microsoft YaHei"/>
-                <a:ea typeface="Microsoft YaHei"/>
-                <a:cs typeface="Microsoft YaHei"/>
+                <a:latin typeface="微软雅黑" panose="020B0503020204020204" charset="-122"/>
+                <a:ea typeface="微软雅黑" panose="020B0503020204020204" charset="-122"/>
+                <a:cs typeface="微软雅黑" panose="020B0503020204020204" charset="-122"/>
               </a:rPr>
               <a:t>小组作业答辩 · 指挥官战术对抗</a:t>
             </a:r>
+            <a:endParaRPr sz="1000" b="0">
+              <a:solidFill>
+                <a:srgbClr val="8B9BB4"/>
+              </a:solidFill>
+              <a:latin typeface="微软雅黑" panose="020B0503020204020204" charset="-122"/>
+              <a:ea typeface="微软雅黑" panose="020B0503020204020204" charset="-122"/>
+              <a:cs typeface="微软雅黑" panose="020B0503020204020204" charset="-122"/>
+            </a:endParaRPr>
           </a:p>
         </p:txBody>
       </p:sp>
@@ -5509,12 +5678,20 @@
                 <a:solidFill>
                   <a:srgbClr val="8B9BB4"/>
                 </a:solidFill>
-                <a:latin typeface="Microsoft YaHei"/>
-                <a:ea typeface="Microsoft YaHei"/>
-                <a:cs typeface="Microsoft YaHei"/>
+                <a:latin typeface="微软雅黑" panose="020B0503020204020204" charset="-122"/>
+                <a:ea typeface="微软雅黑" panose="020B0503020204020204" charset="-122"/>
+                <a:cs typeface="微软雅黑" panose="020B0503020204020204" charset="-122"/>
               </a:rPr>
               <a:t>10 / 13</a:t>
             </a:r>
+            <a:endParaRPr sz="1000" b="0">
+              <a:solidFill>
+                <a:srgbClr val="8B9BB4"/>
+              </a:solidFill>
+              <a:latin typeface="微软雅黑" panose="020B0503020204020204" charset="-122"/>
+              <a:ea typeface="微软雅黑" panose="020B0503020204020204" charset="-122"/>
+              <a:cs typeface="微软雅黑" panose="020B0503020204020204" charset="-122"/>
+            </a:endParaRPr>
           </a:p>
         </p:txBody>
       </p:sp>
@@ -5527,7 +5704,7 @@
 </file>
 
 <file path=ppt/slides/slide11.xml><?xml version="1.0" encoding="utf-8"?>
-<p:sld xmlns:a="http://schemas.openxmlformats.org/drawingml/2006/main" xmlns:p="http://schemas.openxmlformats.org/presentationml/2006/main" xmlns:r="http://schemas.openxmlformats.org/officeDocument/2006/relationships">
+<p:sld xmlns:a="http://schemas.openxmlformats.org/drawingml/2006/main" xmlns:r="http://schemas.openxmlformats.org/officeDocument/2006/relationships" xmlns:p="http://schemas.openxmlformats.org/presentationml/2006/main">
   <p:cSld>
     <p:bg>
       <p:bgPr>
@@ -5572,12 +5749,20 @@
                 <a:solidFill>
                   <a:srgbClr val="E8EEF7"/>
                 </a:solidFill>
-                <a:latin typeface="Microsoft YaHei"/>
-                <a:ea typeface="Microsoft YaHei"/>
-                <a:cs typeface="Microsoft YaHei"/>
+                <a:latin typeface="微软雅黑" panose="020B0503020204020204" charset="-122"/>
+                <a:ea typeface="微软雅黑" panose="020B0503020204020204" charset="-122"/>
+                <a:cs typeface="微软雅黑" panose="020B0503020204020204" charset="-122"/>
               </a:rPr>
               <a:t>成果与验证：可完整游玩，且有自动化检查</a:t>
             </a:r>
+            <a:endParaRPr sz="2800" b="1">
+              <a:solidFill>
+                <a:srgbClr val="E8EEF7"/>
+              </a:solidFill>
+              <a:latin typeface="微软雅黑" panose="020B0503020204020204" charset="-122"/>
+              <a:ea typeface="微软雅黑" panose="020B0503020204020204" charset="-122"/>
+              <a:cs typeface="微软雅黑" panose="020B0503020204020204" charset="-122"/>
+            </a:endParaRPr>
           </a:p>
         </p:txBody>
       </p:sp>
@@ -5656,12 +5841,20 @@
                 <a:solidFill>
                   <a:srgbClr val="2DD4BF"/>
                 </a:solidFill>
-                <a:latin typeface="Microsoft YaHei"/>
-                <a:ea typeface="Microsoft YaHei"/>
-                <a:cs typeface="Microsoft YaHei"/>
+                <a:latin typeface="微软雅黑" panose="020B0503020204020204" charset="-122"/>
+                <a:ea typeface="微软雅黑" panose="020B0503020204020204" charset="-122"/>
+                <a:cs typeface="微软雅黑" panose="020B0503020204020204" charset="-122"/>
               </a:rPr>
               <a:t>完整对局</a:t>
             </a:r>
+            <a:endParaRPr sz="1600" b="1">
+              <a:solidFill>
+                <a:srgbClr val="2DD4BF"/>
+              </a:solidFill>
+              <a:latin typeface="微软雅黑" panose="020B0503020204020204" charset="-122"/>
+              <a:ea typeface="微软雅黑" panose="020B0503020204020204" charset="-122"/>
+              <a:cs typeface="微软雅黑" panose="020B0503020204020204" charset="-122"/>
+            </a:endParaRPr>
           </a:p>
         </p:txBody>
       </p:sp>
@@ -5693,12 +5886,20 @@
                 <a:solidFill>
                   <a:srgbClr val="8B9BB4"/>
                 </a:solidFill>
-                <a:latin typeface="Microsoft YaHei"/>
-                <a:ea typeface="Microsoft YaHei"/>
-                <a:cs typeface="Microsoft YaHei"/>
+                <a:latin typeface="微软雅黑" panose="020B0503020204020204" charset="-122"/>
+                <a:ea typeface="微软雅黑" panose="020B0503020204020204" charset="-122"/>
+                <a:cs typeface="微软雅黑" panose="020B0503020204020204" charset="-122"/>
               </a:rPr>
               <a:t>配置 → 对战 → 结算可闭环</a:t>
             </a:r>
+            <a:endParaRPr sz="1200" b="0">
+              <a:solidFill>
+                <a:srgbClr val="8B9BB4"/>
+              </a:solidFill>
+              <a:latin typeface="微软雅黑" panose="020B0503020204020204" charset="-122"/>
+              <a:ea typeface="微软雅黑" panose="020B0503020204020204" charset="-122"/>
+              <a:cs typeface="微软雅黑" panose="020B0503020204020204" charset="-122"/>
+            </a:endParaRPr>
           </a:p>
         </p:txBody>
       </p:sp>
@@ -5777,12 +5978,20 @@
                 <a:solidFill>
                   <a:srgbClr val="3B82F6"/>
                 </a:solidFill>
-                <a:latin typeface="Microsoft YaHei"/>
-                <a:ea typeface="Microsoft YaHei"/>
-                <a:cs typeface="Microsoft YaHei"/>
+                <a:latin typeface="微软雅黑" panose="020B0503020204020204" charset="-122"/>
+                <a:ea typeface="微软雅黑" panose="020B0503020204020204" charset="-122"/>
+                <a:cs typeface="微软雅黑" panose="020B0503020204020204" charset="-122"/>
               </a:rPr>
               <a:t>测试</a:t>
             </a:r>
+            <a:endParaRPr sz="1600" b="1">
+              <a:solidFill>
+                <a:srgbClr val="3B82F6"/>
+              </a:solidFill>
+              <a:latin typeface="微软雅黑" panose="020B0503020204020204" charset="-122"/>
+              <a:ea typeface="微软雅黑" panose="020B0503020204020204" charset="-122"/>
+              <a:cs typeface="微软雅黑" panose="020B0503020204020204" charset="-122"/>
+            </a:endParaRPr>
           </a:p>
         </p:txBody>
       </p:sp>
@@ -5814,12 +6023,20 @@
                 <a:solidFill>
                   <a:srgbClr val="8B9BB4"/>
                 </a:solidFill>
-                <a:latin typeface="Microsoft YaHei"/>
-                <a:ea typeface="Microsoft YaHei"/>
-                <a:cs typeface="Microsoft YaHei"/>
+                <a:latin typeface="微软雅黑" panose="020B0503020204020204" charset="-122"/>
+                <a:ea typeface="微软雅黑" panose="020B0503020204020204" charset="-122"/>
+                <a:cs typeface="微软雅黑" panose="020B0503020204020204" charset="-122"/>
               </a:rPr>
               <a:t>单元 / 集成 / 性能 pytest</a:t>
             </a:r>
+            <a:endParaRPr sz="1200" b="0">
+              <a:solidFill>
+                <a:srgbClr val="8B9BB4"/>
+              </a:solidFill>
+              <a:latin typeface="微软雅黑" panose="020B0503020204020204" charset="-122"/>
+              <a:ea typeface="微软雅黑" panose="020B0503020204020204" charset="-122"/>
+              <a:cs typeface="微软雅黑" panose="020B0503020204020204" charset="-122"/>
+            </a:endParaRPr>
           </a:p>
         </p:txBody>
       </p:sp>
@@ -5898,12 +6115,20 @@
                 <a:solidFill>
                   <a:srgbClr val="D97706"/>
                 </a:solidFill>
-                <a:latin typeface="Microsoft YaHei"/>
-                <a:ea typeface="Microsoft YaHei"/>
-                <a:cs typeface="Microsoft YaHei"/>
+                <a:latin typeface="微软雅黑" panose="020B0503020204020204" charset="-122"/>
+                <a:ea typeface="微软雅黑" panose="020B0503020204020204" charset="-122"/>
+                <a:cs typeface="微软雅黑" panose="020B0503020204020204" charset="-122"/>
               </a:rPr>
               <a:t>静态检查</a:t>
             </a:r>
+            <a:endParaRPr sz="1600" b="1">
+              <a:solidFill>
+                <a:srgbClr val="D97706"/>
+              </a:solidFill>
+              <a:latin typeface="微软雅黑" panose="020B0503020204020204" charset="-122"/>
+              <a:ea typeface="微软雅黑" panose="020B0503020204020204" charset="-122"/>
+              <a:cs typeface="微软雅黑" panose="020B0503020204020204" charset="-122"/>
+            </a:endParaRPr>
           </a:p>
         </p:txBody>
       </p:sp>
@@ -5935,12 +6160,20 @@
                 <a:solidFill>
                   <a:srgbClr val="8B9BB4"/>
                 </a:solidFill>
-                <a:latin typeface="Microsoft YaHei"/>
-                <a:ea typeface="Microsoft YaHei"/>
-                <a:cs typeface="Microsoft YaHei"/>
+                <a:latin typeface="微软雅黑" panose="020B0503020204020204" charset="-122"/>
+                <a:ea typeface="微软雅黑" panose="020B0503020204020204" charset="-122"/>
+                <a:cs typeface="微软雅黑" panose="020B0503020204020204" charset="-122"/>
               </a:rPr>
               <a:t>ruff + mypy strict</a:t>
             </a:r>
+            <a:endParaRPr sz="1200" b="0">
+              <a:solidFill>
+                <a:srgbClr val="8B9BB4"/>
+              </a:solidFill>
+              <a:latin typeface="微软雅黑" panose="020B0503020204020204" charset="-122"/>
+              <a:ea typeface="微软雅黑" panose="020B0503020204020204" charset="-122"/>
+              <a:cs typeface="微软雅黑" panose="020B0503020204020204" charset="-122"/>
+            </a:endParaRPr>
           </a:p>
         </p:txBody>
       </p:sp>
@@ -6019,12 +6252,20 @@
                 <a:solidFill>
                   <a:srgbClr val="E85D4C"/>
                 </a:solidFill>
-                <a:latin typeface="Microsoft YaHei"/>
-                <a:ea typeface="Microsoft YaHei"/>
-                <a:cs typeface="Microsoft YaHei"/>
+                <a:latin typeface="微软雅黑" panose="020B0503020204020204" charset="-122"/>
+                <a:ea typeface="微软雅黑" panose="020B0503020204020204" charset="-122"/>
+                <a:cs typeface="微软雅黑" panose="020B0503020204020204" charset="-122"/>
               </a:rPr>
               <a:t>长压</a:t>
             </a:r>
+            <a:endParaRPr sz="1600" b="1">
+              <a:solidFill>
+                <a:srgbClr val="E85D4C"/>
+              </a:solidFill>
+              <a:latin typeface="微软雅黑" panose="020B0503020204020204" charset="-122"/>
+              <a:ea typeface="微软雅黑" panose="020B0503020204020204" charset="-122"/>
+              <a:cs typeface="微软雅黑" panose="020B0503020204020204" charset="-122"/>
+            </a:endParaRPr>
           </a:p>
         </p:txBody>
       </p:sp>
@@ -6056,12 +6297,20 @@
                 <a:solidFill>
                   <a:srgbClr val="8B9BB4"/>
                 </a:solidFill>
-                <a:latin typeface="Microsoft YaHei"/>
-                <a:ea typeface="Microsoft YaHei"/>
-                <a:cs typeface="Microsoft YaHei"/>
+                <a:latin typeface="微软雅黑" panose="020B0503020204020204" charset="-122"/>
+                <a:ea typeface="微软雅黑" panose="020B0503020204020204" charset="-122"/>
+                <a:cs typeface="微软雅黑" panose="020B0503020204020204" charset="-122"/>
               </a:rPr>
               <a:t>benchmark_soak 长时间模拟</a:t>
             </a:r>
+            <a:endParaRPr sz="1200" b="0">
+              <a:solidFill>
+                <a:srgbClr val="8B9BB4"/>
+              </a:solidFill>
+              <a:latin typeface="微软雅黑" panose="020B0503020204020204" charset="-122"/>
+              <a:ea typeface="微软雅黑" panose="020B0503020204020204" charset="-122"/>
+              <a:cs typeface="微软雅黑" panose="020B0503020204020204" charset="-122"/>
+            </a:endParaRPr>
           </a:p>
         </p:txBody>
       </p:sp>
@@ -6140,12 +6389,20 @@
                 <a:solidFill>
                   <a:srgbClr val="3B82F6"/>
                 </a:solidFill>
-                <a:latin typeface="Microsoft YaHei"/>
-                <a:ea typeface="Microsoft YaHei"/>
-                <a:cs typeface="Microsoft YaHei"/>
+                <a:latin typeface="微软雅黑" panose="020B0503020204020204" charset="-122"/>
+                <a:ea typeface="微软雅黑" panose="020B0503020204020204" charset="-122"/>
+                <a:cs typeface="微软雅黑" panose="020B0503020204020204" charset="-122"/>
               </a:rPr>
               <a:t>可演示路径（建议现场跑一条）</a:t>
             </a:r>
+            <a:endParaRPr sz="1500" b="1">
+              <a:solidFill>
+                <a:srgbClr val="3B82F6"/>
+              </a:solidFill>
+              <a:latin typeface="微软雅黑" panose="020B0503020204020204" charset="-122"/>
+              <a:ea typeface="微软雅黑" panose="020B0503020204020204" charset="-122"/>
+              <a:cs typeface="微软雅黑" panose="020B0503020204020204" charset="-122"/>
+            </a:endParaRPr>
           </a:p>
         </p:txBody>
       </p:sp>
@@ -6181,12 +6438,20 @@
                 <a:solidFill>
                   <a:srgbClr val="E8EEF7"/>
                 </a:solidFill>
-                <a:latin typeface="Microsoft YaHei"/>
-                <a:ea typeface="Microsoft YaHei"/>
-                <a:cs typeface="Microsoft YaHei"/>
+                <a:latin typeface="微软雅黑" panose="020B0503020204020204" charset="-122"/>
+                <a:ea typeface="微软雅黑" panose="020B0503020204020204" charset="-122"/>
+                <a:cs typeface="微软雅黑" panose="020B0503020204020204" charset="-122"/>
               </a:rPr>
               <a:t>▸  1. 进入默认对称地图，框选初始部队，分化为步兵/工兵/侦察</a:t>
             </a:r>
+            <a:endParaRPr sz="1400" b="0">
+              <a:solidFill>
+                <a:srgbClr val="E8EEF7"/>
+              </a:solidFill>
+              <a:latin typeface="微软雅黑" panose="020B0503020204020204" charset="-122"/>
+              <a:ea typeface="微软雅黑" panose="020B0503020204020204" charset="-122"/>
+              <a:cs typeface="微软雅黑" panose="020B0503020204020204" charset="-122"/>
+            </a:endParaRPr>
           </a:p>
           <a:p>
             <a:pPr>
@@ -6199,12 +6464,20 @@
                 <a:solidFill>
                   <a:srgbClr val="E8EEF7"/>
                 </a:solidFill>
-                <a:latin typeface="Microsoft YaHei"/>
-                <a:ea typeface="Microsoft YaHei"/>
-                <a:cs typeface="Microsoft YaHei"/>
+                <a:latin typeface="微软雅黑" panose="020B0503020204020204" charset="-122"/>
+                <a:ea typeface="微软雅黑" panose="020B0503020204020204" charset="-122"/>
+                <a:cs typeface="微软雅黑" panose="020B0503020204020204" charset="-122"/>
               </a:rPr>
               <a:t>▸  2. 文字军令：“工兵队在中央架桥”，观察跨度预览与施工进度</a:t>
             </a:r>
+            <a:endParaRPr sz="1400" b="0">
+              <a:solidFill>
+                <a:srgbClr val="E8EEF7"/>
+              </a:solidFill>
+              <a:latin typeface="微软雅黑" panose="020B0503020204020204" charset="-122"/>
+              <a:ea typeface="微软雅黑" panose="020B0503020204020204" charset="-122"/>
+              <a:cs typeface="微软雅黑" panose="020B0503020204020204" charset="-122"/>
+            </a:endParaRPr>
           </a:p>
           <a:p>
             <a:pPr>
@@ -6217,12 +6490,20 @@
                 <a:solidFill>
                   <a:srgbClr val="E8EEF7"/>
                 </a:solidFill>
-                <a:latin typeface="Microsoft YaHei"/>
-                <a:ea typeface="Microsoft YaHei"/>
-                <a:cs typeface="Microsoft YaHei"/>
+                <a:latin typeface="微软雅黑" panose="020B0503020204020204" charset="-122"/>
+                <a:ea typeface="微软雅黑" panose="020B0503020204020204" charset="-122"/>
+                <a:cs typeface="微软雅黑" panose="020B0503020204020204" charset="-122"/>
               </a:rPr>
               <a:t>▸  3. 右键村庄征兵，底栏训练兵种；编组后下达攻击移动</a:t>
             </a:r>
+            <a:endParaRPr sz="1400" b="0">
+              <a:solidFill>
+                <a:srgbClr val="E8EEF7"/>
+              </a:solidFill>
+              <a:latin typeface="微软雅黑" panose="020B0503020204020204" charset="-122"/>
+              <a:ea typeface="微软雅黑" panose="020B0503020204020204" charset="-122"/>
+              <a:cs typeface="微软雅黑" panose="020B0503020204020204" charset="-122"/>
+            </a:endParaRPr>
           </a:p>
           <a:p>
             <a:pPr>
@@ -6235,12 +6516,20 @@
                 <a:solidFill>
                   <a:srgbClr val="E8EEF7"/>
                 </a:solidFill>
-                <a:latin typeface="Microsoft YaHei"/>
-                <a:ea typeface="Microsoft YaHei"/>
-                <a:cs typeface="Microsoft YaHei"/>
+                <a:latin typeface="微软雅黑" panose="020B0503020204020204" charset="-122"/>
+                <a:ea typeface="微软雅黑" panose="020B0503020204020204" charset="-122"/>
+                <a:cs typeface="微软雅黑" panose="020B0503020204020204" charset="-122"/>
               </a:rPr>
               <a:t>▸  4. 开启自动作战，再用鼠标手动覆盖，验证人机指令优先级</a:t>
             </a:r>
+            <a:endParaRPr sz="1400" b="0">
+              <a:solidFill>
+                <a:srgbClr val="E8EEF7"/>
+              </a:solidFill>
+              <a:latin typeface="微软雅黑" panose="020B0503020204020204" charset="-122"/>
+              <a:ea typeface="微软雅黑" panose="020B0503020204020204" charset="-122"/>
+              <a:cs typeface="微软雅黑" panose="020B0503020204020204" charset="-122"/>
+            </a:endParaRPr>
           </a:p>
           <a:p>
             <a:pPr>
@@ -6253,12 +6542,20 @@
                 <a:solidFill>
                   <a:srgbClr val="E8EEF7"/>
                 </a:solidFill>
-                <a:latin typeface="Microsoft YaHei"/>
-                <a:ea typeface="Microsoft YaHei"/>
-                <a:cs typeface="Microsoft YaHei"/>
+                <a:latin typeface="微软雅黑" panose="020B0503020204020204" charset="-122"/>
+                <a:ea typeface="微软雅黑" panose="020B0503020204020204" charset="-122"/>
+                <a:cs typeface="微软雅黑" panose="020B0503020204020204" charset="-122"/>
               </a:rPr>
               <a:t>▸  5. F5 存档 / F9 载入；将领阵亡进入结算统计</a:t>
             </a:r>
+            <a:endParaRPr sz="1400" b="0">
+              <a:solidFill>
+                <a:srgbClr val="E8EEF7"/>
+              </a:solidFill>
+              <a:latin typeface="微软雅黑" panose="020B0503020204020204" charset="-122"/>
+              <a:ea typeface="微软雅黑" panose="020B0503020204020204" charset="-122"/>
+              <a:cs typeface="微软雅黑" panose="020B0503020204020204" charset="-122"/>
+            </a:endParaRPr>
           </a:p>
         </p:txBody>
       </p:sp>
@@ -6333,12 +6630,20 @@
                 <a:solidFill>
                   <a:srgbClr val="8B9BB4"/>
                 </a:solidFill>
-                <a:latin typeface="Microsoft YaHei"/>
-                <a:ea typeface="Microsoft YaHei"/>
-                <a:cs typeface="Microsoft YaHei"/>
+                <a:latin typeface="微软雅黑" panose="020B0503020204020204" charset="-122"/>
+                <a:ea typeface="微软雅黑" panose="020B0503020204020204" charset="-122"/>
+                <a:cs typeface="微软雅黑" panose="020B0503020204020204" charset="-122"/>
               </a:rPr>
               <a:t>小组作业答辩 · 指挥官战术对抗</a:t>
             </a:r>
+            <a:endParaRPr sz="1000" b="0">
+              <a:solidFill>
+                <a:srgbClr val="8B9BB4"/>
+              </a:solidFill>
+              <a:latin typeface="微软雅黑" panose="020B0503020204020204" charset="-122"/>
+              <a:ea typeface="微软雅黑" panose="020B0503020204020204" charset="-122"/>
+              <a:cs typeface="微软雅黑" panose="020B0503020204020204" charset="-122"/>
+            </a:endParaRPr>
           </a:p>
         </p:txBody>
       </p:sp>
@@ -6370,12 +6675,20 @@
                 <a:solidFill>
                   <a:srgbClr val="8B9BB4"/>
                 </a:solidFill>
-                <a:latin typeface="Microsoft YaHei"/>
-                <a:ea typeface="Microsoft YaHei"/>
-                <a:cs typeface="Microsoft YaHei"/>
+                <a:latin typeface="微软雅黑" panose="020B0503020204020204" charset="-122"/>
+                <a:ea typeface="微软雅黑" panose="020B0503020204020204" charset="-122"/>
+                <a:cs typeface="微软雅黑" panose="020B0503020204020204" charset="-122"/>
               </a:rPr>
               <a:t>11 / 13</a:t>
             </a:r>
+            <a:endParaRPr sz="1000" b="0">
+              <a:solidFill>
+                <a:srgbClr val="8B9BB4"/>
+              </a:solidFill>
+              <a:latin typeface="微软雅黑" panose="020B0503020204020204" charset="-122"/>
+              <a:ea typeface="微软雅黑" panose="020B0503020204020204" charset="-122"/>
+              <a:cs typeface="微软雅黑" panose="020B0503020204020204" charset="-122"/>
+            </a:endParaRPr>
           </a:p>
         </p:txBody>
       </p:sp>
@@ -6388,7 +6701,7 @@
 </file>
 
 <file path=ppt/slides/slide12.xml><?xml version="1.0" encoding="utf-8"?>
-<p:sld xmlns:a="http://schemas.openxmlformats.org/drawingml/2006/main" xmlns:p="http://schemas.openxmlformats.org/presentationml/2006/main" xmlns:r="http://schemas.openxmlformats.org/officeDocument/2006/relationships">
+<p:sld xmlns:a="http://schemas.openxmlformats.org/drawingml/2006/main" xmlns:r="http://schemas.openxmlformats.org/officeDocument/2006/relationships" xmlns:p="http://schemas.openxmlformats.org/presentationml/2006/main">
   <p:cSld>
     <p:bg>
       <p:bgPr>
@@ -6433,12 +6746,20 @@
                 <a:solidFill>
                   <a:srgbClr val="E8EEF7"/>
                 </a:solidFill>
-                <a:latin typeface="Microsoft YaHei"/>
-                <a:ea typeface="Microsoft YaHei"/>
-                <a:cs typeface="Microsoft YaHei"/>
+                <a:latin typeface="微软雅黑" panose="020B0503020204020204" charset="-122"/>
+                <a:ea typeface="微软雅黑" panose="020B0503020204020204" charset="-122"/>
+                <a:cs typeface="微软雅黑" panose="020B0503020204020204" charset="-122"/>
               </a:rPr>
               <a:t>总结：做了什么，还差什么</a:t>
             </a:r>
+            <a:endParaRPr sz="2800" b="1">
+              <a:solidFill>
+                <a:srgbClr val="E8EEF7"/>
+              </a:solidFill>
+              <a:latin typeface="微软雅黑" panose="020B0503020204020204" charset="-122"/>
+              <a:ea typeface="微软雅黑" panose="020B0503020204020204" charset="-122"/>
+              <a:cs typeface="微软雅黑" panose="020B0503020204020204" charset="-122"/>
+            </a:endParaRPr>
           </a:p>
         </p:txBody>
       </p:sp>
@@ -6560,12 +6881,20 @@
                 <a:solidFill>
                   <a:srgbClr val="E8EEF7"/>
                 </a:solidFill>
-                <a:latin typeface="Microsoft YaHei"/>
-                <a:ea typeface="Microsoft YaHei"/>
-                <a:cs typeface="Microsoft YaHei"/>
+                <a:latin typeface="微软雅黑" panose="020B0503020204020204" charset="-122"/>
+                <a:ea typeface="微软雅黑" panose="020B0503020204020204" charset="-122"/>
+                <a:cs typeface="微软雅黑" panose="020B0503020204020204" charset="-122"/>
               </a:rPr>
               <a:t>我们完成的</a:t>
             </a:r>
+            <a:endParaRPr sz="1400" b="1">
+              <a:solidFill>
+                <a:srgbClr val="E8EEF7"/>
+              </a:solidFill>
+              <a:latin typeface="微软雅黑" panose="020B0503020204020204" charset="-122"/>
+              <a:ea typeface="微软雅黑" panose="020B0503020204020204" charset="-122"/>
+              <a:cs typeface="微软雅黑" panose="020B0503020204020204" charset="-122"/>
+            </a:endParaRPr>
           </a:p>
         </p:txBody>
       </p:sp>
@@ -6597,9 +6926,9 @@
                 <a:solidFill>
                   <a:srgbClr val="8B9BB4"/>
                 </a:solidFill>
-                <a:latin typeface="Microsoft YaHei"/>
-                <a:ea typeface="Microsoft YaHei"/>
-                <a:cs typeface="Microsoft YaHei"/>
+                <a:latin typeface="微软雅黑" panose="020B0503020204020204" charset="-122"/>
+                <a:ea typeface="微软雅黑" panose="020B0503020204020204" charset="-122"/>
+                <a:cs typeface="微软雅黑" panose="020B0503020204020204" charset="-122"/>
               </a:rPr>
               <a:t>· 千人级独立模拟与对战闭环
 · 自然语言指挥 + 离线兜底
@@ -6607,6 +6936,14 @@
 · 桥/船/塔工程 · 存档回放结算
 · 双平台打包 · 测试与静态检查</a:t>
             </a:r>
+            <a:endParaRPr sz="1400" b="0">
+              <a:solidFill>
+                <a:srgbClr val="8B9BB4"/>
+              </a:solidFill>
+              <a:latin typeface="微软雅黑" panose="020B0503020204020204" charset="-122"/>
+              <a:ea typeface="微软雅黑" panose="020B0503020204020204" charset="-122"/>
+              <a:cs typeface="微软雅黑" panose="020B0503020204020204" charset="-122"/>
+            </a:endParaRPr>
           </a:p>
         </p:txBody>
       </p:sp>
@@ -6728,12 +7065,20 @@
                 <a:solidFill>
                   <a:srgbClr val="E8EEF7"/>
                 </a:solidFill>
-                <a:latin typeface="Microsoft YaHei"/>
-                <a:ea typeface="Microsoft YaHei"/>
-                <a:cs typeface="Microsoft YaHei"/>
+                <a:latin typeface="微软雅黑" panose="020B0503020204020204" charset="-122"/>
+                <a:ea typeface="微软雅黑" panose="020B0503020204020204" charset="-122"/>
+                <a:cs typeface="微软雅黑" panose="020B0503020204020204" charset="-122"/>
               </a:rPr>
               <a:t>不足与后续</a:t>
             </a:r>
+            <a:endParaRPr sz="1400" b="1">
+              <a:solidFill>
+                <a:srgbClr val="E8EEF7"/>
+              </a:solidFill>
+              <a:latin typeface="微软雅黑" panose="020B0503020204020204" charset="-122"/>
+              <a:ea typeface="微软雅黑" panose="020B0503020204020204" charset="-122"/>
+              <a:cs typeface="微软雅黑" panose="020B0503020204020204" charset="-122"/>
+            </a:endParaRPr>
           </a:p>
         </p:txBody>
       </p:sp>
@@ -6765,15 +7110,23 @@
                 <a:solidFill>
                   <a:srgbClr val="8B9BB4"/>
                 </a:solidFill>
-                <a:latin typeface="Microsoft YaHei"/>
-                <a:ea typeface="Microsoft YaHei"/>
-                <a:cs typeface="Microsoft YaHei"/>
+                <a:latin typeface="微软雅黑" panose="020B0503020204020204" charset="-122"/>
+                <a:ea typeface="微软雅黑" panose="020B0503020204020204" charset="-122"/>
+                <a:cs typeface="微软雅黑" panose="020B0503020204020204" charset="-122"/>
               </a:rPr>
               <a:t>· 教程与数值平衡仍需试玩
 · 语音在无麦克风环境验证不足
 · 默认地图美术与多机型性能复测
 · 经济/联机/剧情明确不进本期</a:t>
             </a:r>
+            <a:endParaRPr sz="1400" b="0">
+              <a:solidFill>
+                <a:srgbClr val="8B9BB4"/>
+              </a:solidFill>
+              <a:latin typeface="微软雅黑" panose="020B0503020204020204" charset="-122"/>
+              <a:ea typeface="微软雅黑" panose="020B0503020204020204" charset="-122"/>
+              <a:cs typeface="微软雅黑" panose="020B0503020204020204" charset="-122"/>
+            </a:endParaRPr>
           </a:p>
         </p:txBody>
       </p:sp>
@@ -6852,12 +7205,20 @@
                 <a:solidFill>
                   <a:srgbClr val="3B82F6"/>
                 </a:solidFill>
-                <a:latin typeface="Microsoft YaHei"/>
-                <a:ea typeface="Microsoft YaHei"/>
-                <a:cs typeface="Microsoft YaHei"/>
+                <a:latin typeface="微软雅黑" panose="020B0503020204020204" charset="-122"/>
+                <a:ea typeface="微软雅黑" panose="020B0503020204020204" charset="-122"/>
+                <a:cs typeface="微软雅黑" panose="020B0503020204020204" charset="-122"/>
               </a:rPr>
               <a:t>一句话总结</a:t>
             </a:r>
+            <a:endParaRPr sz="1300" b="1">
+              <a:solidFill>
+                <a:srgbClr val="3B82F6"/>
+              </a:solidFill>
+              <a:latin typeface="微软雅黑" panose="020B0503020204020204" charset="-122"/>
+              <a:ea typeface="微软雅黑" panose="020B0503020204020204" charset="-122"/>
+              <a:cs typeface="微软雅黑" panose="020B0503020204020204" charset="-122"/>
+            </a:endParaRPr>
           </a:p>
         </p:txBody>
       </p:sp>
@@ -6889,12 +7250,20 @@
                 <a:solidFill>
                   <a:srgbClr val="E8EEF7"/>
                 </a:solidFill>
-                <a:latin typeface="Microsoft YaHei"/>
-                <a:ea typeface="Microsoft YaHei"/>
-                <a:cs typeface="Microsoft YaHei"/>
+                <a:latin typeface="微软雅黑" panose="020B0503020204020204" charset="-122"/>
+                <a:ea typeface="微软雅黑" panose="020B0503020204020204" charset="-122"/>
+                <a:cs typeface="微软雅黑" panose="020B0503020204020204" charset="-122"/>
               </a:rPr>
               <a:t>我们交付的不是“按钮很多的 RTS”，而是一套可验证、可离线、可复盘的指挥官式对战原型。</a:t>
             </a:r>
+            <a:endParaRPr sz="1600" b="0">
+              <a:solidFill>
+                <a:srgbClr val="E8EEF7"/>
+              </a:solidFill>
+              <a:latin typeface="微软雅黑" panose="020B0503020204020204" charset="-122"/>
+              <a:ea typeface="微软雅黑" panose="020B0503020204020204" charset="-122"/>
+              <a:cs typeface="微软雅黑" panose="020B0503020204020204" charset="-122"/>
+            </a:endParaRPr>
           </a:p>
         </p:txBody>
       </p:sp>
@@ -6926,12 +7295,20 @@
                 <a:solidFill>
                   <a:srgbClr val="8B9BB4"/>
                 </a:solidFill>
-                <a:latin typeface="Microsoft YaHei"/>
-                <a:ea typeface="Microsoft YaHei"/>
-                <a:cs typeface="Microsoft YaHei"/>
+                <a:latin typeface="微软雅黑" panose="020B0503020204020204" charset="-122"/>
+                <a:ea typeface="微软雅黑" panose="020B0503020204020204" charset="-122"/>
+                <a:cs typeface="微软雅黑" panose="020B0503020204020204" charset="-122"/>
               </a:rPr>
               <a:t>下一步优先：教程打磨 → 平衡试玩 → 多机型性能复测 → 发布验收。</a:t>
             </a:r>
+            <a:endParaRPr sz="1400" b="0">
+              <a:solidFill>
+                <a:srgbClr val="8B9BB4"/>
+              </a:solidFill>
+              <a:latin typeface="微软雅黑" panose="020B0503020204020204" charset="-122"/>
+              <a:ea typeface="微软雅黑" panose="020B0503020204020204" charset="-122"/>
+              <a:cs typeface="微软雅黑" panose="020B0503020204020204" charset="-122"/>
+            </a:endParaRPr>
           </a:p>
         </p:txBody>
       </p:sp>
@@ -6963,12 +7340,20 @@
                 <a:solidFill>
                   <a:srgbClr val="2DD4BF"/>
                 </a:solidFill>
-                <a:latin typeface="Microsoft YaHei"/>
-                <a:ea typeface="Microsoft YaHei"/>
-                <a:cs typeface="Microsoft YaHei"/>
+                <a:latin typeface="微软雅黑" panose="020B0503020204020204" charset="-122"/>
+                <a:ea typeface="微软雅黑" panose="020B0503020204020204" charset="-122"/>
+                <a:cs typeface="微软雅黑" panose="020B0503020204020204" charset="-122"/>
               </a:rPr>
               <a:t>感谢各位老师指导。</a:t>
             </a:r>
+            <a:endParaRPr sz="1400" b="1">
+              <a:solidFill>
+                <a:srgbClr val="2DD4BF"/>
+              </a:solidFill>
+              <a:latin typeface="微软雅黑" panose="020B0503020204020204" charset="-122"/>
+              <a:ea typeface="微软雅黑" panose="020B0503020204020204" charset="-122"/>
+              <a:cs typeface="微软雅黑" panose="020B0503020204020204" charset="-122"/>
+            </a:endParaRPr>
           </a:p>
         </p:txBody>
       </p:sp>
@@ -7043,12 +7428,20 @@
                 <a:solidFill>
                   <a:srgbClr val="8B9BB4"/>
                 </a:solidFill>
-                <a:latin typeface="Microsoft YaHei"/>
-                <a:ea typeface="Microsoft YaHei"/>
-                <a:cs typeface="Microsoft YaHei"/>
+                <a:latin typeface="微软雅黑" panose="020B0503020204020204" charset="-122"/>
+                <a:ea typeface="微软雅黑" panose="020B0503020204020204" charset="-122"/>
+                <a:cs typeface="微软雅黑" panose="020B0503020204020204" charset="-122"/>
               </a:rPr>
               <a:t>小组作业答辩 · 指挥官战术对抗</a:t>
             </a:r>
+            <a:endParaRPr sz="1000" b="0">
+              <a:solidFill>
+                <a:srgbClr val="8B9BB4"/>
+              </a:solidFill>
+              <a:latin typeface="微软雅黑" panose="020B0503020204020204" charset="-122"/>
+              <a:ea typeface="微软雅黑" panose="020B0503020204020204" charset="-122"/>
+              <a:cs typeface="微软雅黑" panose="020B0503020204020204" charset="-122"/>
+            </a:endParaRPr>
           </a:p>
         </p:txBody>
       </p:sp>
@@ -7080,12 +7473,20 @@
                 <a:solidFill>
                   <a:srgbClr val="8B9BB4"/>
                 </a:solidFill>
-                <a:latin typeface="Microsoft YaHei"/>
-                <a:ea typeface="Microsoft YaHei"/>
-                <a:cs typeface="Microsoft YaHei"/>
+                <a:latin typeface="微软雅黑" panose="020B0503020204020204" charset="-122"/>
+                <a:ea typeface="微软雅黑" panose="020B0503020204020204" charset="-122"/>
+                <a:cs typeface="微软雅黑" panose="020B0503020204020204" charset="-122"/>
               </a:rPr>
               <a:t>12 / 13</a:t>
             </a:r>
+            <a:endParaRPr sz="1000" b="0">
+              <a:solidFill>
+                <a:srgbClr val="8B9BB4"/>
+              </a:solidFill>
+              <a:latin typeface="微软雅黑" panose="020B0503020204020204" charset="-122"/>
+              <a:ea typeface="微软雅黑" panose="020B0503020204020204" charset="-122"/>
+              <a:cs typeface="微软雅黑" panose="020B0503020204020204" charset="-122"/>
+            </a:endParaRPr>
           </a:p>
         </p:txBody>
       </p:sp>
@@ -7098,7 +7499,7 @@
 </file>
 
 <file path=ppt/slides/slide13.xml><?xml version="1.0" encoding="utf-8"?>
-<p:sld xmlns:a="http://schemas.openxmlformats.org/drawingml/2006/main" xmlns:p="http://schemas.openxmlformats.org/presentationml/2006/main" xmlns:r="http://schemas.openxmlformats.org/officeDocument/2006/relationships">
+<p:sld xmlns:a="http://schemas.openxmlformats.org/drawingml/2006/main" xmlns:r="http://schemas.openxmlformats.org/officeDocument/2006/relationships" xmlns:p="http://schemas.openxmlformats.org/presentationml/2006/main">
   <p:cSld>
     <p:bg>
       <p:bgPr>
@@ -7143,12 +7544,20 @@
                 <a:solidFill>
                   <a:srgbClr val="E8EEF7"/>
                 </a:solidFill>
-                <a:latin typeface="Microsoft YaHei"/>
-                <a:ea typeface="Microsoft YaHei"/>
-                <a:cs typeface="Microsoft YaHei"/>
+                <a:latin typeface="微软雅黑" panose="020B0503020204020204" charset="-122"/>
+                <a:ea typeface="微软雅黑" panose="020B0503020204020204" charset="-122"/>
+                <a:cs typeface="微软雅黑" panose="020B0503020204020204" charset="-122"/>
               </a:rPr>
               <a:t>感谢聆听</a:t>
             </a:r>
+            <a:endParaRPr sz="4000" b="1">
+              <a:solidFill>
+                <a:srgbClr val="E8EEF7"/>
+              </a:solidFill>
+              <a:latin typeface="微软雅黑" panose="020B0503020204020204" charset="-122"/>
+              <a:ea typeface="微软雅黑" panose="020B0503020204020204" charset="-122"/>
+              <a:cs typeface="微软雅黑" panose="020B0503020204020204" charset="-122"/>
+            </a:endParaRPr>
           </a:p>
         </p:txBody>
       </p:sp>
@@ -7180,12 +7589,20 @@
                 <a:solidFill>
                   <a:srgbClr val="8B9BB4"/>
                 </a:solidFill>
-                <a:latin typeface="Microsoft YaHei"/>
-                <a:ea typeface="Microsoft YaHei"/>
-                <a:cs typeface="Microsoft YaHei"/>
+                <a:latin typeface="微软雅黑" panose="020B0503020204020204" charset="-122"/>
+                <a:ea typeface="微软雅黑" panose="020B0503020204020204" charset="-122"/>
+                <a:cs typeface="微软雅黑" panose="020B0503020204020204" charset="-122"/>
               </a:rPr>
               <a:t>指挥官战术对抗 · 小组作业答辩</a:t>
             </a:r>
+            <a:endParaRPr sz="1800" b="0">
+              <a:solidFill>
+                <a:srgbClr val="8B9BB4"/>
+              </a:solidFill>
+              <a:latin typeface="微软雅黑" panose="020B0503020204020204" charset="-122"/>
+              <a:ea typeface="微软雅黑" panose="020B0503020204020204" charset="-122"/>
+              <a:cs typeface="微软雅黑" panose="020B0503020204020204" charset="-122"/>
+            </a:endParaRPr>
           </a:p>
         </p:txBody>
       </p:sp>
@@ -7217,12 +7634,20 @@
                 <a:solidFill>
                   <a:srgbClr val="2DD4BF"/>
                 </a:solidFill>
-                <a:latin typeface="Microsoft YaHei"/>
-                <a:ea typeface="Microsoft YaHei"/>
-                <a:cs typeface="Microsoft YaHei"/>
+                <a:latin typeface="微软雅黑" panose="020B0503020204020204" charset="-122"/>
+                <a:ea typeface="微软雅黑" panose="020B0503020204020204" charset="-122"/>
+                <a:cs typeface="微软雅黑" panose="020B0503020204020204" charset="-122"/>
               </a:rPr>
               <a:t>欢迎老师提问 · 演示 / 架构 / 公平性 / 性能均可展开</a:t>
             </a:r>
+            <a:endParaRPr sz="1400" b="0">
+              <a:solidFill>
+                <a:srgbClr val="2DD4BF"/>
+              </a:solidFill>
+              <a:latin typeface="微软雅黑" panose="020B0503020204020204" charset="-122"/>
+              <a:ea typeface="微软雅黑" panose="020B0503020204020204" charset="-122"/>
+              <a:cs typeface="微软雅黑" panose="020B0503020204020204" charset="-122"/>
+            </a:endParaRPr>
           </a:p>
         </p:txBody>
       </p:sp>
@@ -7297,12 +7722,20 @@
                 <a:solidFill>
                   <a:srgbClr val="8B9BB4"/>
                 </a:solidFill>
-                <a:latin typeface="Microsoft YaHei"/>
-                <a:ea typeface="Microsoft YaHei"/>
-                <a:cs typeface="Microsoft YaHei"/>
+                <a:latin typeface="微软雅黑" panose="020B0503020204020204" charset="-122"/>
+                <a:ea typeface="微软雅黑" panose="020B0503020204020204" charset="-122"/>
+                <a:cs typeface="微软雅黑" panose="020B0503020204020204" charset="-122"/>
               </a:rPr>
               <a:t>小组作业答辩 · 指挥官战术对抗</a:t>
             </a:r>
+            <a:endParaRPr sz="1000" b="0">
+              <a:solidFill>
+                <a:srgbClr val="8B9BB4"/>
+              </a:solidFill>
+              <a:latin typeface="微软雅黑" panose="020B0503020204020204" charset="-122"/>
+              <a:ea typeface="微软雅黑" panose="020B0503020204020204" charset="-122"/>
+              <a:cs typeface="微软雅黑" panose="020B0503020204020204" charset="-122"/>
+            </a:endParaRPr>
           </a:p>
         </p:txBody>
       </p:sp>
@@ -7334,12 +7767,20 @@
                 <a:solidFill>
                   <a:srgbClr val="8B9BB4"/>
                 </a:solidFill>
-                <a:latin typeface="Microsoft YaHei"/>
-                <a:ea typeface="Microsoft YaHei"/>
-                <a:cs typeface="Microsoft YaHei"/>
+                <a:latin typeface="微软雅黑" panose="020B0503020204020204" charset="-122"/>
+                <a:ea typeface="微软雅黑" panose="020B0503020204020204" charset="-122"/>
+                <a:cs typeface="微软雅黑" panose="020B0503020204020204" charset="-122"/>
               </a:rPr>
               <a:t>13 / 13</a:t>
             </a:r>
+            <a:endParaRPr sz="1000" b="0">
+              <a:solidFill>
+                <a:srgbClr val="8B9BB4"/>
+              </a:solidFill>
+              <a:latin typeface="微软雅黑" panose="020B0503020204020204" charset="-122"/>
+              <a:ea typeface="微软雅黑" panose="020B0503020204020204" charset="-122"/>
+              <a:cs typeface="微软雅黑" panose="020B0503020204020204" charset="-122"/>
+            </a:endParaRPr>
           </a:p>
         </p:txBody>
       </p:sp>
@@ -7352,7 +7793,7 @@
 </file>
 
 <file path=ppt/slides/slide2.xml><?xml version="1.0" encoding="utf-8"?>
-<p:sld xmlns:a="http://schemas.openxmlformats.org/drawingml/2006/main" xmlns:p="http://schemas.openxmlformats.org/presentationml/2006/main" xmlns:r="http://schemas.openxmlformats.org/officeDocument/2006/relationships">
+<p:sld xmlns:a="http://schemas.openxmlformats.org/drawingml/2006/main" xmlns:r="http://schemas.openxmlformats.org/officeDocument/2006/relationships" xmlns:p="http://schemas.openxmlformats.org/presentationml/2006/main">
   <p:cSld>
     <p:bg>
       <p:bgPr>
@@ -7397,12 +7838,20 @@
                 <a:solidFill>
                   <a:srgbClr val="E8EEF7"/>
                 </a:solidFill>
-                <a:latin typeface="Microsoft YaHei"/>
-                <a:ea typeface="Microsoft YaHei"/>
-                <a:cs typeface="Microsoft YaHei"/>
+                <a:latin typeface="微软雅黑" panose="020B0503020204020204" charset="-122"/>
+                <a:ea typeface="微软雅黑" panose="020B0503020204020204" charset="-122"/>
+                <a:cs typeface="微软雅黑" panose="020B0503020204020204" charset="-122"/>
               </a:rPr>
               <a:t>汇报提纲</a:t>
             </a:r>
+            <a:endParaRPr sz="3000" b="1">
+              <a:solidFill>
+                <a:srgbClr val="E8EEF7"/>
+              </a:solidFill>
+              <a:latin typeface="微软雅黑" panose="020B0503020204020204" charset="-122"/>
+              <a:ea typeface="微软雅黑" panose="020B0503020204020204" charset="-122"/>
+              <a:cs typeface="微软雅黑" panose="020B0503020204020204" charset="-122"/>
+            </a:endParaRPr>
           </a:p>
         </p:txBody>
       </p:sp>
@@ -7481,12 +7930,20 @@
                 <a:solidFill>
                   <a:srgbClr val="3B82F6"/>
                 </a:solidFill>
-                <a:latin typeface="Microsoft YaHei"/>
-                <a:ea typeface="Microsoft YaHei"/>
-                <a:cs typeface="Microsoft YaHei"/>
+                <a:latin typeface="微软雅黑" panose="020B0503020204020204" charset="-122"/>
+                <a:ea typeface="微软雅黑" panose="020B0503020204020204" charset="-122"/>
+                <a:cs typeface="微软雅黑" panose="020B0503020204020204" charset="-122"/>
               </a:rPr>
               <a:t>01</a:t>
             </a:r>
+            <a:endParaRPr sz="2200" b="1">
+              <a:solidFill>
+                <a:srgbClr val="3B82F6"/>
+              </a:solidFill>
+              <a:latin typeface="微软雅黑" panose="020B0503020204020204" charset="-122"/>
+              <a:ea typeface="微软雅黑" panose="020B0503020204020204" charset="-122"/>
+              <a:cs typeface="微软雅黑" panose="020B0503020204020204" charset="-122"/>
+            </a:endParaRPr>
           </a:p>
         </p:txBody>
       </p:sp>
@@ -7518,12 +7975,20 @@
                 <a:solidFill>
                   <a:srgbClr val="E8EEF7"/>
                 </a:solidFill>
-                <a:latin typeface="Microsoft YaHei"/>
-                <a:ea typeface="Microsoft YaHei"/>
-                <a:cs typeface="Microsoft YaHei"/>
+                <a:latin typeface="微软雅黑" panose="020B0503020204020204" charset="-122"/>
+                <a:ea typeface="微软雅黑" panose="020B0503020204020204" charset="-122"/>
+                <a:cs typeface="微软雅黑" panose="020B0503020204020204" charset="-122"/>
               </a:rPr>
               <a:t>选题背景与目标</a:t>
             </a:r>
+            <a:endParaRPr sz="1700" b="1">
+              <a:solidFill>
+                <a:srgbClr val="E8EEF7"/>
+              </a:solidFill>
+              <a:latin typeface="微软雅黑" panose="020B0503020204020204" charset="-122"/>
+              <a:ea typeface="微软雅黑" panose="020B0503020204020204" charset="-122"/>
+              <a:cs typeface="微软雅黑" panose="020B0503020204020204" charset="-122"/>
+            </a:endParaRPr>
           </a:p>
         </p:txBody>
       </p:sp>
@@ -7555,12 +8020,20 @@
                 <a:solidFill>
                   <a:srgbClr val="8B9BB4"/>
                 </a:solidFill>
-                <a:latin typeface="Microsoft YaHei"/>
-                <a:ea typeface="Microsoft YaHei"/>
-                <a:cs typeface="Microsoft YaHei"/>
+                <a:latin typeface="微软雅黑" panose="020B0503020204020204" charset="-122"/>
+                <a:ea typeface="微软雅黑" panose="020B0503020204020204" charset="-122"/>
+                <a:cs typeface="微软雅黑" panose="020B0503020204020204" charset="-122"/>
               </a:rPr>
               <a:t>为什么做、做成什么</a:t>
             </a:r>
+            <a:endParaRPr sz="1400" b="0">
+              <a:solidFill>
+                <a:srgbClr val="8B9BB4"/>
+              </a:solidFill>
+              <a:latin typeface="微软雅黑" panose="020B0503020204020204" charset="-122"/>
+              <a:ea typeface="微软雅黑" panose="020B0503020204020204" charset="-122"/>
+              <a:cs typeface="微软雅黑" panose="020B0503020204020204" charset="-122"/>
+            </a:endParaRPr>
           </a:p>
         </p:txBody>
       </p:sp>
@@ -7639,12 +8112,20 @@
                 <a:solidFill>
                   <a:srgbClr val="3B82F6"/>
                 </a:solidFill>
-                <a:latin typeface="Microsoft YaHei"/>
-                <a:ea typeface="Microsoft YaHei"/>
-                <a:cs typeface="Microsoft YaHei"/>
+                <a:latin typeface="微软雅黑" panose="020B0503020204020204" charset="-122"/>
+                <a:ea typeface="微软雅黑" panose="020B0503020204020204" charset="-122"/>
+                <a:cs typeface="微软雅黑" panose="020B0503020204020204" charset="-122"/>
               </a:rPr>
               <a:t>02</a:t>
             </a:r>
+            <a:endParaRPr sz="2200" b="1">
+              <a:solidFill>
+                <a:srgbClr val="3B82F6"/>
+              </a:solidFill>
+              <a:latin typeface="微软雅黑" panose="020B0503020204020204" charset="-122"/>
+              <a:ea typeface="微软雅黑" panose="020B0503020204020204" charset="-122"/>
+              <a:cs typeface="微软雅黑" panose="020B0503020204020204" charset="-122"/>
+            </a:endParaRPr>
           </a:p>
         </p:txBody>
       </p:sp>
@@ -7676,12 +8157,20 @@
                 <a:solidFill>
                   <a:srgbClr val="E8EEF7"/>
                 </a:solidFill>
-                <a:latin typeface="Microsoft YaHei"/>
-                <a:ea typeface="Microsoft YaHei"/>
-                <a:cs typeface="Microsoft YaHei"/>
+                <a:latin typeface="微软雅黑" panose="020B0503020204020204" charset="-122"/>
+                <a:ea typeface="微软雅黑" panose="020B0503020204020204" charset="-122"/>
+                <a:cs typeface="微软雅黑" panose="020B0503020204020204" charset="-122"/>
               </a:rPr>
               <a:t>系统设计与架构</a:t>
             </a:r>
+            <a:endParaRPr sz="1700" b="1">
+              <a:solidFill>
+                <a:srgbClr val="E8EEF7"/>
+              </a:solidFill>
+              <a:latin typeface="微软雅黑" panose="020B0503020204020204" charset="-122"/>
+              <a:ea typeface="微软雅黑" panose="020B0503020204020204" charset="-122"/>
+              <a:cs typeface="微软雅黑" panose="020B0503020204020204" charset="-122"/>
+            </a:endParaRPr>
           </a:p>
         </p:txBody>
       </p:sp>
@@ -7713,12 +8202,20 @@
                 <a:solidFill>
                   <a:srgbClr val="8B9BB4"/>
                 </a:solidFill>
-                <a:latin typeface="Microsoft YaHei"/>
-                <a:ea typeface="Microsoft YaHei"/>
-                <a:cs typeface="Microsoft YaHei"/>
+                <a:latin typeface="微软雅黑" panose="020B0503020204020204" charset="-122"/>
+                <a:ea typeface="微软雅黑" panose="020B0503020204020204" charset="-122"/>
+                <a:cs typeface="微软雅黑" panose="020B0503020204020204" charset="-122"/>
               </a:rPr>
               <a:t>模块分层与关键协议</a:t>
             </a:r>
+            <a:endParaRPr sz="1400" b="0">
+              <a:solidFill>
+                <a:srgbClr val="8B9BB4"/>
+              </a:solidFill>
+              <a:latin typeface="微软雅黑" panose="020B0503020204020204" charset="-122"/>
+              <a:ea typeface="微软雅黑" panose="020B0503020204020204" charset="-122"/>
+              <a:cs typeface="微软雅黑" panose="020B0503020204020204" charset="-122"/>
+            </a:endParaRPr>
           </a:p>
         </p:txBody>
       </p:sp>
@@ -7797,12 +8294,20 @@
                 <a:solidFill>
                   <a:srgbClr val="3B82F6"/>
                 </a:solidFill>
-                <a:latin typeface="Microsoft YaHei"/>
-                <a:ea typeface="Microsoft YaHei"/>
-                <a:cs typeface="Microsoft YaHei"/>
+                <a:latin typeface="微软雅黑" panose="020B0503020204020204" charset="-122"/>
+                <a:ea typeface="微软雅黑" panose="020B0503020204020204" charset="-122"/>
+                <a:cs typeface="微软雅黑" panose="020B0503020204020204" charset="-122"/>
               </a:rPr>
               <a:t>03</a:t>
             </a:r>
+            <a:endParaRPr sz="2200" b="1">
+              <a:solidFill>
+                <a:srgbClr val="3B82F6"/>
+              </a:solidFill>
+              <a:latin typeface="微软雅黑" panose="020B0503020204020204" charset="-122"/>
+              <a:ea typeface="微软雅黑" panose="020B0503020204020204" charset="-122"/>
+              <a:cs typeface="微软雅黑" panose="020B0503020204020204" charset="-122"/>
+            </a:endParaRPr>
           </a:p>
         </p:txBody>
       </p:sp>
@@ -7834,12 +8339,20 @@
                 <a:solidFill>
                   <a:srgbClr val="E8EEF7"/>
                 </a:solidFill>
-                <a:latin typeface="Microsoft YaHei"/>
-                <a:ea typeface="Microsoft YaHei"/>
-                <a:cs typeface="Microsoft YaHei"/>
+                <a:latin typeface="微软雅黑" panose="020B0503020204020204" charset="-122"/>
+                <a:ea typeface="微软雅黑" panose="020B0503020204020204" charset="-122"/>
+                <a:cs typeface="微软雅黑" panose="020B0503020204020204" charset="-122"/>
               </a:rPr>
               <a:t>核心功能展示</a:t>
             </a:r>
+            <a:endParaRPr sz="1700" b="1">
+              <a:solidFill>
+                <a:srgbClr val="E8EEF7"/>
+              </a:solidFill>
+              <a:latin typeface="微软雅黑" panose="020B0503020204020204" charset="-122"/>
+              <a:ea typeface="微软雅黑" panose="020B0503020204020204" charset="-122"/>
+              <a:cs typeface="微软雅黑" panose="020B0503020204020204" charset="-122"/>
+            </a:endParaRPr>
           </a:p>
         </p:txBody>
       </p:sp>
@@ -7871,12 +8384,20 @@
                 <a:solidFill>
                   <a:srgbClr val="8B9BB4"/>
                 </a:solidFill>
-                <a:latin typeface="Microsoft YaHei"/>
-                <a:ea typeface="Microsoft YaHei"/>
-                <a:cs typeface="Microsoft YaHei"/>
+                <a:latin typeface="微软雅黑" panose="020B0503020204020204" charset="-122"/>
+                <a:ea typeface="微软雅黑" panose="020B0503020204020204" charset="-122"/>
+                <a:cs typeface="微软雅黑" panose="020B0503020204020204" charset="-122"/>
               </a:rPr>
               <a:t>战场 / 指挥 / AI / 工程</a:t>
             </a:r>
+            <a:endParaRPr sz="1400" b="0">
+              <a:solidFill>
+                <a:srgbClr val="8B9BB4"/>
+              </a:solidFill>
+              <a:latin typeface="微软雅黑" panose="020B0503020204020204" charset="-122"/>
+              <a:ea typeface="微软雅黑" panose="020B0503020204020204" charset="-122"/>
+              <a:cs typeface="微软雅黑" panose="020B0503020204020204" charset="-122"/>
+            </a:endParaRPr>
           </a:p>
         </p:txBody>
       </p:sp>
@@ -7955,12 +8476,20 @@
                 <a:solidFill>
                   <a:srgbClr val="3B82F6"/>
                 </a:solidFill>
-                <a:latin typeface="Microsoft YaHei"/>
-                <a:ea typeface="Microsoft YaHei"/>
-                <a:cs typeface="Microsoft YaHei"/>
+                <a:latin typeface="微软雅黑" panose="020B0503020204020204" charset="-122"/>
+                <a:ea typeface="微软雅黑" panose="020B0503020204020204" charset="-122"/>
+                <a:cs typeface="微软雅黑" panose="020B0503020204020204" charset="-122"/>
               </a:rPr>
               <a:t>04</a:t>
             </a:r>
+            <a:endParaRPr sz="2200" b="1">
+              <a:solidFill>
+                <a:srgbClr val="3B82F6"/>
+              </a:solidFill>
+              <a:latin typeface="微软雅黑" panose="020B0503020204020204" charset="-122"/>
+              <a:ea typeface="微软雅黑" panose="020B0503020204020204" charset="-122"/>
+              <a:cs typeface="微软雅黑" panose="020B0503020204020204" charset="-122"/>
+            </a:endParaRPr>
           </a:p>
         </p:txBody>
       </p:sp>
@@ -7992,12 +8521,20 @@
                 <a:solidFill>
                   <a:srgbClr val="E8EEF7"/>
                 </a:solidFill>
-                <a:latin typeface="Microsoft YaHei"/>
-                <a:ea typeface="Microsoft YaHei"/>
-                <a:cs typeface="Microsoft YaHei"/>
+                <a:latin typeface="微软雅黑" panose="020B0503020204020204" charset="-122"/>
+                <a:ea typeface="微软雅黑" panose="020B0503020204020204" charset="-122"/>
+                <a:cs typeface="微软雅黑" panose="020B0503020204020204" charset="-122"/>
               </a:rPr>
               <a:t>技术难点与方案</a:t>
             </a:r>
+            <a:endParaRPr sz="1700" b="1">
+              <a:solidFill>
+                <a:srgbClr val="E8EEF7"/>
+              </a:solidFill>
+              <a:latin typeface="微软雅黑" panose="020B0503020204020204" charset="-122"/>
+              <a:ea typeface="微软雅黑" panose="020B0503020204020204" charset="-122"/>
+              <a:cs typeface="微软雅黑" panose="020B0503020204020204" charset="-122"/>
+            </a:endParaRPr>
           </a:p>
         </p:txBody>
       </p:sp>
@@ -8029,12 +8566,20 @@
                 <a:solidFill>
                   <a:srgbClr val="8B9BB4"/>
                 </a:solidFill>
-                <a:latin typeface="Microsoft YaHei"/>
-                <a:ea typeface="Microsoft YaHei"/>
-                <a:cs typeface="Microsoft YaHei"/>
+                <a:latin typeface="微软雅黑" panose="020B0503020204020204" charset="-122"/>
+                <a:ea typeface="微软雅黑" panose="020B0503020204020204" charset="-122"/>
+                <a:cs typeface="微软雅黑" panose="020B0503020204020204" charset="-122"/>
               </a:rPr>
               <a:t>性能、公平性、离线可用</a:t>
             </a:r>
+            <a:endParaRPr sz="1400" b="0">
+              <a:solidFill>
+                <a:srgbClr val="8B9BB4"/>
+              </a:solidFill>
+              <a:latin typeface="微软雅黑" panose="020B0503020204020204" charset="-122"/>
+              <a:ea typeface="微软雅黑" panose="020B0503020204020204" charset="-122"/>
+              <a:cs typeface="微软雅黑" panose="020B0503020204020204" charset="-122"/>
+            </a:endParaRPr>
           </a:p>
         </p:txBody>
       </p:sp>
@@ -8113,12 +8658,20 @@
                 <a:solidFill>
                   <a:srgbClr val="3B82F6"/>
                 </a:solidFill>
-                <a:latin typeface="Microsoft YaHei"/>
-                <a:ea typeface="Microsoft YaHei"/>
-                <a:cs typeface="Microsoft YaHei"/>
+                <a:latin typeface="微软雅黑" panose="020B0503020204020204" charset="-122"/>
+                <a:ea typeface="微软雅黑" panose="020B0503020204020204" charset="-122"/>
+                <a:cs typeface="微软雅黑" panose="020B0503020204020204" charset="-122"/>
               </a:rPr>
               <a:t>05</a:t>
             </a:r>
+            <a:endParaRPr sz="2200" b="1">
+              <a:solidFill>
+                <a:srgbClr val="3B82F6"/>
+              </a:solidFill>
+              <a:latin typeface="微软雅黑" panose="020B0503020204020204" charset="-122"/>
+              <a:ea typeface="微软雅黑" panose="020B0503020204020204" charset="-122"/>
+              <a:cs typeface="微软雅黑" panose="020B0503020204020204" charset="-122"/>
+            </a:endParaRPr>
           </a:p>
         </p:txBody>
       </p:sp>
@@ -8150,12 +8703,20 @@
                 <a:solidFill>
                   <a:srgbClr val="E8EEF7"/>
                 </a:solidFill>
-                <a:latin typeface="Microsoft YaHei"/>
-                <a:ea typeface="Microsoft YaHei"/>
-                <a:cs typeface="Microsoft YaHei"/>
+                <a:latin typeface="微软雅黑" panose="020B0503020204020204" charset="-122"/>
+                <a:ea typeface="微软雅黑" panose="020B0503020204020204" charset="-122"/>
+                <a:cs typeface="微软雅黑" panose="020B0503020204020204" charset="-122"/>
               </a:rPr>
               <a:t>分工、成果与总结</a:t>
             </a:r>
+            <a:endParaRPr sz="1700" b="1">
+              <a:solidFill>
+                <a:srgbClr val="E8EEF7"/>
+              </a:solidFill>
+              <a:latin typeface="微软雅黑" panose="020B0503020204020204" charset="-122"/>
+              <a:ea typeface="微软雅黑" panose="020B0503020204020204" charset="-122"/>
+              <a:cs typeface="微软雅黑" panose="020B0503020204020204" charset="-122"/>
+            </a:endParaRPr>
           </a:p>
         </p:txBody>
       </p:sp>
@@ -8187,12 +8748,20 @@
                 <a:solidFill>
                   <a:srgbClr val="8B9BB4"/>
                 </a:solidFill>
-                <a:latin typeface="Microsoft YaHei"/>
-                <a:ea typeface="Microsoft YaHei"/>
-                <a:cs typeface="Microsoft YaHei"/>
+                <a:latin typeface="微软雅黑" panose="020B0503020204020204" charset="-122"/>
+                <a:ea typeface="微软雅黑" panose="020B0503020204020204" charset="-122"/>
+                <a:cs typeface="微软雅黑" panose="020B0503020204020204" charset="-122"/>
               </a:rPr>
               <a:t>我们做了什么、还差什么</a:t>
             </a:r>
+            <a:endParaRPr sz="1400" b="0">
+              <a:solidFill>
+                <a:srgbClr val="8B9BB4"/>
+              </a:solidFill>
+              <a:latin typeface="微软雅黑" panose="020B0503020204020204" charset="-122"/>
+              <a:ea typeface="微软雅黑" panose="020B0503020204020204" charset="-122"/>
+              <a:cs typeface="微软雅黑" panose="020B0503020204020204" charset="-122"/>
+            </a:endParaRPr>
           </a:p>
         </p:txBody>
       </p:sp>
@@ -8267,12 +8836,20 @@
                 <a:solidFill>
                   <a:srgbClr val="8B9BB4"/>
                 </a:solidFill>
-                <a:latin typeface="Microsoft YaHei"/>
-                <a:ea typeface="Microsoft YaHei"/>
-                <a:cs typeface="Microsoft YaHei"/>
+                <a:latin typeface="微软雅黑" panose="020B0503020204020204" charset="-122"/>
+                <a:ea typeface="微软雅黑" panose="020B0503020204020204" charset="-122"/>
+                <a:cs typeface="微软雅黑" panose="020B0503020204020204" charset="-122"/>
               </a:rPr>
               <a:t>小组作业答辩 · 指挥官战术对抗</a:t>
             </a:r>
+            <a:endParaRPr sz="1000" b="0">
+              <a:solidFill>
+                <a:srgbClr val="8B9BB4"/>
+              </a:solidFill>
+              <a:latin typeface="微软雅黑" panose="020B0503020204020204" charset="-122"/>
+              <a:ea typeface="微软雅黑" panose="020B0503020204020204" charset="-122"/>
+              <a:cs typeface="微软雅黑" panose="020B0503020204020204" charset="-122"/>
+            </a:endParaRPr>
           </a:p>
         </p:txBody>
       </p:sp>
@@ -8304,12 +8881,20 @@
                 <a:solidFill>
                   <a:srgbClr val="8B9BB4"/>
                 </a:solidFill>
-                <a:latin typeface="Microsoft YaHei"/>
-                <a:ea typeface="Microsoft YaHei"/>
-                <a:cs typeface="Microsoft YaHei"/>
+                <a:latin typeface="微软雅黑" panose="020B0503020204020204" charset="-122"/>
+                <a:ea typeface="微软雅黑" panose="020B0503020204020204" charset="-122"/>
+                <a:cs typeface="微软雅黑" panose="020B0503020204020204" charset="-122"/>
               </a:rPr>
               <a:t>02 / 13</a:t>
             </a:r>
+            <a:endParaRPr sz="1000" b="0">
+              <a:solidFill>
+                <a:srgbClr val="8B9BB4"/>
+              </a:solidFill>
+              <a:latin typeface="微软雅黑" panose="020B0503020204020204" charset="-122"/>
+              <a:ea typeface="微软雅黑" panose="020B0503020204020204" charset="-122"/>
+              <a:cs typeface="微软雅黑" panose="020B0503020204020204" charset="-122"/>
+            </a:endParaRPr>
           </a:p>
         </p:txBody>
       </p:sp>
@@ -8322,7 +8907,7 @@
 </file>
 
 <file path=ppt/slides/slide3.xml><?xml version="1.0" encoding="utf-8"?>
-<p:sld xmlns:a="http://schemas.openxmlformats.org/drawingml/2006/main" xmlns:p="http://schemas.openxmlformats.org/presentationml/2006/main" xmlns:r="http://schemas.openxmlformats.org/officeDocument/2006/relationships">
+<p:sld xmlns:a="http://schemas.openxmlformats.org/drawingml/2006/main" xmlns:r="http://schemas.openxmlformats.org/officeDocument/2006/relationships" xmlns:p="http://schemas.openxmlformats.org/presentationml/2006/main">
   <p:cSld>
     <p:bg>
       <p:bgPr>
@@ -8367,12 +8952,20 @@
                 <a:solidFill>
                   <a:srgbClr val="E8EEF7"/>
                 </a:solidFill>
-                <a:latin typeface="Microsoft YaHei"/>
-                <a:ea typeface="Microsoft YaHei"/>
-                <a:cs typeface="Microsoft YaHei"/>
+                <a:latin typeface="微软雅黑" panose="020B0503020204020204" charset="-122"/>
+                <a:ea typeface="微软雅黑" panose="020B0503020204020204" charset="-122"/>
+                <a:cs typeface="微软雅黑" panose="020B0503020204020204" charset="-122"/>
               </a:rPr>
               <a:t>选题背景：RTS 太“点”，大战略太“远”</a:t>
             </a:r>
+            <a:endParaRPr sz="2800" b="1">
+              <a:solidFill>
+                <a:srgbClr val="E8EEF7"/>
+              </a:solidFill>
+              <a:latin typeface="微软雅黑" panose="020B0503020204020204" charset="-122"/>
+              <a:ea typeface="微软雅黑" panose="020B0503020204020204" charset="-122"/>
+              <a:cs typeface="微软雅黑" panose="020B0503020204020204" charset="-122"/>
+            </a:endParaRPr>
           </a:p>
         </p:txBody>
       </p:sp>
@@ -8404,12 +8997,20 @@
                 <a:solidFill>
                   <a:srgbClr val="8B9BB4"/>
                 </a:solidFill>
-                <a:latin typeface="Microsoft YaHei"/>
-                <a:ea typeface="Microsoft YaHei"/>
-                <a:cs typeface="Microsoft YaHei"/>
+                <a:latin typeface="微软雅黑" panose="020B0503020204020204" charset="-122"/>
+                <a:ea typeface="微软雅黑" panose="020B0503020204020204" charset="-122"/>
+                <a:cs typeface="微软雅黑" panose="020B0503020204020204" charset="-122"/>
               </a:rPr>
               <a:t>我们想做一款“看得见一千名士兵、却只下宏观军令”的指挥官体验。</a:t>
             </a:r>
+            <a:endParaRPr sz="1400" b="0">
+              <a:solidFill>
+                <a:srgbClr val="8B9BB4"/>
+              </a:solidFill>
+              <a:latin typeface="微软雅黑" panose="020B0503020204020204" charset="-122"/>
+              <a:ea typeface="微软雅黑" panose="020B0503020204020204" charset="-122"/>
+              <a:cs typeface="微软雅黑" panose="020B0503020204020204" charset="-122"/>
+            </a:endParaRPr>
           </a:p>
         </p:txBody>
       </p:sp>
@@ -8531,12 +9132,20 @@
                 <a:solidFill>
                   <a:srgbClr val="E8EEF7"/>
                 </a:solidFill>
-                <a:latin typeface="Microsoft YaHei"/>
-                <a:ea typeface="Microsoft YaHei"/>
-                <a:cs typeface="Microsoft YaHei"/>
+                <a:latin typeface="微软雅黑" panose="020B0503020204020204" charset="-122"/>
+                <a:ea typeface="微软雅黑" panose="020B0503020204020204" charset="-122"/>
+                <a:cs typeface="微软雅黑" panose="020B0503020204020204" charset="-122"/>
               </a:rPr>
               <a:t>痛点</a:t>
             </a:r>
+            <a:endParaRPr sz="1400" b="1">
+              <a:solidFill>
+                <a:srgbClr val="E8EEF7"/>
+              </a:solidFill>
+              <a:latin typeface="微软雅黑" panose="020B0503020204020204" charset="-122"/>
+              <a:ea typeface="微软雅黑" panose="020B0503020204020204" charset="-122"/>
+              <a:cs typeface="微软雅黑" panose="020B0503020204020204" charset="-122"/>
+            </a:endParaRPr>
           </a:p>
         </p:txBody>
       </p:sp>
@@ -8568,13 +9177,21 @@
                 <a:solidFill>
                   <a:srgbClr val="8B9BB4"/>
                 </a:solidFill>
-                <a:latin typeface="Microsoft YaHei"/>
-                <a:ea typeface="Microsoft YaHei"/>
-                <a:cs typeface="Microsoft YaHei"/>
+                <a:latin typeface="微软雅黑" panose="020B0503020204020204" charset="-122"/>
+                <a:ea typeface="微软雅黑" panose="020B0503020204020204" charset="-122"/>
+                <a:cs typeface="微软雅黑" panose="020B0503020204020204" charset="-122"/>
               </a:rPr>
               <a:t>传统 RTS 微操负担重；
 抽象兵团数字缺乏战场临场感。</a:t>
             </a:r>
+            <a:endParaRPr sz="1300" b="0">
+              <a:solidFill>
+                <a:srgbClr val="8B9BB4"/>
+              </a:solidFill>
+              <a:latin typeface="微软雅黑" panose="020B0503020204020204" charset="-122"/>
+              <a:ea typeface="微软雅黑" panose="020B0503020204020204" charset="-122"/>
+              <a:cs typeface="微软雅黑" panose="020B0503020204020204" charset="-122"/>
+            </a:endParaRPr>
           </a:p>
         </p:txBody>
       </p:sp>
@@ -8696,12 +9313,20 @@
                 <a:solidFill>
                   <a:srgbClr val="E8EEF7"/>
                 </a:solidFill>
-                <a:latin typeface="Microsoft YaHei"/>
-                <a:ea typeface="Microsoft YaHei"/>
-                <a:cs typeface="Microsoft YaHei"/>
+                <a:latin typeface="微软雅黑" panose="020B0503020204020204" charset="-122"/>
+                <a:ea typeface="微软雅黑" panose="020B0503020204020204" charset="-122"/>
+                <a:cs typeface="微软雅黑" panose="020B0503020204020204" charset="-122"/>
               </a:rPr>
               <a:t>机会</a:t>
             </a:r>
+            <a:endParaRPr sz="1400" b="1">
+              <a:solidFill>
+                <a:srgbClr val="E8EEF7"/>
+              </a:solidFill>
+              <a:latin typeface="微软雅黑" panose="020B0503020204020204" charset="-122"/>
+              <a:ea typeface="微软雅黑" panose="020B0503020204020204" charset="-122"/>
+              <a:cs typeface="微软雅黑" panose="020B0503020204020204" charset="-122"/>
+            </a:endParaRPr>
           </a:p>
         </p:txBody>
       </p:sp>
@@ -8733,13 +9358,21 @@
                 <a:solidFill>
                   <a:srgbClr val="8B9BB4"/>
                 </a:solidFill>
-                <a:latin typeface="Microsoft YaHei"/>
-                <a:ea typeface="Microsoft YaHei"/>
-                <a:cs typeface="Microsoft YaHei"/>
+                <a:latin typeface="微软雅黑" panose="020B0503020204020204" charset="-122"/>
+                <a:ea typeface="微软雅黑" panose="020B0503020204020204" charset="-122"/>
+                <a:cs typeface="微软雅黑" panose="020B0503020204020204" charset="-122"/>
               </a:rPr>
               <a:t>自然语言/语音可降低操作门槛；
 固定时间步模拟可支撑千人规模。</a:t>
             </a:r>
+            <a:endParaRPr sz="1300" b="0">
+              <a:solidFill>
+                <a:srgbClr val="8B9BB4"/>
+              </a:solidFill>
+              <a:latin typeface="微软雅黑" panose="020B0503020204020204" charset="-122"/>
+              <a:ea typeface="微软雅黑" panose="020B0503020204020204" charset="-122"/>
+              <a:cs typeface="微软雅黑" panose="020B0503020204020204" charset="-122"/>
+            </a:endParaRPr>
           </a:p>
         </p:txBody>
       </p:sp>
@@ -8861,12 +9494,20 @@
                 <a:solidFill>
                   <a:srgbClr val="E8EEF7"/>
                 </a:solidFill>
-                <a:latin typeface="Microsoft YaHei"/>
-                <a:ea typeface="Microsoft YaHei"/>
-                <a:cs typeface="Microsoft YaHei"/>
+                <a:latin typeface="微软雅黑" panose="020B0503020204020204" charset="-122"/>
+                <a:ea typeface="微软雅黑" panose="020B0503020204020204" charset="-122"/>
+                <a:cs typeface="微软雅黑" panose="020B0503020204020204" charset="-122"/>
               </a:rPr>
               <a:t>玩家价值</a:t>
             </a:r>
+            <a:endParaRPr sz="1400" b="1">
+              <a:solidFill>
+                <a:srgbClr val="E8EEF7"/>
+              </a:solidFill>
+              <a:latin typeface="微软雅黑" panose="020B0503020204020204" charset="-122"/>
+              <a:ea typeface="微软雅黑" panose="020B0503020204020204" charset="-122"/>
+              <a:cs typeface="微软雅黑" panose="020B0503020204020204" charset="-122"/>
+            </a:endParaRPr>
           </a:p>
         </p:txBody>
       </p:sp>
@@ -8898,13 +9539,21 @@
                 <a:solidFill>
                   <a:srgbClr val="8B9BB4"/>
                 </a:solidFill>
-                <a:latin typeface="Microsoft YaHei"/>
-                <a:ea typeface="Microsoft YaHei"/>
-                <a:cs typeface="Microsoft YaHei"/>
+                <a:latin typeface="微软雅黑" panose="020B0503020204020204" charset="-122"/>
+                <a:ea typeface="微软雅黑" panose="020B0503020204020204" charset="-122"/>
+                <a:cs typeface="微软雅黑" panose="020B0503020204020204" charset="-122"/>
               </a:rPr>
               <a:t>当将领下军令，而不是当鼠标点小兵；
 信息战、工程与地形成为胜负关键。</a:t>
             </a:r>
+            <a:endParaRPr sz="1300" b="0">
+              <a:solidFill>
+                <a:srgbClr val="8B9BB4"/>
+              </a:solidFill>
+              <a:latin typeface="微软雅黑" panose="020B0503020204020204" charset="-122"/>
+              <a:ea typeface="微软雅黑" panose="020B0503020204020204" charset="-122"/>
+              <a:cs typeface="微软雅黑" panose="020B0503020204020204" charset="-122"/>
+            </a:endParaRPr>
           </a:p>
         </p:txBody>
       </p:sp>
@@ -8983,12 +9632,20 @@
                 <a:solidFill>
                   <a:srgbClr val="3B82F6"/>
                 </a:solidFill>
-                <a:latin typeface="Microsoft YaHei"/>
-                <a:ea typeface="Microsoft YaHei"/>
-                <a:cs typeface="Microsoft YaHei"/>
+                <a:latin typeface="微软雅黑" panose="020B0503020204020204" charset="-122"/>
+                <a:ea typeface="微软雅黑" panose="020B0503020204020204" charset="-122"/>
+                <a:cs typeface="微软雅黑" panose="020B0503020204020204" charset="-122"/>
               </a:rPr>
               <a:t>500 vs 500</a:t>
             </a:r>
+            <a:endParaRPr sz="2000" b="1">
+              <a:solidFill>
+                <a:srgbClr val="3B82F6"/>
+              </a:solidFill>
+              <a:latin typeface="微软雅黑" panose="020B0503020204020204" charset="-122"/>
+              <a:ea typeface="微软雅黑" panose="020B0503020204020204" charset="-122"/>
+              <a:cs typeface="微软雅黑" panose="020B0503020204020204" charset="-122"/>
+            </a:endParaRPr>
           </a:p>
         </p:txBody>
       </p:sp>
@@ -9020,12 +9677,20 @@
                 <a:solidFill>
                   <a:srgbClr val="8B9BB4"/>
                 </a:solidFill>
-                <a:latin typeface="Microsoft YaHei"/>
-                <a:ea typeface="Microsoft YaHei"/>
-                <a:cs typeface="Microsoft YaHei"/>
+                <a:latin typeface="微软雅黑" panose="020B0503020204020204" charset="-122"/>
+                <a:ea typeface="微软雅黑" panose="020B0503020204020204" charset="-122"/>
+                <a:cs typeface="微软雅黑" panose="020B0503020204020204" charset="-122"/>
               </a:rPr>
               <a:t>默认独立士兵规模</a:t>
             </a:r>
+            <a:endParaRPr sz="1200" b="0">
+              <a:solidFill>
+                <a:srgbClr val="8B9BB4"/>
+              </a:solidFill>
+              <a:latin typeface="微软雅黑" panose="020B0503020204020204" charset="-122"/>
+              <a:ea typeface="微软雅黑" panose="020B0503020204020204" charset="-122"/>
+              <a:cs typeface="微软雅黑" panose="020B0503020204020204" charset="-122"/>
+            </a:endParaRPr>
           </a:p>
         </p:txBody>
       </p:sp>
@@ -9104,12 +9769,20 @@
                 <a:solidFill>
                   <a:srgbClr val="3B82F6"/>
                 </a:solidFill>
-                <a:latin typeface="Microsoft YaHei"/>
-                <a:ea typeface="Microsoft YaHei"/>
-                <a:cs typeface="Microsoft YaHei"/>
+                <a:latin typeface="微软雅黑" panose="020B0503020204020204" charset="-122"/>
+                <a:ea typeface="微软雅黑" panose="020B0503020204020204" charset="-122"/>
+                <a:cs typeface="微软雅黑" panose="020B0503020204020204" charset="-122"/>
               </a:rPr>
               <a:t>约 10 分钟</a:t>
             </a:r>
+            <a:endParaRPr sz="2000" b="1">
+              <a:solidFill>
+                <a:srgbClr val="3B82F6"/>
+              </a:solidFill>
+              <a:latin typeface="微软雅黑" panose="020B0503020204020204" charset="-122"/>
+              <a:ea typeface="微软雅黑" panose="020B0503020204020204" charset="-122"/>
+              <a:cs typeface="微软雅黑" panose="020B0503020204020204" charset="-122"/>
+            </a:endParaRPr>
           </a:p>
         </p:txBody>
       </p:sp>
@@ -9141,12 +9814,20 @@
                 <a:solidFill>
                   <a:srgbClr val="8B9BB4"/>
                 </a:solidFill>
-                <a:latin typeface="Microsoft YaHei"/>
-                <a:ea typeface="Microsoft YaHei"/>
-                <a:cs typeface="Microsoft YaHei"/>
+                <a:latin typeface="微软雅黑" panose="020B0503020204020204" charset="-122"/>
+                <a:ea typeface="微软雅黑" panose="020B0503020204020204" charset="-122"/>
+                <a:cs typeface="微软雅黑" panose="020B0503020204020204" charset="-122"/>
               </a:rPr>
               <a:t>单局节奏目标</a:t>
             </a:r>
+            <a:endParaRPr sz="1200" b="0">
+              <a:solidFill>
+                <a:srgbClr val="8B9BB4"/>
+              </a:solidFill>
+              <a:latin typeface="微软雅黑" panose="020B0503020204020204" charset="-122"/>
+              <a:ea typeface="微软雅黑" panose="020B0503020204020204" charset="-122"/>
+              <a:cs typeface="微软雅黑" panose="020B0503020204020204" charset="-122"/>
+            </a:endParaRPr>
           </a:p>
         </p:txBody>
       </p:sp>
@@ -9225,12 +9906,20 @@
                 <a:solidFill>
                   <a:srgbClr val="3B82F6"/>
                 </a:solidFill>
-                <a:latin typeface="Microsoft YaHei"/>
-                <a:ea typeface="Microsoft YaHei"/>
-                <a:cs typeface="Microsoft YaHei"/>
+                <a:latin typeface="微软雅黑" panose="020B0503020204020204" charset="-122"/>
+                <a:ea typeface="微软雅黑" panose="020B0503020204020204" charset="-122"/>
+                <a:cs typeface="微软雅黑" panose="020B0503020204020204" charset="-122"/>
               </a:rPr>
               <a:t>离线可玩</a:t>
             </a:r>
+            <a:endParaRPr sz="2000" b="1">
+              <a:solidFill>
+                <a:srgbClr val="3B82F6"/>
+              </a:solidFill>
+              <a:latin typeface="微软雅黑" panose="020B0503020204020204" charset="-122"/>
+              <a:ea typeface="微软雅黑" panose="020B0503020204020204" charset="-122"/>
+              <a:cs typeface="微软雅黑" panose="020B0503020204020204" charset="-122"/>
+            </a:endParaRPr>
           </a:p>
         </p:txBody>
       </p:sp>
@@ -9262,12 +9951,20 @@
                 <a:solidFill>
                   <a:srgbClr val="8B9BB4"/>
                 </a:solidFill>
-                <a:latin typeface="Microsoft YaHei"/>
-                <a:ea typeface="Microsoft YaHei"/>
-                <a:cs typeface="Microsoft YaHei"/>
+                <a:latin typeface="微软雅黑" panose="020B0503020204020204" charset="-122"/>
+                <a:ea typeface="微软雅黑" panose="020B0503020204020204" charset="-122"/>
+                <a:cs typeface="微软雅黑" panose="020B0503020204020204" charset="-122"/>
               </a:rPr>
               <a:t>无网/无 LLM 仍可完整对局</a:t>
             </a:r>
+            <a:endParaRPr sz="1200" b="0">
+              <a:solidFill>
+                <a:srgbClr val="8B9BB4"/>
+              </a:solidFill>
+              <a:latin typeface="微软雅黑" panose="020B0503020204020204" charset="-122"/>
+              <a:ea typeface="微软雅黑" panose="020B0503020204020204" charset="-122"/>
+              <a:cs typeface="微软雅黑" panose="020B0503020204020204" charset="-122"/>
+            </a:endParaRPr>
           </a:p>
         </p:txBody>
       </p:sp>
@@ -9346,12 +10043,20 @@
                 <a:solidFill>
                   <a:srgbClr val="3B82F6"/>
                 </a:solidFill>
-                <a:latin typeface="Microsoft YaHei"/>
-                <a:ea typeface="Microsoft YaHei"/>
-                <a:cs typeface="Microsoft YaHei"/>
+                <a:latin typeface="微软雅黑" panose="020B0503020204020204" charset="-122"/>
+                <a:ea typeface="微软雅黑" panose="020B0503020204020204" charset="-122"/>
+                <a:cs typeface="微软雅黑" panose="020B0503020204020204" charset="-122"/>
               </a:rPr>
               <a:t>双平台</a:t>
             </a:r>
+            <a:endParaRPr sz="2000" b="1">
+              <a:solidFill>
+                <a:srgbClr val="3B82F6"/>
+              </a:solidFill>
+              <a:latin typeface="微软雅黑" panose="020B0503020204020204" charset="-122"/>
+              <a:ea typeface="微软雅黑" panose="020B0503020204020204" charset="-122"/>
+              <a:cs typeface="微软雅黑" panose="020B0503020204020204" charset="-122"/>
+            </a:endParaRPr>
           </a:p>
         </p:txBody>
       </p:sp>
@@ -9383,12 +10088,20 @@
                 <a:solidFill>
                   <a:srgbClr val="8B9BB4"/>
                 </a:solidFill>
-                <a:latin typeface="Microsoft YaHei"/>
-                <a:ea typeface="Microsoft YaHei"/>
-                <a:cs typeface="Microsoft YaHei"/>
+                <a:latin typeface="微软雅黑" panose="020B0503020204020204" charset="-122"/>
+                <a:ea typeface="微软雅黑" panose="020B0503020204020204" charset="-122"/>
+                <a:cs typeface="微软雅黑" panose="020B0503020204020204" charset="-122"/>
               </a:rPr>
               <a:t>Windows / Linux</a:t>
             </a:r>
+            <a:endParaRPr sz="1200" b="0">
+              <a:solidFill>
+                <a:srgbClr val="8B9BB4"/>
+              </a:solidFill>
+              <a:latin typeface="微软雅黑" panose="020B0503020204020204" charset="-122"/>
+              <a:ea typeface="微软雅黑" panose="020B0503020204020204" charset="-122"/>
+              <a:cs typeface="微软雅黑" panose="020B0503020204020204" charset="-122"/>
+            </a:endParaRPr>
           </a:p>
         </p:txBody>
       </p:sp>
@@ -9467,12 +10180,20 @@
                 <a:solidFill>
                   <a:srgbClr val="D97706"/>
                 </a:solidFill>
-                <a:latin typeface="Microsoft YaHei"/>
-                <a:ea typeface="Microsoft YaHei"/>
-                <a:cs typeface="Microsoft YaHei"/>
+                <a:latin typeface="微软雅黑" panose="020B0503020204020204" charset="-122"/>
+                <a:ea typeface="微软雅黑" panose="020B0503020204020204" charset="-122"/>
+                <a:cs typeface="微软雅黑" panose="020B0503020204020204" charset="-122"/>
               </a:rPr>
               <a:t>项目定位一句话</a:t>
             </a:r>
+            <a:endParaRPr sz="1300" b="1">
+              <a:solidFill>
+                <a:srgbClr val="D97706"/>
+              </a:solidFill>
+              <a:latin typeface="微软雅黑" panose="020B0503020204020204" charset="-122"/>
+              <a:ea typeface="微软雅黑" panose="020B0503020204020204" charset="-122"/>
+              <a:cs typeface="微软雅黑" panose="020B0503020204020204" charset="-122"/>
+            </a:endParaRPr>
           </a:p>
         </p:txBody>
       </p:sp>
@@ -9504,12 +10225,20 @@
                 <a:solidFill>
                   <a:srgbClr val="E8EEF7"/>
                 </a:solidFill>
-                <a:latin typeface="Microsoft YaHei"/>
-                <a:ea typeface="Microsoft YaHei"/>
-                <a:cs typeface="Microsoft YaHei"/>
+                <a:latin typeface="微软雅黑" panose="020B0503020204020204" charset="-122"/>
+                <a:ea typeface="微软雅黑" panose="020B0503020204020204" charset="-122"/>
+                <a:cs typeface="微软雅黑" panose="020B0503020204020204" charset="-122"/>
               </a:rPr>
               <a:t>可验证的自然语言指挥 + 一千名独立士兵 + 公平战争迷雾下的单人战术对抗。</a:t>
             </a:r>
+            <a:endParaRPr sz="1600" b="0">
+              <a:solidFill>
+                <a:srgbClr val="E8EEF7"/>
+              </a:solidFill>
+              <a:latin typeface="微软雅黑" panose="020B0503020204020204" charset="-122"/>
+              <a:ea typeface="微软雅黑" panose="020B0503020204020204" charset="-122"/>
+              <a:cs typeface="微软雅黑" panose="020B0503020204020204" charset="-122"/>
+            </a:endParaRPr>
           </a:p>
         </p:txBody>
       </p:sp>
@@ -9541,12 +10270,20 @@
                 <a:solidFill>
                   <a:srgbClr val="8B9BB4"/>
                 </a:solidFill>
-                <a:latin typeface="Microsoft YaHei"/>
-                <a:ea typeface="Microsoft YaHei"/>
-                <a:cs typeface="Microsoft YaHei"/>
+                <a:latin typeface="微软雅黑" panose="020B0503020204020204" charset="-122"/>
+                <a:ea typeface="微软雅黑" panose="020B0503020204020204" charset="-122"/>
+                <a:cs typeface="微软雅黑" panose="020B0503020204020204" charset="-122"/>
               </a:rPr>
               <a:t>技术路线：Python + Pygame-ce，固定时间步模拟，可选 DeepSeek / 本地语音。</a:t>
             </a:r>
+            <a:endParaRPr sz="1300" b="0">
+              <a:solidFill>
+                <a:srgbClr val="8B9BB4"/>
+              </a:solidFill>
+              <a:latin typeface="微软雅黑" panose="020B0503020204020204" charset="-122"/>
+              <a:ea typeface="微软雅黑" panose="020B0503020204020204" charset="-122"/>
+              <a:cs typeface="微软雅黑" panose="020B0503020204020204" charset="-122"/>
+            </a:endParaRPr>
           </a:p>
         </p:txBody>
       </p:sp>
@@ -9621,12 +10358,20 @@
                 <a:solidFill>
                   <a:srgbClr val="8B9BB4"/>
                 </a:solidFill>
-                <a:latin typeface="Microsoft YaHei"/>
-                <a:ea typeface="Microsoft YaHei"/>
-                <a:cs typeface="Microsoft YaHei"/>
+                <a:latin typeface="微软雅黑" panose="020B0503020204020204" charset="-122"/>
+                <a:ea typeface="微软雅黑" panose="020B0503020204020204" charset="-122"/>
+                <a:cs typeface="微软雅黑" panose="020B0503020204020204" charset="-122"/>
               </a:rPr>
               <a:t>小组作业答辩 · 指挥官战术对抗</a:t>
             </a:r>
+            <a:endParaRPr sz="1000" b="0">
+              <a:solidFill>
+                <a:srgbClr val="8B9BB4"/>
+              </a:solidFill>
+              <a:latin typeface="微软雅黑" panose="020B0503020204020204" charset="-122"/>
+              <a:ea typeface="微软雅黑" panose="020B0503020204020204" charset="-122"/>
+              <a:cs typeface="微软雅黑" panose="020B0503020204020204" charset="-122"/>
+            </a:endParaRPr>
           </a:p>
         </p:txBody>
       </p:sp>
@@ -9658,12 +10403,20 @@
                 <a:solidFill>
                   <a:srgbClr val="8B9BB4"/>
                 </a:solidFill>
-                <a:latin typeface="Microsoft YaHei"/>
-                <a:ea typeface="Microsoft YaHei"/>
-                <a:cs typeface="Microsoft YaHei"/>
+                <a:latin typeface="微软雅黑" panose="020B0503020204020204" charset="-122"/>
+                <a:ea typeface="微软雅黑" panose="020B0503020204020204" charset="-122"/>
+                <a:cs typeface="微软雅黑" panose="020B0503020204020204" charset="-122"/>
               </a:rPr>
               <a:t>03 / 13</a:t>
             </a:r>
+            <a:endParaRPr sz="1000" b="0">
+              <a:solidFill>
+                <a:srgbClr val="8B9BB4"/>
+              </a:solidFill>
+              <a:latin typeface="微软雅黑" panose="020B0503020204020204" charset="-122"/>
+              <a:ea typeface="微软雅黑" panose="020B0503020204020204" charset="-122"/>
+              <a:cs typeface="微软雅黑" panose="020B0503020204020204" charset="-122"/>
+            </a:endParaRPr>
           </a:p>
         </p:txBody>
       </p:sp>
@@ -9676,7 +10429,7 @@
 </file>
 
 <file path=ppt/slides/slide4.xml><?xml version="1.0" encoding="utf-8"?>
-<p:sld xmlns:a="http://schemas.openxmlformats.org/drawingml/2006/main" xmlns:p="http://schemas.openxmlformats.org/presentationml/2006/main" xmlns:r="http://schemas.openxmlformats.org/officeDocument/2006/relationships">
+<p:sld xmlns:a="http://schemas.openxmlformats.org/drawingml/2006/main" xmlns:r="http://schemas.openxmlformats.org/officeDocument/2006/relationships" xmlns:p="http://schemas.openxmlformats.org/presentationml/2006/main">
   <p:cSld>
     <p:bg>
       <p:bgPr>
@@ -9721,12 +10474,20 @@
                 <a:solidFill>
                   <a:srgbClr val="E8EEF7"/>
                 </a:solidFill>
-                <a:latin typeface="Microsoft YaHei"/>
-                <a:ea typeface="Microsoft YaHei"/>
-                <a:cs typeface="Microsoft YaHei"/>
+                <a:latin typeface="微软雅黑" panose="020B0503020204020204" charset="-122"/>
+                <a:ea typeface="微软雅黑" panose="020B0503020204020204" charset="-122"/>
+                <a:cs typeface="微软雅黑" panose="020B0503020204020204" charset="-122"/>
               </a:rPr>
               <a:t>项目目标：V1.0 必须完成一局完整对战</a:t>
             </a:r>
+            <a:endParaRPr sz="2800" b="1">
+              <a:solidFill>
+                <a:srgbClr val="E8EEF7"/>
+              </a:solidFill>
+              <a:latin typeface="微软雅黑" panose="020B0503020204020204" charset="-122"/>
+              <a:ea typeface="微软雅黑" panose="020B0503020204020204" charset="-122"/>
+              <a:cs typeface="微软雅黑" panose="020B0503020204020204" charset="-122"/>
+            </a:endParaRPr>
           </a:p>
         </p:txBody>
       </p:sp>
@@ -9805,12 +10566,20 @@
                 <a:solidFill>
                   <a:srgbClr val="2DD4BF"/>
                 </a:solidFill>
-                <a:latin typeface="Microsoft YaHei"/>
-                <a:ea typeface="Microsoft YaHei"/>
-                <a:cs typeface="Microsoft YaHei"/>
+                <a:latin typeface="微软雅黑" panose="020B0503020204020204" charset="-122"/>
+                <a:ea typeface="微软雅黑" panose="020B0503020204020204" charset="-122"/>
+                <a:cs typeface="微软雅黑" panose="020B0503020204020204" charset="-122"/>
               </a:rPr>
               <a:t>必须做到</a:t>
             </a:r>
+            <a:endParaRPr sz="1600" b="1">
+              <a:solidFill>
+                <a:srgbClr val="2DD4BF"/>
+              </a:solidFill>
+              <a:latin typeface="微软雅黑" panose="020B0503020204020204" charset="-122"/>
+              <a:ea typeface="微软雅黑" panose="020B0503020204020204" charset="-122"/>
+              <a:cs typeface="微软雅黑" panose="020B0503020204020204" charset="-122"/>
+            </a:endParaRPr>
           </a:p>
         </p:txBody>
       </p:sp>
@@ -9846,12 +10615,20 @@
                 <a:solidFill>
                   <a:srgbClr val="E8EEF7"/>
                 </a:solidFill>
-                <a:latin typeface="Microsoft YaHei"/>
-                <a:ea typeface="Microsoft YaHei"/>
-                <a:cs typeface="Microsoft YaHei"/>
+                <a:latin typeface="微软雅黑" panose="020B0503020204020204" charset="-122"/>
+                <a:ea typeface="微软雅黑" panose="020B0503020204020204" charset="-122"/>
+                <a:cs typeface="微软雅黑" panose="020B0503020204020204" charset="-122"/>
               </a:rPr>
               <a:t>▸  500×500 独立单位，固定时间步模拟</a:t>
             </a:r>
+            <a:endParaRPr sz="1400" b="0">
+              <a:solidFill>
+                <a:srgbClr val="E8EEF7"/>
+              </a:solidFill>
+              <a:latin typeface="微软雅黑" panose="020B0503020204020204" charset="-122"/>
+              <a:ea typeface="微软雅黑" panose="020B0503020204020204" charset="-122"/>
+              <a:cs typeface="微软雅黑" panose="020B0503020204020204" charset="-122"/>
+            </a:endParaRPr>
           </a:p>
           <a:p>
             <a:pPr>
@@ -9864,12 +10641,20 @@
                 <a:solidFill>
                   <a:srgbClr val="E8EEF7"/>
                 </a:solidFill>
-                <a:latin typeface="Microsoft YaHei"/>
-                <a:ea typeface="Microsoft YaHei"/>
-                <a:cs typeface="Microsoft YaHei"/>
+                <a:latin typeface="微软雅黑" panose="020B0503020204020204" charset="-122"/>
+                <a:ea typeface="微软雅黑" panose="020B0503020204020204" charset="-122"/>
+                <a:cs typeface="微软雅黑" panose="020B0503020204020204" charset="-122"/>
               </a:rPr>
               <a:t>▸  将领、护卫与步兵/侦察/工兵/刺客/预备兵</a:t>
             </a:r>
+            <a:endParaRPr sz="1400" b="0">
+              <a:solidFill>
+                <a:srgbClr val="E8EEF7"/>
+              </a:solidFill>
+              <a:latin typeface="微软雅黑" panose="020B0503020204020204" charset="-122"/>
+              <a:ea typeface="微软雅黑" panose="020B0503020204020204" charset="-122"/>
+              <a:cs typeface="微软雅黑" panose="020B0503020204020204" charset="-122"/>
+            </a:endParaRPr>
           </a:p>
           <a:p>
             <a:pPr>
@@ -9882,12 +10667,20 @@
                 <a:solidFill>
                   <a:srgbClr val="E8EEF7"/>
                 </a:solidFill>
-                <a:latin typeface="Microsoft YaHei"/>
-                <a:ea typeface="Microsoft YaHei"/>
-                <a:cs typeface="Microsoft YaHei"/>
+                <a:latin typeface="微软雅黑" panose="020B0503020204020204" charset="-122"/>
+                <a:ea typeface="微软雅黑" panose="020B0503020204020204" charset="-122"/>
+                <a:cs typeface="微软雅黑" panose="020B0503020204020204" charset="-122"/>
               </a:rPr>
               <a:t>▸  永久探索战争迷雾 + 双方信息隔离</a:t>
             </a:r>
+            <a:endParaRPr sz="1400" b="0">
+              <a:solidFill>
+                <a:srgbClr val="E8EEF7"/>
+              </a:solidFill>
+              <a:latin typeface="微软雅黑" panose="020B0503020204020204" charset="-122"/>
+              <a:ea typeface="微软雅黑" panose="020B0503020204020204" charset="-122"/>
+              <a:cs typeface="微软雅黑" panose="020B0503020204020204" charset="-122"/>
+            </a:endParaRPr>
           </a:p>
           <a:p>
             <a:pPr>
@@ -9900,12 +10693,20 @@
                 <a:solidFill>
                   <a:srgbClr val="E8EEF7"/>
                 </a:solidFill>
-                <a:latin typeface="Microsoft YaHei"/>
-                <a:ea typeface="Microsoft YaHei"/>
-                <a:cs typeface="Microsoft YaHei"/>
+                <a:latin typeface="微软雅黑" panose="020B0503020204020204" charset="-122"/>
+                <a:ea typeface="微软雅黑" panose="020B0503020204020204" charset="-122"/>
+                <a:cs typeface="微软雅黑" panose="020B0503020204020204" charset="-122"/>
               </a:rPr>
               <a:t>▸  河流硬阻挡，架桥/造船/建塔/开路</a:t>
             </a:r>
+            <a:endParaRPr sz="1400" b="0">
+              <a:solidFill>
+                <a:srgbClr val="E8EEF7"/>
+              </a:solidFill>
+              <a:latin typeface="微软雅黑" panose="020B0503020204020204" charset="-122"/>
+              <a:ea typeface="微软雅黑" panose="020B0503020204020204" charset="-122"/>
+              <a:cs typeface="微软雅黑" panose="020B0503020204020204" charset="-122"/>
+            </a:endParaRPr>
           </a:p>
           <a:p>
             <a:pPr>
@@ -9918,12 +10719,20 @@
                 <a:solidFill>
                   <a:srgbClr val="E8EEF7"/>
                 </a:solidFill>
-                <a:latin typeface="Microsoft YaHei"/>
-                <a:ea typeface="Microsoft YaHei"/>
-                <a:cs typeface="Microsoft YaHei"/>
+                <a:latin typeface="微软雅黑" panose="020B0503020204020204" charset="-122"/>
+                <a:ea typeface="微软雅黑" panose="020B0503020204020204" charset="-122"/>
+                <a:cs typeface="微软雅黑" panose="020B0503020204020204" charset="-122"/>
               </a:rPr>
               <a:t>▸  文字/鼠标/键盘指挥，语音与大模型可选</a:t>
             </a:r>
+            <a:endParaRPr sz="1400" b="0">
+              <a:solidFill>
+                <a:srgbClr val="E8EEF7"/>
+              </a:solidFill>
+              <a:latin typeface="微软雅黑" panose="020B0503020204020204" charset="-122"/>
+              <a:ea typeface="微软雅黑" panose="020B0503020204020204" charset="-122"/>
+              <a:cs typeface="微软雅黑" panose="020B0503020204020204" charset="-122"/>
+            </a:endParaRPr>
           </a:p>
           <a:p>
             <a:pPr>
@@ -9936,12 +10745,20 @@
                 <a:solidFill>
                   <a:srgbClr val="E8EEF7"/>
                 </a:solidFill>
-                <a:latin typeface="Microsoft YaHei"/>
-                <a:ea typeface="Microsoft YaHei"/>
-                <a:cs typeface="Microsoft YaHei"/>
+                <a:latin typeface="微软雅黑" panose="020B0503020204020204" charset="-122"/>
+                <a:ea typeface="微软雅黑" panose="020B0503020204020204" charset="-122"/>
+                <a:cs typeface="微软雅黑" panose="020B0503020204020204" charset="-122"/>
               </a:rPr>
               <a:t>▸  本地 AI、存档回放、结算统计、双平台运行</a:t>
             </a:r>
+            <a:endParaRPr sz="1400" b="0">
+              <a:solidFill>
+                <a:srgbClr val="E8EEF7"/>
+              </a:solidFill>
+              <a:latin typeface="微软雅黑" panose="020B0503020204020204" charset="-122"/>
+              <a:ea typeface="微软雅黑" panose="020B0503020204020204" charset="-122"/>
+              <a:cs typeface="微软雅黑" panose="020B0503020204020204" charset="-122"/>
+            </a:endParaRPr>
           </a:p>
         </p:txBody>
       </p:sp>
@@ -10020,12 +10837,20 @@
                 <a:solidFill>
                   <a:srgbClr val="D97706"/>
                 </a:solidFill>
-                <a:latin typeface="Microsoft YaHei"/>
-                <a:ea typeface="Microsoft YaHei"/>
-                <a:cs typeface="Microsoft YaHei"/>
+                <a:latin typeface="微软雅黑" panose="020B0503020204020204" charset="-122"/>
+                <a:ea typeface="微软雅黑" panose="020B0503020204020204" charset="-122"/>
+                <a:cs typeface="微软雅黑" panose="020B0503020204020204" charset="-122"/>
               </a:rPr>
               <a:t>明确不做 / 约束</a:t>
             </a:r>
+            <a:endParaRPr sz="1600" b="1">
+              <a:solidFill>
+                <a:srgbClr val="D97706"/>
+              </a:solidFill>
+              <a:latin typeface="微软雅黑" panose="020B0503020204020204" charset="-122"/>
+              <a:ea typeface="微软雅黑" panose="020B0503020204020204" charset="-122"/>
+              <a:cs typeface="微软雅黑" panose="020B0503020204020204" charset="-122"/>
+            </a:endParaRPr>
           </a:p>
         </p:txBody>
       </p:sp>
@@ -10061,12 +10886,20 @@
                 <a:solidFill>
                   <a:srgbClr val="E8EEF7"/>
                 </a:solidFill>
-                <a:latin typeface="Microsoft YaHei"/>
-                <a:ea typeface="Microsoft YaHei"/>
-                <a:cs typeface="Microsoft YaHei"/>
+                <a:latin typeface="微软雅黑" panose="020B0503020204020204" charset="-122"/>
+                <a:ea typeface="微软雅黑" panose="020B0503020204020204" charset="-122"/>
+                <a:cs typeface="微软雅黑" panose="020B0503020204020204" charset="-122"/>
               </a:rPr>
               <a:t>▸  不做：经济系统、长线养成、真人联机</a:t>
             </a:r>
+            <a:endParaRPr sz="1400" b="0">
+              <a:solidFill>
+                <a:srgbClr val="E8EEF7"/>
+              </a:solidFill>
+              <a:latin typeface="微软雅黑" panose="020B0503020204020204" charset="-122"/>
+              <a:ea typeface="微软雅黑" panose="020B0503020204020204" charset="-122"/>
+              <a:cs typeface="微软雅黑" panose="020B0503020204020204" charset="-122"/>
+            </a:endParaRPr>
           </a:p>
           <a:p>
             <a:pPr>
@@ -10079,12 +10912,20 @@
                 <a:solidFill>
                   <a:srgbClr val="E8EEF7"/>
                 </a:solidFill>
-                <a:latin typeface="Microsoft YaHei"/>
-                <a:ea typeface="Microsoft YaHei"/>
-                <a:cs typeface="Microsoft YaHei"/>
+                <a:latin typeface="微软雅黑" panose="020B0503020204020204" charset="-122"/>
+                <a:ea typeface="微软雅黑" panose="020B0503020204020204" charset="-122"/>
+                <a:cs typeface="微软雅黑" panose="020B0503020204020204" charset="-122"/>
               </a:rPr>
               <a:t>▸  不做：战役剧情、多语言、复杂科技树</a:t>
             </a:r>
+            <a:endParaRPr sz="1400" b="0">
+              <a:solidFill>
+                <a:srgbClr val="E8EEF7"/>
+              </a:solidFill>
+              <a:latin typeface="微软雅黑" panose="020B0503020204020204" charset="-122"/>
+              <a:ea typeface="微软雅黑" panose="020B0503020204020204" charset="-122"/>
+              <a:cs typeface="微软雅黑" panose="020B0503020204020204" charset="-122"/>
+            </a:endParaRPr>
           </a:p>
           <a:p>
             <a:pPr>
@@ -10097,12 +10938,20 @@
                 <a:solidFill>
                   <a:srgbClr val="E8EEF7"/>
                 </a:solidFill>
-                <a:latin typeface="Microsoft YaHei"/>
-                <a:ea typeface="Microsoft YaHei"/>
-                <a:cs typeface="Microsoft YaHei"/>
+                <a:latin typeface="微软雅黑" panose="020B0503020204020204" charset="-122"/>
+                <a:ea typeface="微软雅黑" panose="020B0503020204020204" charset="-122"/>
+                <a:cs typeface="微软雅黑" panose="020B0503020204020204" charset="-122"/>
               </a:rPr>
               <a:t>▸  约束：默认规模最低 30 FPS</a:t>
             </a:r>
+            <a:endParaRPr sz="1400" b="0">
+              <a:solidFill>
+                <a:srgbClr val="E8EEF7"/>
+              </a:solidFill>
+              <a:latin typeface="微软雅黑" panose="020B0503020204020204" charset="-122"/>
+              <a:ea typeface="微软雅黑" panose="020B0503020204020204" charset="-122"/>
+              <a:cs typeface="微软雅黑" panose="020B0503020204020204" charset="-122"/>
+            </a:endParaRPr>
           </a:p>
           <a:p>
             <a:pPr>
@@ -10115,12 +10964,20 @@
                 <a:solidFill>
                   <a:srgbClr val="E8EEF7"/>
                 </a:solidFill>
-                <a:latin typeface="Microsoft YaHei"/>
-                <a:ea typeface="Microsoft YaHei"/>
-                <a:cs typeface="Microsoft YaHei"/>
+                <a:latin typeface="微软雅黑" panose="020B0503020204020204" charset="-122"/>
+                <a:ea typeface="微软雅黑" panose="020B0503020204020204" charset="-122"/>
+                <a:cs typeface="微软雅黑" panose="020B0503020204020204" charset="-122"/>
               </a:rPr>
               <a:t>▸  约束：断网可离线完成整局</a:t>
             </a:r>
+            <a:endParaRPr sz="1400" b="0">
+              <a:solidFill>
+                <a:srgbClr val="E8EEF7"/>
+              </a:solidFill>
+              <a:latin typeface="微软雅黑" panose="020B0503020204020204" charset="-122"/>
+              <a:ea typeface="微软雅黑" panose="020B0503020204020204" charset="-122"/>
+              <a:cs typeface="微软雅黑" panose="020B0503020204020204" charset="-122"/>
+            </a:endParaRPr>
           </a:p>
           <a:p>
             <a:pPr>
@@ -10133,12 +10990,20 @@
                 <a:solidFill>
                   <a:srgbClr val="E8EEF7"/>
                 </a:solidFill>
-                <a:latin typeface="Microsoft YaHei"/>
-                <a:ea typeface="Microsoft YaHei"/>
-                <a:cs typeface="Microsoft YaHei"/>
+                <a:latin typeface="微软雅黑" panose="020B0503020204020204" charset="-122"/>
+                <a:ea typeface="微软雅黑" panose="020B0503020204020204" charset="-122"/>
+                <a:cs typeface="微软雅黑" panose="020B0503020204020204" charset="-122"/>
               </a:rPr>
               <a:t>▸  约束：AI 只能读阵营可见快照</a:t>
             </a:r>
+            <a:endParaRPr sz="1400" b="0">
+              <a:solidFill>
+                <a:srgbClr val="E8EEF7"/>
+              </a:solidFill>
+              <a:latin typeface="微软雅黑" panose="020B0503020204020204" charset="-122"/>
+              <a:ea typeface="微软雅黑" panose="020B0503020204020204" charset="-122"/>
+              <a:cs typeface="微软雅黑" panose="020B0503020204020204" charset="-122"/>
+            </a:endParaRPr>
           </a:p>
           <a:p>
             <a:pPr>
@@ -10151,12 +11016,20 @@
                 <a:solidFill>
                   <a:srgbClr val="E8EEF7"/>
                 </a:solidFill>
-                <a:latin typeface="Microsoft YaHei"/>
-                <a:ea typeface="Microsoft YaHei"/>
-                <a:cs typeface="Microsoft YaHei"/>
+                <a:latin typeface="微软雅黑" panose="020B0503020204020204" charset="-122"/>
+                <a:ea typeface="微软雅黑" panose="020B0503020204020204" charset="-122"/>
+                <a:cs typeface="微软雅黑" panose="020B0503020204020204" charset="-122"/>
               </a:rPr>
               <a:t>▸  约束：第三方素材许可证可追溯</a:t>
             </a:r>
+            <a:endParaRPr sz="1400" b="0">
+              <a:solidFill>
+                <a:srgbClr val="E8EEF7"/>
+              </a:solidFill>
+              <a:latin typeface="微软雅黑" panose="020B0503020204020204" charset="-122"/>
+              <a:ea typeface="微软雅黑" panose="020B0503020204020204" charset="-122"/>
+              <a:cs typeface="微软雅黑" panose="020B0503020204020204" charset="-122"/>
+            </a:endParaRPr>
           </a:p>
         </p:txBody>
       </p:sp>
@@ -10231,12 +11104,20 @@
                 <a:solidFill>
                   <a:srgbClr val="8B9BB4"/>
                 </a:solidFill>
-                <a:latin typeface="Microsoft YaHei"/>
-                <a:ea typeface="Microsoft YaHei"/>
-                <a:cs typeface="Microsoft YaHei"/>
+                <a:latin typeface="微软雅黑" panose="020B0503020204020204" charset="-122"/>
+                <a:ea typeface="微软雅黑" panose="020B0503020204020204" charset="-122"/>
+                <a:cs typeface="微软雅黑" panose="020B0503020204020204" charset="-122"/>
               </a:rPr>
               <a:t>小组作业答辩 · 指挥官战术对抗</a:t>
             </a:r>
+            <a:endParaRPr sz="1000" b="0">
+              <a:solidFill>
+                <a:srgbClr val="8B9BB4"/>
+              </a:solidFill>
+              <a:latin typeface="微软雅黑" panose="020B0503020204020204" charset="-122"/>
+              <a:ea typeface="微软雅黑" panose="020B0503020204020204" charset="-122"/>
+              <a:cs typeface="微软雅黑" panose="020B0503020204020204" charset="-122"/>
+            </a:endParaRPr>
           </a:p>
         </p:txBody>
       </p:sp>
@@ -10268,12 +11149,20 @@
                 <a:solidFill>
                   <a:srgbClr val="8B9BB4"/>
                 </a:solidFill>
-                <a:latin typeface="Microsoft YaHei"/>
-                <a:ea typeface="Microsoft YaHei"/>
-                <a:cs typeface="Microsoft YaHei"/>
+                <a:latin typeface="微软雅黑" panose="020B0503020204020204" charset="-122"/>
+                <a:ea typeface="微软雅黑" panose="020B0503020204020204" charset="-122"/>
+                <a:cs typeface="微软雅黑" panose="020B0503020204020204" charset="-122"/>
               </a:rPr>
               <a:t>04 / 13</a:t>
             </a:r>
+            <a:endParaRPr sz="1000" b="0">
+              <a:solidFill>
+                <a:srgbClr val="8B9BB4"/>
+              </a:solidFill>
+              <a:latin typeface="微软雅黑" panose="020B0503020204020204" charset="-122"/>
+              <a:ea typeface="微软雅黑" panose="020B0503020204020204" charset="-122"/>
+              <a:cs typeface="微软雅黑" panose="020B0503020204020204" charset="-122"/>
+            </a:endParaRPr>
           </a:p>
         </p:txBody>
       </p:sp>
@@ -10286,7 +11175,7 @@
 </file>
 
 <file path=ppt/slides/slide5.xml><?xml version="1.0" encoding="utf-8"?>
-<p:sld xmlns:a="http://schemas.openxmlformats.org/drawingml/2006/main" xmlns:p="http://schemas.openxmlformats.org/presentationml/2006/main" xmlns:r="http://schemas.openxmlformats.org/officeDocument/2006/relationships">
+<p:sld xmlns:a="http://schemas.openxmlformats.org/drawingml/2006/main" xmlns:r="http://schemas.openxmlformats.org/officeDocument/2006/relationships" xmlns:p="http://schemas.openxmlformats.org/presentationml/2006/main">
   <p:cSld>
     <p:bg>
       <p:bgPr>
@@ -10331,12 +11220,20 @@
                 <a:solidFill>
                   <a:srgbClr val="E8EEF7"/>
                 </a:solidFill>
-                <a:latin typeface="Microsoft YaHei"/>
-                <a:ea typeface="Microsoft YaHei"/>
-                <a:cs typeface="Microsoft YaHei"/>
+                <a:latin typeface="微软雅黑" panose="020B0503020204020204" charset="-122"/>
+                <a:ea typeface="微软雅黑" panose="020B0503020204020204" charset="-122"/>
+                <a:cs typeface="微软雅黑" panose="020B0503020204020204" charset="-122"/>
               </a:rPr>
               <a:t>系统架构：七层分层，命令单向驱动模拟</a:t>
             </a:r>
+            <a:endParaRPr sz="2800" b="1">
+              <a:solidFill>
+                <a:srgbClr val="E8EEF7"/>
+              </a:solidFill>
+              <a:latin typeface="微软雅黑" panose="020B0503020204020204" charset="-122"/>
+              <a:ea typeface="微软雅黑" panose="020B0503020204020204" charset="-122"/>
+              <a:cs typeface="微软雅黑" panose="020B0503020204020204" charset="-122"/>
+            </a:endParaRPr>
           </a:p>
         </p:txBody>
       </p:sp>
@@ -10368,12 +11265,20 @@
                 <a:solidFill>
                   <a:srgbClr val="8B9BB4"/>
                 </a:solidFill>
-                <a:latin typeface="Microsoft YaHei"/>
-                <a:ea typeface="Microsoft YaHei"/>
-                <a:cs typeface="Microsoft YaHei"/>
+                <a:latin typeface="微软雅黑" panose="020B0503020204020204" charset="-122"/>
+                <a:ea typeface="微软雅黑" panose="020B0503020204020204" charset="-122"/>
+                <a:cs typeface="微软雅黑" panose="020B0503020204020204" charset="-122"/>
               </a:rPr>
               <a:t>输入与 AI 不能直接改单位，只能提交结构化命令；渲染只读状态。</a:t>
             </a:r>
+            <a:endParaRPr sz="1400" b="0">
+              <a:solidFill>
+                <a:srgbClr val="8B9BB4"/>
+              </a:solidFill>
+              <a:latin typeface="微软雅黑" panose="020B0503020204020204" charset="-122"/>
+              <a:ea typeface="微软雅黑" panose="020B0503020204020204" charset="-122"/>
+              <a:cs typeface="微软雅黑" panose="020B0503020204020204" charset="-122"/>
+            </a:endParaRPr>
           </a:p>
         </p:txBody>
       </p:sp>
@@ -10495,12 +11400,20 @@
                 <a:solidFill>
                   <a:srgbClr val="3B82F6"/>
                 </a:solidFill>
-                <a:latin typeface="Microsoft YaHei"/>
-                <a:ea typeface="Microsoft YaHei"/>
-                <a:cs typeface="Microsoft YaHei"/>
+                <a:latin typeface="微软雅黑" panose="020B0503020204020204" charset="-122"/>
+                <a:ea typeface="微软雅黑" panose="020B0503020204020204" charset="-122"/>
+                <a:cs typeface="微软雅黑" panose="020B0503020204020204" charset="-122"/>
               </a:rPr>
               <a:t>表现层</a:t>
             </a:r>
+            <a:endParaRPr sz="1400" b="1">
+              <a:solidFill>
+                <a:srgbClr val="3B82F6"/>
+              </a:solidFill>
+              <a:latin typeface="微软雅黑" panose="020B0503020204020204" charset="-122"/>
+              <a:ea typeface="微软雅黑" panose="020B0503020204020204" charset="-122"/>
+              <a:cs typeface="微软雅黑" panose="020B0503020204020204" charset="-122"/>
+            </a:endParaRPr>
           </a:p>
         </p:txBody>
       </p:sp>
@@ -10532,12 +11445,20 @@
                 <a:solidFill>
                   <a:srgbClr val="8B9BB4"/>
                 </a:solidFill>
-                <a:latin typeface="Microsoft YaHei"/>
-                <a:ea typeface="Microsoft YaHei"/>
-                <a:cs typeface="Microsoft YaHei"/>
+                <a:latin typeface="微软雅黑" panose="020B0503020204020204" charset="-122"/>
+                <a:ea typeface="微软雅黑" panose="020B0503020204020204" charset="-122"/>
+                <a:cs typeface="微软雅黑" panose="020B0503020204020204" charset="-122"/>
               </a:rPr>
               <a:t>Pygame 渲染 / HUD / 回放</a:t>
             </a:r>
+            <a:endParaRPr sz="1300" b="0">
+              <a:solidFill>
+                <a:srgbClr val="8B9BB4"/>
+              </a:solidFill>
+              <a:latin typeface="微软雅黑" panose="020B0503020204020204" charset="-122"/>
+              <a:ea typeface="微软雅黑" panose="020B0503020204020204" charset="-122"/>
+              <a:cs typeface="微软雅黑" panose="020B0503020204020204" charset="-122"/>
+            </a:endParaRPr>
           </a:p>
         </p:txBody>
       </p:sp>
@@ -10659,12 +11580,20 @@
                 <a:solidFill>
                   <a:srgbClr val="3B82F6"/>
                 </a:solidFill>
-                <a:latin typeface="Microsoft YaHei"/>
-                <a:ea typeface="Microsoft YaHei"/>
-                <a:cs typeface="Microsoft YaHei"/>
+                <a:latin typeface="微软雅黑" panose="020B0503020204020204" charset="-122"/>
+                <a:ea typeface="微软雅黑" panose="020B0503020204020204" charset="-122"/>
+                <a:cs typeface="微软雅黑" panose="020B0503020204020204" charset="-122"/>
               </a:rPr>
               <a:t>输入层</a:t>
             </a:r>
+            <a:endParaRPr sz="1400" b="1">
+              <a:solidFill>
+                <a:srgbClr val="3B82F6"/>
+              </a:solidFill>
+              <a:latin typeface="微软雅黑" panose="020B0503020204020204" charset="-122"/>
+              <a:ea typeface="微软雅黑" panose="020B0503020204020204" charset="-122"/>
+              <a:cs typeface="微软雅黑" panose="020B0503020204020204" charset="-122"/>
+            </a:endParaRPr>
           </a:p>
         </p:txBody>
       </p:sp>
@@ -10696,12 +11625,20 @@
                 <a:solidFill>
                   <a:srgbClr val="8B9BB4"/>
                 </a:solidFill>
-                <a:latin typeface="Microsoft YaHei"/>
-                <a:ea typeface="Microsoft YaHei"/>
-                <a:cs typeface="Microsoft YaHei"/>
+                <a:latin typeface="微软雅黑" panose="020B0503020204020204" charset="-122"/>
+                <a:ea typeface="微软雅黑" panose="020B0503020204020204" charset="-122"/>
+                <a:cs typeface="微软雅黑" panose="020B0503020204020204" charset="-122"/>
               </a:rPr>
               <a:t>语音 · 文字 · 鼠标 · 键盘</a:t>
             </a:r>
+            <a:endParaRPr sz="1300" b="0">
+              <a:solidFill>
+                <a:srgbClr val="8B9BB4"/>
+              </a:solidFill>
+              <a:latin typeface="微软雅黑" panose="020B0503020204020204" charset="-122"/>
+              <a:ea typeface="微软雅黑" panose="020B0503020204020204" charset="-122"/>
+              <a:cs typeface="微软雅黑" panose="020B0503020204020204" charset="-122"/>
+            </a:endParaRPr>
           </a:p>
         </p:txBody>
       </p:sp>
@@ -10823,12 +11760,20 @@
                 <a:solidFill>
                   <a:srgbClr val="2DD4BF"/>
                 </a:solidFill>
-                <a:latin typeface="Microsoft YaHei"/>
-                <a:ea typeface="Microsoft YaHei"/>
-                <a:cs typeface="Microsoft YaHei"/>
+                <a:latin typeface="微软雅黑" panose="020B0503020204020204" charset="-122"/>
+                <a:ea typeface="微软雅黑" panose="020B0503020204020204" charset="-122"/>
+                <a:cs typeface="微软雅黑" panose="020B0503020204020204" charset="-122"/>
               </a:rPr>
               <a:t>命令层</a:t>
             </a:r>
+            <a:endParaRPr sz="1400" b="1">
+              <a:solidFill>
+                <a:srgbClr val="2DD4BF"/>
+              </a:solidFill>
+              <a:latin typeface="微软雅黑" panose="020B0503020204020204" charset="-122"/>
+              <a:ea typeface="微软雅黑" panose="020B0503020204020204" charset="-122"/>
+              <a:cs typeface="微软雅黑" panose="020B0503020204020204" charset="-122"/>
+            </a:endParaRPr>
           </a:p>
         </p:txBody>
       </p:sp>
@@ -10860,12 +11805,20 @@
                 <a:solidFill>
                   <a:srgbClr val="8B9BB4"/>
                 </a:solidFill>
-                <a:latin typeface="Microsoft YaHei"/>
-                <a:ea typeface="Microsoft YaHei"/>
-                <a:cs typeface="Microsoft YaHei"/>
+                <a:latin typeface="微软雅黑" panose="020B0503020204020204" charset="-122"/>
+                <a:ea typeface="微软雅黑" panose="020B0503020204020204" charset="-122"/>
+                <a:cs typeface="微软雅黑" panose="020B0503020204020204" charset="-122"/>
               </a:rPr>
               <a:t>Command · 校验 · 队列 · 反馈</a:t>
             </a:r>
+            <a:endParaRPr sz="1300" b="0">
+              <a:solidFill>
+                <a:srgbClr val="8B9BB4"/>
+              </a:solidFill>
+              <a:latin typeface="微软雅黑" panose="020B0503020204020204" charset="-122"/>
+              <a:ea typeface="微软雅黑" panose="020B0503020204020204" charset="-122"/>
+              <a:cs typeface="微软雅黑" panose="020B0503020204020204" charset="-122"/>
+            </a:endParaRPr>
           </a:p>
         </p:txBody>
       </p:sp>
@@ -10987,12 +11940,20 @@
                 <a:solidFill>
                   <a:srgbClr val="2DD4BF"/>
                 </a:solidFill>
-                <a:latin typeface="Microsoft YaHei"/>
-                <a:ea typeface="Microsoft YaHei"/>
-                <a:cs typeface="Microsoft YaHei"/>
+                <a:latin typeface="微软雅黑" panose="020B0503020204020204" charset="-122"/>
+                <a:ea typeface="微软雅黑" panose="020B0503020204020204" charset="-122"/>
+                <a:cs typeface="微软雅黑" panose="020B0503020204020204" charset="-122"/>
               </a:rPr>
               <a:t>AI 层</a:t>
             </a:r>
+            <a:endParaRPr sz="1400" b="1">
+              <a:solidFill>
+                <a:srgbClr val="2DD4BF"/>
+              </a:solidFill>
+              <a:latin typeface="微软雅黑" panose="020B0503020204020204" charset="-122"/>
+              <a:ea typeface="微软雅黑" panose="020B0503020204020204" charset="-122"/>
+              <a:cs typeface="微软雅黑" panose="020B0503020204020204" charset="-122"/>
+            </a:endParaRPr>
           </a:p>
         </p:txBody>
       </p:sp>
@@ -11024,12 +11985,20 @@
                 <a:solidFill>
                   <a:srgbClr val="8B9BB4"/>
                 </a:solidFill>
-                <a:latin typeface="Microsoft YaHei"/>
-                <a:ea typeface="Microsoft YaHei"/>
-                <a:cs typeface="Microsoft YaHei"/>
+                <a:latin typeface="微软雅黑" panose="020B0503020204020204" charset="-122"/>
+                <a:ea typeface="微软雅黑" panose="020B0503020204020204" charset="-122"/>
+                <a:cs typeface="微软雅黑" panose="020B0503020204020204" charset="-122"/>
               </a:rPr>
               <a:t>战略 / 战术 · 大模型适配</a:t>
             </a:r>
+            <a:endParaRPr sz="1300" b="0">
+              <a:solidFill>
+                <a:srgbClr val="8B9BB4"/>
+              </a:solidFill>
+              <a:latin typeface="微软雅黑" panose="020B0503020204020204" charset="-122"/>
+              <a:ea typeface="微软雅黑" panose="020B0503020204020204" charset="-122"/>
+              <a:cs typeface="微软雅黑" panose="020B0503020204020204" charset="-122"/>
+            </a:endParaRPr>
           </a:p>
         </p:txBody>
       </p:sp>
@@ -11151,12 +12120,20 @@
                 <a:solidFill>
                   <a:srgbClr val="D97706"/>
                 </a:solidFill>
-                <a:latin typeface="Microsoft YaHei"/>
-                <a:ea typeface="Microsoft YaHei"/>
-                <a:cs typeface="Microsoft YaHei"/>
+                <a:latin typeface="微软雅黑" panose="020B0503020204020204" charset="-122"/>
+                <a:ea typeface="微软雅黑" panose="020B0503020204020204" charset="-122"/>
+                <a:cs typeface="微软雅黑" panose="020B0503020204020204" charset="-122"/>
               </a:rPr>
               <a:t>感知层</a:t>
             </a:r>
+            <a:endParaRPr sz="1400" b="1">
+              <a:solidFill>
+                <a:srgbClr val="D97706"/>
+              </a:solidFill>
+              <a:latin typeface="微软雅黑" panose="020B0503020204020204" charset="-122"/>
+              <a:ea typeface="微软雅黑" panose="020B0503020204020204" charset="-122"/>
+              <a:cs typeface="微软雅黑" panose="020B0503020204020204" charset="-122"/>
+            </a:endParaRPr>
           </a:p>
         </p:txBody>
       </p:sp>
@@ -11188,12 +12165,20 @@
                 <a:solidFill>
                   <a:srgbClr val="8B9BB4"/>
                 </a:solidFill>
-                <a:latin typeface="Microsoft YaHei"/>
-                <a:ea typeface="Microsoft YaHei"/>
-                <a:cs typeface="Microsoft YaHei"/>
+                <a:latin typeface="微软雅黑" panose="020B0503020204020204" charset="-122"/>
+                <a:ea typeface="微软雅黑" panose="020B0503020204020204" charset="-122"/>
+                <a:cs typeface="微软雅黑" panose="020B0503020204020204" charset="-122"/>
               </a:rPr>
               <a:t>战争迷雾 · ObservationSnapshot</a:t>
             </a:r>
+            <a:endParaRPr sz="1300" b="0">
+              <a:solidFill>
+                <a:srgbClr val="8B9BB4"/>
+              </a:solidFill>
+              <a:latin typeface="微软雅黑" panose="020B0503020204020204" charset="-122"/>
+              <a:ea typeface="微软雅黑" panose="020B0503020204020204" charset="-122"/>
+              <a:cs typeface="微软雅黑" panose="020B0503020204020204" charset="-122"/>
+            </a:endParaRPr>
           </a:p>
         </p:txBody>
       </p:sp>
@@ -11315,12 +12300,20 @@
                 <a:solidFill>
                   <a:srgbClr val="E85D4C"/>
                 </a:solidFill>
-                <a:latin typeface="Microsoft YaHei"/>
-                <a:ea typeface="Microsoft YaHei"/>
-                <a:cs typeface="Microsoft YaHei"/>
+                <a:latin typeface="微软雅黑" panose="020B0503020204020204" charset="-122"/>
+                <a:ea typeface="微软雅黑" panose="020B0503020204020204" charset="-122"/>
+                <a:cs typeface="微软雅黑" panose="020B0503020204020204" charset="-122"/>
               </a:rPr>
               <a:t>模拟层</a:t>
             </a:r>
+            <a:endParaRPr sz="1400" b="1">
+              <a:solidFill>
+                <a:srgbClr val="E85D4C"/>
+              </a:solidFill>
+              <a:latin typeface="微软雅黑" panose="020B0503020204020204" charset="-122"/>
+              <a:ea typeface="微软雅黑" panose="020B0503020204020204" charset="-122"/>
+              <a:cs typeface="微软雅黑" panose="020B0503020204020204" charset="-122"/>
+            </a:endParaRPr>
           </a:p>
         </p:txBody>
       </p:sp>
@@ -11352,12 +12345,20 @@
                 <a:solidFill>
                   <a:srgbClr val="8B9BB4"/>
                 </a:solidFill>
-                <a:latin typeface="Microsoft YaHei"/>
-                <a:ea typeface="Microsoft YaHei"/>
-                <a:cs typeface="Microsoft YaHei"/>
+                <a:latin typeface="微软雅黑" panose="020B0503020204020204" charset="-122"/>
+                <a:ea typeface="微软雅黑" panose="020B0503020204020204" charset="-122"/>
+                <a:cs typeface="微软雅黑" panose="020B0503020204020204" charset="-122"/>
               </a:rPr>
               <a:t>固定时间步 · 单位 / 战斗 / 工程</a:t>
             </a:r>
+            <a:endParaRPr sz="1300" b="0">
+              <a:solidFill>
+                <a:srgbClr val="8B9BB4"/>
+              </a:solidFill>
+              <a:latin typeface="微软雅黑" panose="020B0503020204020204" charset="-122"/>
+              <a:ea typeface="微软雅黑" panose="020B0503020204020204" charset="-122"/>
+              <a:cs typeface="微软雅黑" panose="020B0503020204020204" charset="-122"/>
+            </a:endParaRPr>
           </a:p>
         </p:txBody>
       </p:sp>
@@ -11479,12 +12480,20 @@
                 <a:solidFill>
                   <a:srgbClr val="8B9BB4"/>
                 </a:solidFill>
-                <a:latin typeface="Microsoft YaHei"/>
-                <a:ea typeface="Microsoft YaHei"/>
-                <a:cs typeface="Microsoft YaHei"/>
+                <a:latin typeface="微软雅黑" panose="020B0503020204020204" charset="-122"/>
+                <a:ea typeface="微软雅黑" panose="020B0503020204020204" charset="-122"/>
+                <a:cs typeface="微软雅黑" panose="020B0503020204020204" charset="-122"/>
               </a:rPr>
               <a:t>持久化</a:t>
             </a:r>
+            <a:endParaRPr sz="1400" b="1">
+              <a:solidFill>
+                <a:srgbClr val="8B9BB4"/>
+              </a:solidFill>
+              <a:latin typeface="微软雅黑" panose="020B0503020204020204" charset="-122"/>
+              <a:ea typeface="微软雅黑" panose="020B0503020204020204" charset="-122"/>
+              <a:cs typeface="微软雅黑" panose="020B0503020204020204" charset="-122"/>
+            </a:endParaRPr>
           </a:p>
         </p:txBody>
       </p:sp>
@@ -11516,12 +12525,20 @@
                 <a:solidFill>
                   <a:srgbClr val="8B9BB4"/>
                 </a:solidFill>
-                <a:latin typeface="Microsoft YaHei"/>
-                <a:ea typeface="Microsoft YaHei"/>
-                <a:cs typeface="Microsoft YaHei"/>
+                <a:latin typeface="微软雅黑" panose="020B0503020204020204" charset="-122"/>
+                <a:ea typeface="微软雅黑" panose="020B0503020204020204" charset="-122"/>
+                <a:cs typeface="微软雅黑" panose="020B0503020204020204" charset="-122"/>
               </a:rPr>
               <a:t>存档 · 回放 · 设置 · 统计</a:t>
             </a:r>
+            <a:endParaRPr sz="1300" b="0">
+              <a:solidFill>
+                <a:srgbClr val="8B9BB4"/>
+              </a:solidFill>
+              <a:latin typeface="微软雅黑" panose="020B0503020204020204" charset="-122"/>
+              <a:ea typeface="微软雅黑" panose="020B0503020204020204" charset="-122"/>
+              <a:cs typeface="微软雅黑" panose="020B0503020204020204" charset="-122"/>
+            </a:endParaRPr>
           </a:p>
         </p:txBody>
       </p:sp>
@@ -11643,12 +12660,20 @@
                 <a:solidFill>
                   <a:srgbClr val="E8EEF7"/>
                 </a:solidFill>
-                <a:latin typeface="Microsoft YaHei"/>
-                <a:ea typeface="Microsoft YaHei"/>
-                <a:cs typeface="Microsoft YaHei"/>
+                <a:latin typeface="微软雅黑" panose="020B0503020204020204" charset="-122"/>
+                <a:ea typeface="微软雅黑" panose="020B0503020204020204" charset="-122"/>
+                <a:cs typeface="微软雅黑" panose="020B0503020204020204" charset="-122"/>
               </a:rPr>
               <a:t>四条关键协议</a:t>
             </a:r>
+            <a:endParaRPr sz="1400" b="1">
+              <a:solidFill>
+                <a:srgbClr val="E8EEF7"/>
+              </a:solidFill>
+              <a:latin typeface="微软雅黑" panose="020B0503020204020204" charset="-122"/>
+              <a:ea typeface="微软雅黑" panose="020B0503020204020204" charset="-122"/>
+              <a:cs typeface="微软雅黑" panose="020B0503020204020204" charset="-122"/>
+            </a:endParaRPr>
           </a:p>
         </p:txBody>
       </p:sp>
@@ -11680,15 +12705,23 @@
                 <a:solidFill>
                   <a:srgbClr val="8B9BB4"/>
                 </a:solidFill>
-                <a:latin typeface="Microsoft YaHei"/>
-                <a:ea typeface="Microsoft YaHei"/>
-                <a:cs typeface="Microsoft YaHei"/>
+                <a:latin typeface="微软雅黑" panose="020B0503020204020204" charset="-122"/>
+                <a:ea typeface="微软雅黑" panose="020B0503020204020204" charset="-122"/>
+                <a:cs typeface="微软雅黑" panose="020B0503020204020204" charset="-122"/>
               </a:rPr>
               <a:t>Command：想做什么
 ObservationSnapshot：依法能看见什么
 GameEvent：已发生什么
 SaveSnapshot：如何完整恢复</a:t>
             </a:r>
+            <a:endParaRPr sz="1300" b="0">
+              <a:solidFill>
+                <a:srgbClr val="8B9BB4"/>
+              </a:solidFill>
+              <a:latin typeface="微软雅黑" panose="020B0503020204020204" charset="-122"/>
+              <a:ea typeface="微软雅黑" panose="020B0503020204020204" charset="-122"/>
+              <a:cs typeface="微软雅黑" panose="020B0503020204020204" charset="-122"/>
+            </a:endParaRPr>
           </a:p>
         </p:txBody>
       </p:sp>
@@ -11810,12 +12843,20 @@
                 <a:solidFill>
                   <a:srgbClr val="E8EEF7"/>
                 </a:solidFill>
-                <a:latin typeface="Microsoft YaHei"/>
-                <a:ea typeface="Microsoft YaHei"/>
-                <a:cs typeface="Microsoft YaHei"/>
+                <a:latin typeface="微软雅黑" panose="020B0503020204020204" charset="-122"/>
+                <a:ea typeface="微软雅黑" panose="020B0503020204020204" charset="-122"/>
+                <a:cs typeface="微软雅黑" panose="020B0503020204020204" charset="-122"/>
               </a:rPr>
               <a:t>依赖方向（防作弊）</a:t>
             </a:r>
+            <a:endParaRPr sz="1400" b="1">
+              <a:solidFill>
+                <a:srgbClr val="E8EEF7"/>
+              </a:solidFill>
+              <a:latin typeface="微软雅黑" panose="020B0503020204020204" charset="-122"/>
+              <a:ea typeface="微软雅黑" panose="020B0503020204020204" charset="-122"/>
+              <a:cs typeface="微软雅黑" panose="020B0503020204020204" charset="-122"/>
+            </a:endParaRPr>
           </a:p>
         </p:txBody>
       </p:sp>
@@ -11847,15 +12888,23 @@
                 <a:solidFill>
                   <a:srgbClr val="8B9BB4"/>
                 </a:solidFill>
-                <a:latin typeface="Microsoft YaHei"/>
-                <a:ea typeface="Microsoft YaHei"/>
-                <a:cs typeface="Microsoft YaHei"/>
+                <a:latin typeface="微软雅黑" panose="020B0503020204020204" charset="-122"/>
+                <a:ea typeface="微软雅黑" panose="020B0503020204020204" charset="-122"/>
+                <a:cs typeface="微软雅黑" panose="020B0503020204020204" charset="-122"/>
               </a:rPr>
               <a:t>模拟层不依赖 UI / 网络 / 麦克风
 AI 只读阵营快照
 回放只记结构化命令
 公共协议变更需双方评审</a:t>
             </a:r>
+            <a:endParaRPr sz="1300" b="0">
+              <a:solidFill>
+                <a:srgbClr val="8B9BB4"/>
+              </a:solidFill>
+              <a:latin typeface="微软雅黑" panose="020B0503020204020204" charset="-122"/>
+              <a:ea typeface="微软雅黑" panose="020B0503020204020204" charset="-122"/>
+              <a:cs typeface="微软雅黑" panose="020B0503020204020204" charset="-122"/>
+            </a:endParaRPr>
           </a:p>
         </p:txBody>
       </p:sp>
@@ -11930,12 +12979,20 @@
                 <a:solidFill>
                   <a:srgbClr val="8B9BB4"/>
                 </a:solidFill>
-                <a:latin typeface="Microsoft YaHei"/>
-                <a:ea typeface="Microsoft YaHei"/>
-                <a:cs typeface="Microsoft YaHei"/>
+                <a:latin typeface="微软雅黑" panose="020B0503020204020204" charset="-122"/>
+                <a:ea typeface="微软雅黑" panose="020B0503020204020204" charset="-122"/>
+                <a:cs typeface="微软雅黑" panose="020B0503020204020204" charset="-122"/>
               </a:rPr>
               <a:t>小组作业答辩 · 指挥官战术对抗</a:t>
             </a:r>
+            <a:endParaRPr sz="1000" b="0">
+              <a:solidFill>
+                <a:srgbClr val="8B9BB4"/>
+              </a:solidFill>
+              <a:latin typeface="微软雅黑" panose="020B0503020204020204" charset="-122"/>
+              <a:ea typeface="微软雅黑" panose="020B0503020204020204" charset="-122"/>
+              <a:cs typeface="微软雅黑" panose="020B0503020204020204" charset="-122"/>
+            </a:endParaRPr>
           </a:p>
         </p:txBody>
       </p:sp>
@@ -11967,12 +13024,20 @@
                 <a:solidFill>
                   <a:srgbClr val="8B9BB4"/>
                 </a:solidFill>
-                <a:latin typeface="Microsoft YaHei"/>
-                <a:ea typeface="Microsoft YaHei"/>
-                <a:cs typeface="Microsoft YaHei"/>
+                <a:latin typeface="微软雅黑" panose="020B0503020204020204" charset="-122"/>
+                <a:ea typeface="微软雅黑" panose="020B0503020204020204" charset="-122"/>
+                <a:cs typeface="微软雅黑" panose="020B0503020204020204" charset="-122"/>
               </a:rPr>
               <a:t>05 / 13</a:t>
             </a:r>
+            <a:endParaRPr sz="1000" b="0">
+              <a:solidFill>
+                <a:srgbClr val="8B9BB4"/>
+              </a:solidFill>
+              <a:latin typeface="微软雅黑" panose="020B0503020204020204" charset="-122"/>
+              <a:ea typeface="微软雅黑" panose="020B0503020204020204" charset="-122"/>
+              <a:cs typeface="微软雅黑" panose="020B0503020204020204" charset="-122"/>
+            </a:endParaRPr>
           </a:p>
         </p:txBody>
       </p:sp>
@@ -11985,7 +13050,7 @@
 </file>
 
 <file path=ppt/slides/slide6.xml><?xml version="1.0" encoding="utf-8"?>
-<p:sld xmlns:a="http://schemas.openxmlformats.org/drawingml/2006/main" xmlns:p="http://schemas.openxmlformats.org/presentationml/2006/main" xmlns:r="http://schemas.openxmlformats.org/officeDocument/2006/relationships">
+<p:sld xmlns:a="http://schemas.openxmlformats.org/drawingml/2006/main" xmlns:r="http://schemas.openxmlformats.org/officeDocument/2006/relationships" xmlns:p="http://schemas.openxmlformats.org/presentationml/2006/main">
   <p:cSld>
     <p:bg>
       <p:bgPr>
@@ -12030,12 +13095,20 @@
                 <a:solidFill>
                   <a:srgbClr val="E8EEF7"/>
                 </a:solidFill>
-                <a:latin typeface="Microsoft YaHei"/>
-                <a:ea typeface="Microsoft YaHei"/>
-                <a:cs typeface="Microsoft YaHei"/>
+                <a:latin typeface="微软雅黑" panose="020B0503020204020204" charset="-122"/>
+                <a:ea typeface="微软雅黑" panose="020B0503020204020204" charset="-122"/>
+                <a:cs typeface="微软雅黑" panose="020B0503020204020204" charset="-122"/>
               </a:rPr>
               <a:t>核心功能 ①：可验证公平的战场与迷雾</a:t>
             </a:r>
+            <a:endParaRPr sz="2800" b="1">
+              <a:solidFill>
+                <a:srgbClr val="E8EEF7"/>
+              </a:solidFill>
+              <a:latin typeface="微软雅黑" panose="020B0503020204020204" charset="-122"/>
+              <a:ea typeface="微软雅黑" panose="020B0503020204020204" charset="-122"/>
+              <a:cs typeface="微软雅黑" panose="020B0503020204020204" charset="-122"/>
+            </a:endParaRPr>
           </a:p>
         </p:txBody>
       </p:sp>
@@ -12157,12 +13230,20 @@
                 <a:solidFill>
                   <a:srgbClr val="3B82F6"/>
                 </a:solidFill>
-                <a:latin typeface="Microsoft YaHei"/>
-                <a:ea typeface="Microsoft YaHei"/>
-                <a:cs typeface="Microsoft YaHei"/>
+                <a:latin typeface="微软雅黑" panose="020B0503020204020204" charset="-122"/>
+                <a:ea typeface="微软雅黑" panose="020B0503020204020204" charset="-122"/>
+                <a:cs typeface="微软雅黑" panose="020B0503020204020204" charset="-122"/>
               </a:rPr>
               <a:t>地图</a:t>
             </a:r>
+            <a:endParaRPr sz="1600" b="1">
+              <a:solidFill>
+                <a:srgbClr val="3B82F6"/>
+              </a:solidFill>
+              <a:latin typeface="微软雅黑" panose="020B0503020204020204" charset="-122"/>
+              <a:ea typeface="微软雅黑" panose="020B0503020204020204" charset="-122"/>
+              <a:cs typeface="微软雅黑" panose="020B0503020204020204" charset="-122"/>
+            </a:endParaRPr>
           </a:p>
         </p:txBody>
       </p:sp>
@@ -12194,12 +13275,20 @@
                 <a:solidFill>
                   <a:srgbClr val="E8EEF7"/>
                 </a:solidFill>
-                <a:latin typeface="Microsoft YaHei"/>
-                <a:ea typeface="Microsoft YaHei"/>
-                <a:cs typeface="Microsoft YaHei"/>
+                <a:latin typeface="微软雅黑" panose="020B0503020204020204" charset="-122"/>
+                <a:ea typeface="微软雅黑" panose="020B0503020204020204" charset="-122"/>
+                <a:cs typeface="微软雅黑" panose="020B0503020204020204" charset="-122"/>
               </a:rPr>
               <a:t>连续曲流河宽 4–12 格；草场/森林/沼泽/道路；六座对称村庄；种子可复现、180° 公平。</a:t>
             </a:r>
+            <a:endParaRPr sz="1400" b="0">
+              <a:solidFill>
+                <a:srgbClr val="E8EEF7"/>
+              </a:solidFill>
+              <a:latin typeface="微软雅黑" panose="020B0503020204020204" charset="-122"/>
+              <a:ea typeface="微软雅黑" panose="020B0503020204020204" charset="-122"/>
+              <a:cs typeface="微软雅黑" panose="020B0503020204020204" charset="-122"/>
+            </a:endParaRPr>
           </a:p>
         </p:txBody>
       </p:sp>
@@ -12321,12 +13410,20 @@
                 <a:solidFill>
                   <a:srgbClr val="2DD4BF"/>
                 </a:solidFill>
-                <a:latin typeface="Microsoft YaHei"/>
-                <a:ea typeface="Microsoft YaHei"/>
-                <a:cs typeface="Microsoft YaHei"/>
+                <a:latin typeface="微软雅黑" panose="020B0503020204020204" charset="-122"/>
+                <a:ea typeface="微软雅黑" panose="020B0503020204020204" charset="-122"/>
+                <a:cs typeface="微软雅黑" panose="020B0503020204020204" charset="-122"/>
               </a:rPr>
               <a:t>迷雾</a:t>
             </a:r>
+            <a:endParaRPr sz="1600" b="1">
+              <a:solidFill>
+                <a:srgbClr val="2DD4BF"/>
+              </a:solidFill>
+              <a:latin typeface="微软雅黑" panose="020B0503020204020204" charset="-122"/>
+              <a:ea typeface="微软雅黑" panose="020B0503020204020204" charset="-122"/>
+              <a:cs typeface="微软雅黑" panose="020B0503020204020204" charset="-122"/>
+            </a:endParaRPr>
           </a:p>
         </p:txBody>
       </p:sp>
@@ -12358,12 +13455,20 @@
                 <a:solidFill>
                   <a:srgbClr val="E8EEF7"/>
                 </a:solidFill>
-                <a:latin typeface="Microsoft YaHei"/>
-                <a:ea typeface="Microsoft YaHei"/>
-                <a:cs typeface="Microsoft YaHei"/>
+                <a:latin typeface="微软雅黑" panose="020B0503020204020204" charset="-122"/>
+                <a:ea typeface="微软雅黑" panose="020B0503020204020204" charset="-122"/>
+                <a:cs typeface="微软雅黑" panose="020B0503020204020204" charset="-122"/>
               </a:rPr>
               <a:t>永久探索：部队经过像橡皮擦；敌军进入已探索区即显示；未探索区不泄露真实地形。</a:t>
             </a:r>
+            <a:endParaRPr sz="1400" b="0">
+              <a:solidFill>
+                <a:srgbClr val="E8EEF7"/>
+              </a:solidFill>
+              <a:latin typeface="微软雅黑" panose="020B0503020204020204" charset="-122"/>
+              <a:ea typeface="微软雅黑" panose="020B0503020204020204" charset="-122"/>
+              <a:cs typeface="微软雅黑" panose="020B0503020204020204" charset="-122"/>
+            </a:endParaRPr>
           </a:p>
         </p:txBody>
       </p:sp>
@@ -12485,12 +13590,20 @@
                 <a:solidFill>
                   <a:srgbClr val="D97706"/>
                 </a:solidFill>
-                <a:latin typeface="Microsoft YaHei"/>
-                <a:ea typeface="Microsoft YaHei"/>
-                <a:cs typeface="Microsoft YaHei"/>
+                <a:latin typeface="微软雅黑" panose="020B0503020204020204" charset="-122"/>
+                <a:ea typeface="微软雅黑" panose="020B0503020204020204" charset="-122"/>
+                <a:cs typeface="微软雅黑" panose="020B0503020204020204" charset="-122"/>
               </a:rPr>
               <a:t>工程</a:t>
             </a:r>
+            <a:endParaRPr sz="1600" b="1">
+              <a:solidFill>
+                <a:srgbClr val="D97706"/>
+              </a:solidFill>
+              <a:latin typeface="微软雅黑" panose="020B0503020204020204" charset="-122"/>
+              <a:ea typeface="微软雅黑" panose="020B0503020204020204" charset="-122"/>
+              <a:cs typeface="微软雅黑" panose="020B0503020204020204" charset="-122"/>
+            </a:endParaRPr>
           </a:p>
         </p:txBody>
       </p:sp>
@@ -12522,12 +13635,20 @@
                 <a:solidFill>
                   <a:srgbClr val="E8EEF7"/>
                 </a:solidFill>
-                <a:latin typeface="Microsoft YaHei"/>
-                <a:ea typeface="Microsoft YaHei"/>
-                <a:cs typeface="Microsoft YaHei"/>
+                <a:latin typeface="微软雅黑" panose="020B0503020204020204" charset="-122"/>
+                <a:ea typeface="微软雅黑" panose="020B0503020204020204" charset="-122"/>
+                <a:cs typeface="微软雅黑" panose="020B0503020204020204" charset="-122"/>
               </a:rPr>
               <a:t>架桥按河宽算工程量；造船渡河；砍树开路；建塔后工兵自动驻塔转弓箭手。</a:t>
             </a:r>
+            <a:endParaRPr sz="1400" b="0">
+              <a:solidFill>
+                <a:srgbClr val="E8EEF7"/>
+              </a:solidFill>
+              <a:latin typeface="微软雅黑" panose="020B0503020204020204" charset="-122"/>
+              <a:ea typeface="微软雅黑" panose="020B0503020204020204" charset="-122"/>
+              <a:cs typeface="微软雅黑" panose="020B0503020204020204" charset="-122"/>
+            </a:endParaRPr>
           </a:p>
         </p:txBody>
       </p:sp>
@@ -12649,12 +13770,20 @@
                 <a:solidFill>
                   <a:srgbClr val="E85D4C"/>
                 </a:solidFill>
-                <a:latin typeface="Microsoft YaHei"/>
-                <a:ea typeface="Microsoft YaHei"/>
-                <a:cs typeface="Microsoft YaHei"/>
+                <a:latin typeface="微软雅黑" panose="020B0503020204020204" charset="-122"/>
+                <a:ea typeface="微软雅黑" panose="020B0503020204020204" charset="-122"/>
+                <a:cs typeface="微软雅黑" panose="020B0503020204020204" charset="-122"/>
               </a:rPr>
               <a:t>表现</a:t>
             </a:r>
+            <a:endParaRPr sz="1600" b="1">
+              <a:solidFill>
+                <a:srgbClr val="E85D4C"/>
+              </a:solidFill>
+              <a:latin typeface="微软雅黑" panose="020B0503020204020204" charset="-122"/>
+              <a:ea typeface="微软雅黑" panose="020B0503020204020204" charset="-122"/>
+              <a:cs typeface="微软雅黑" panose="020B0503020204020204" charset="-122"/>
+            </a:endParaRPr>
           </a:p>
         </p:txBody>
       </p:sp>
@@ -12686,12 +13815,20 @@
                 <a:solidFill>
                   <a:srgbClr val="E8EEF7"/>
                 </a:solidFill>
-                <a:latin typeface="Microsoft YaHei"/>
-                <a:ea typeface="Microsoft YaHei"/>
-                <a:cs typeface="Microsoft YaHei"/>
+                <a:latin typeface="微软雅黑" panose="020B0503020204020204" charset="-122"/>
+                <a:ea typeface="微软雅黑" panose="020B0503020204020204" charset="-122"/>
+                <a:cs typeface="微软雅黑" panose="020B0503020204020204" charset="-122"/>
               </a:rPr>
               <a:t>像素战场最近邻缩放；远景战术符号 / 近景人物贴图；中世纪指挥台 HUD。</a:t>
             </a:r>
+            <a:endParaRPr sz="1400" b="0">
+              <a:solidFill>
+                <a:srgbClr val="E8EEF7"/>
+              </a:solidFill>
+              <a:latin typeface="微软雅黑" panose="020B0503020204020204" charset="-122"/>
+              <a:ea typeface="微软雅黑" panose="020B0503020204020204" charset="-122"/>
+              <a:cs typeface="微软雅黑" panose="020B0503020204020204" charset="-122"/>
+            </a:endParaRPr>
           </a:p>
         </p:txBody>
       </p:sp>
@@ -12766,12 +13903,20 @@
                 <a:solidFill>
                   <a:srgbClr val="8B9BB4"/>
                 </a:solidFill>
-                <a:latin typeface="Microsoft YaHei"/>
-                <a:ea typeface="Microsoft YaHei"/>
-                <a:cs typeface="Microsoft YaHei"/>
+                <a:latin typeface="微软雅黑" panose="020B0503020204020204" charset="-122"/>
+                <a:ea typeface="微软雅黑" panose="020B0503020204020204" charset="-122"/>
+                <a:cs typeface="微软雅黑" panose="020B0503020204020204" charset="-122"/>
               </a:rPr>
               <a:t>小组作业答辩 · 指挥官战术对抗</a:t>
             </a:r>
+            <a:endParaRPr sz="1000" b="0">
+              <a:solidFill>
+                <a:srgbClr val="8B9BB4"/>
+              </a:solidFill>
+              <a:latin typeface="微软雅黑" panose="020B0503020204020204" charset="-122"/>
+              <a:ea typeface="微软雅黑" panose="020B0503020204020204" charset="-122"/>
+              <a:cs typeface="微软雅黑" panose="020B0503020204020204" charset="-122"/>
+            </a:endParaRPr>
           </a:p>
         </p:txBody>
       </p:sp>
@@ -12803,12 +13948,20 @@
                 <a:solidFill>
                   <a:srgbClr val="8B9BB4"/>
                 </a:solidFill>
-                <a:latin typeface="Microsoft YaHei"/>
-                <a:ea typeface="Microsoft YaHei"/>
-                <a:cs typeface="Microsoft YaHei"/>
+                <a:latin typeface="微软雅黑" panose="020B0503020204020204" charset="-122"/>
+                <a:ea typeface="微软雅黑" panose="020B0503020204020204" charset="-122"/>
+                <a:cs typeface="微软雅黑" panose="020B0503020204020204" charset="-122"/>
               </a:rPr>
               <a:t>06 / 13</a:t>
             </a:r>
+            <a:endParaRPr sz="1000" b="0">
+              <a:solidFill>
+                <a:srgbClr val="8B9BB4"/>
+              </a:solidFill>
+              <a:latin typeface="微软雅黑" panose="020B0503020204020204" charset="-122"/>
+              <a:ea typeface="微软雅黑" panose="020B0503020204020204" charset="-122"/>
+              <a:cs typeface="微软雅黑" panose="020B0503020204020204" charset="-122"/>
+            </a:endParaRPr>
           </a:p>
         </p:txBody>
       </p:sp>
@@ -12821,7 +13974,7 @@
 </file>
 
 <file path=ppt/slides/slide7.xml><?xml version="1.0" encoding="utf-8"?>
-<p:sld xmlns:a="http://schemas.openxmlformats.org/drawingml/2006/main" xmlns:p="http://schemas.openxmlformats.org/presentationml/2006/main" xmlns:r="http://schemas.openxmlformats.org/officeDocument/2006/relationships">
+<p:sld xmlns:a="http://schemas.openxmlformats.org/drawingml/2006/main" xmlns:r="http://schemas.openxmlformats.org/officeDocument/2006/relationships" xmlns:p="http://schemas.openxmlformats.org/presentationml/2006/main">
   <p:cSld>
     <p:bg>
       <p:bgPr>
@@ -12866,12 +14019,20 @@
                 <a:solidFill>
                   <a:srgbClr val="E8EEF7"/>
                 </a:solidFill>
-                <a:latin typeface="Microsoft YaHei"/>
-                <a:ea typeface="Microsoft YaHei"/>
-                <a:cs typeface="Microsoft YaHei"/>
+                <a:latin typeface="微软雅黑" panose="020B0503020204020204" charset="-122"/>
+                <a:ea typeface="微软雅黑" panose="020B0503020204020204" charset="-122"/>
+                <a:cs typeface="微软雅黑" panose="020B0503020204020204" charset="-122"/>
               </a:rPr>
               <a:t>核心功能 ②：自然语言指挥（项目最大亮点）</a:t>
             </a:r>
+            <a:endParaRPr sz="2800" b="1">
+              <a:solidFill>
+                <a:srgbClr val="E8EEF7"/>
+              </a:solidFill>
+              <a:latin typeface="微软雅黑" panose="020B0503020204020204" charset="-122"/>
+              <a:ea typeface="微软雅黑" panose="020B0503020204020204" charset="-122"/>
+              <a:cs typeface="微软雅黑" panose="020B0503020204020204" charset="-122"/>
+            </a:endParaRPr>
           </a:p>
         </p:txBody>
       </p:sp>
@@ -12903,12 +14064,20 @@
                 <a:solidFill>
                   <a:srgbClr val="8B9BB4"/>
                 </a:solidFill>
-                <a:latin typeface="Microsoft YaHei"/>
-                <a:ea typeface="Microsoft YaHei"/>
-                <a:cs typeface="Microsoft YaHei"/>
+                <a:latin typeface="微软雅黑" panose="020B0503020204020204" charset="-122"/>
+                <a:ea typeface="微软雅黑" panose="020B0503020204020204" charset="-122"/>
+                <a:cs typeface="微软雅黑" panose="020B0503020204020204" charset="-122"/>
               </a:rPr>
               <a:t>语音/文字 → 意图解析 → 结构化命令 → 合法性校验 → 执行与可视反馈</a:t>
             </a:r>
+            <a:endParaRPr sz="1400" b="0">
+              <a:solidFill>
+                <a:srgbClr val="8B9BB4"/>
+              </a:solidFill>
+              <a:latin typeface="微软雅黑" panose="020B0503020204020204" charset="-122"/>
+              <a:ea typeface="微软雅黑" panose="020B0503020204020204" charset="-122"/>
+              <a:cs typeface="微软雅黑" panose="020B0503020204020204" charset="-122"/>
+            </a:endParaRPr>
           </a:p>
         </p:txBody>
       </p:sp>
@@ -12987,12 +14156,20 @@
                 <a:solidFill>
                   <a:srgbClr val="3B82F6"/>
                 </a:solidFill>
-                <a:latin typeface="Microsoft YaHei"/>
-                <a:ea typeface="Microsoft YaHei"/>
-                <a:cs typeface="Microsoft YaHei"/>
+                <a:latin typeface="微软雅黑" panose="020B0503020204020204" charset="-122"/>
+                <a:ea typeface="微软雅黑" panose="020B0503020204020204" charset="-122"/>
+                <a:cs typeface="微软雅黑" panose="020B0503020204020204" charset="-122"/>
               </a:rPr>
               <a:t>1 输入</a:t>
             </a:r>
+            <a:endParaRPr sz="1400" b="1">
+              <a:solidFill>
+                <a:srgbClr val="3B82F6"/>
+              </a:solidFill>
+              <a:latin typeface="微软雅黑" panose="020B0503020204020204" charset="-122"/>
+              <a:ea typeface="微软雅黑" panose="020B0503020204020204" charset="-122"/>
+              <a:cs typeface="微软雅黑" panose="020B0503020204020204" charset="-122"/>
+            </a:endParaRPr>
           </a:p>
         </p:txBody>
       </p:sp>
@@ -13024,12 +14201,20 @@
                 <a:solidFill>
                   <a:srgbClr val="8B9BB4"/>
                 </a:solidFill>
-                <a:latin typeface="Microsoft YaHei"/>
-                <a:ea typeface="Microsoft YaHei"/>
-                <a:cs typeface="Microsoft YaHei"/>
+                <a:latin typeface="微软雅黑" panose="020B0503020204020204" charset="-122"/>
+                <a:ea typeface="微软雅黑" panose="020B0503020204020204" charset="-122"/>
+                <a:cs typeface="微软雅黑" panose="020B0503020204020204" charset="-122"/>
               </a:rPr>
               <a:t>语音 / 文字 / 鼠标键盘</a:t>
             </a:r>
+            <a:endParaRPr sz="1200" b="0">
+              <a:solidFill>
+                <a:srgbClr val="8B9BB4"/>
+              </a:solidFill>
+              <a:latin typeface="微软雅黑" panose="020B0503020204020204" charset="-122"/>
+              <a:ea typeface="微软雅黑" panose="020B0503020204020204" charset="-122"/>
+              <a:cs typeface="微软雅黑" panose="020B0503020204020204" charset="-122"/>
+            </a:endParaRPr>
           </a:p>
         </p:txBody>
       </p:sp>
@@ -13061,12 +14246,20 @@
                 <a:solidFill>
                   <a:srgbClr val="2DD4BF"/>
                 </a:solidFill>
-                <a:latin typeface="Microsoft YaHei"/>
-                <a:ea typeface="Microsoft YaHei"/>
-                <a:cs typeface="Microsoft YaHei"/>
+                <a:latin typeface="微软雅黑" panose="020B0503020204020204" charset="-122"/>
+                <a:ea typeface="微软雅黑" panose="020B0503020204020204" charset="-122"/>
+                <a:cs typeface="微软雅黑" panose="020B0503020204020204" charset="-122"/>
               </a:rPr>
               <a:t>→</a:t>
             </a:r>
+            <a:endParaRPr sz="1800" b="1">
+              <a:solidFill>
+                <a:srgbClr val="2DD4BF"/>
+              </a:solidFill>
+              <a:latin typeface="微软雅黑" panose="020B0503020204020204" charset="-122"/>
+              <a:ea typeface="微软雅黑" panose="020B0503020204020204" charset="-122"/>
+              <a:cs typeface="微软雅黑" panose="020B0503020204020204" charset="-122"/>
+            </a:endParaRPr>
           </a:p>
         </p:txBody>
       </p:sp>
@@ -13145,12 +14338,20 @@
                 <a:solidFill>
                   <a:srgbClr val="3B82F6"/>
                 </a:solidFill>
-                <a:latin typeface="Microsoft YaHei"/>
-                <a:ea typeface="Microsoft YaHei"/>
-                <a:cs typeface="Microsoft YaHei"/>
+                <a:latin typeface="微软雅黑" panose="020B0503020204020204" charset="-122"/>
+                <a:ea typeface="微软雅黑" panose="020B0503020204020204" charset="-122"/>
+                <a:cs typeface="微软雅黑" panose="020B0503020204020204" charset="-122"/>
               </a:rPr>
               <a:t>2 解析</a:t>
             </a:r>
+            <a:endParaRPr sz="1400" b="1">
+              <a:solidFill>
+                <a:srgbClr val="3B82F6"/>
+              </a:solidFill>
+              <a:latin typeface="微软雅黑" panose="020B0503020204020204" charset="-122"/>
+              <a:ea typeface="微软雅黑" panose="020B0503020204020204" charset="-122"/>
+              <a:cs typeface="微软雅黑" panose="020B0503020204020204" charset="-122"/>
+            </a:endParaRPr>
           </a:p>
         </p:txBody>
       </p:sp>
@@ -13182,12 +14383,20 @@
                 <a:solidFill>
                   <a:srgbClr val="8B9BB4"/>
                 </a:solidFill>
-                <a:latin typeface="Microsoft YaHei"/>
-                <a:ea typeface="Microsoft YaHei"/>
-                <a:cs typeface="Microsoft YaHei"/>
+                <a:latin typeface="微软雅黑" panose="020B0503020204020204" charset="-122"/>
+                <a:ea typeface="微软雅黑" panose="020B0503020204020204" charset="-122"/>
+                <a:cs typeface="微软雅黑" panose="020B0503020204020204" charset="-122"/>
               </a:rPr>
               <a:t>本地规则 / 可选 DeepSeek</a:t>
             </a:r>
+            <a:endParaRPr sz="1200" b="0">
+              <a:solidFill>
+                <a:srgbClr val="8B9BB4"/>
+              </a:solidFill>
+              <a:latin typeface="微软雅黑" panose="020B0503020204020204" charset="-122"/>
+              <a:ea typeface="微软雅黑" panose="020B0503020204020204" charset="-122"/>
+              <a:cs typeface="微软雅黑" panose="020B0503020204020204" charset="-122"/>
+            </a:endParaRPr>
           </a:p>
         </p:txBody>
       </p:sp>
@@ -13219,12 +14428,20 @@
                 <a:solidFill>
                   <a:srgbClr val="2DD4BF"/>
                 </a:solidFill>
-                <a:latin typeface="Microsoft YaHei"/>
-                <a:ea typeface="Microsoft YaHei"/>
-                <a:cs typeface="Microsoft YaHei"/>
+                <a:latin typeface="微软雅黑" panose="020B0503020204020204" charset="-122"/>
+                <a:ea typeface="微软雅黑" panose="020B0503020204020204" charset="-122"/>
+                <a:cs typeface="微软雅黑" panose="020B0503020204020204" charset="-122"/>
               </a:rPr>
               <a:t>→</a:t>
             </a:r>
+            <a:endParaRPr sz="1800" b="1">
+              <a:solidFill>
+                <a:srgbClr val="2DD4BF"/>
+              </a:solidFill>
+              <a:latin typeface="微软雅黑" panose="020B0503020204020204" charset="-122"/>
+              <a:ea typeface="微软雅黑" panose="020B0503020204020204" charset="-122"/>
+              <a:cs typeface="微软雅黑" panose="020B0503020204020204" charset="-122"/>
+            </a:endParaRPr>
           </a:p>
         </p:txBody>
       </p:sp>
@@ -13303,12 +14520,20 @@
                 <a:solidFill>
                   <a:srgbClr val="3B82F6"/>
                 </a:solidFill>
-                <a:latin typeface="Microsoft YaHei"/>
-                <a:ea typeface="Microsoft YaHei"/>
-                <a:cs typeface="Microsoft YaHei"/>
+                <a:latin typeface="微软雅黑" panose="020B0503020204020204" charset="-122"/>
+                <a:ea typeface="微软雅黑" panose="020B0503020204020204" charset="-122"/>
+                <a:cs typeface="微软雅黑" panose="020B0503020204020204" charset="-122"/>
               </a:rPr>
               <a:t>3 校验</a:t>
             </a:r>
+            <a:endParaRPr sz="1400" b="1">
+              <a:solidFill>
+                <a:srgbClr val="3B82F6"/>
+              </a:solidFill>
+              <a:latin typeface="微软雅黑" panose="020B0503020204020204" charset="-122"/>
+              <a:ea typeface="微软雅黑" panose="020B0503020204020204" charset="-122"/>
+              <a:cs typeface="微软雅黑" panose="020B0503020204020204" charset="-122"/>
+            </a:endParaRPr>
           </a:p>
         </p:txBody>
       </p:sp>
@@ -13340,12 +14565,20 @@
                 <a:solidFill>
                   <a:srgbClr val="8B9BB4"/>
                 </a:solidFill>
-                <a:latin typeface="Microsoft YaHei"/>
-                <a:ea typeface="Microsoft YaHei"/>
-                <a:cs typeface="Microsoft YaHei"/>
+                <a:latin typeface="微软雅黑" panose="020B0503020204020204" charset="-122"/>
+                <a:ea typeface="微软雅黑" panose="020B0503020204020204" charset="-122"/>
+                <a:cs typeface="微软雅黑" panose="020B0503020204020204" charset="-122"/>
               </a:rPr>
               <a:t>可见信息与合法性</a:t>
             </a:r>
+            <a:endParaRPr sz="1200" b="0">
+              <a:solidFill>
+                <a:srgbClr val="8B9BB4"/>
+              </a:solidFill>
+              <a:latin typeface="微软雅黑" panose="020B0503020204020204" charset="-122"/>
+              <a:ea typeface="微软雅黑" panose="020B0503020204020204" charset="-122"/>
+              <a:cs typeface="微软雅黑" panose="020B0503020204020204" charset="-122"/>
+            </a:endParaRPr>
           </a:p>
         </p:txBody>
       </p:sp>
@@ -13377,12 +14610,20 @@
                 <a:solidFill>
                   <a:srgbClr val="2DD4BF"/>
                 </a:solidFill>
-                <a:latin typeface="Microsoft YaHei"/>
-                <a:ea typeface="Microsoft YaHei"/>
-                <a:cs typeface="Microsoft YaHei"/>
+                <a:latin typeface="微软雅黑" panose="020B0503020204020204" charset="-122"/>
+                <a:ea typeface="微软雅黑" panose="020B0503020204020204" charset="-122"/>
+                <a:cs typeface="微软雅黑" panose="020B0503020204020204" charset="-122"/>
               </a:rPr>
               <a:t>→</a:t>
             </a:r>
+            <a:endParaRPr sz="1800" b="1">
+              <a:solidFill>
+                <a:srgbClr val="2DD4BF"/>
+              </a:solidFill>
+              <a:latin typeface="微软雅黑" panose="020B0503020204020204" charset="-122"/>
+              <a:ea typeface="微软雅黑" panose="020B0503020204020204" charset="-122"/>
+              <a:cs typeface="微软雅黑" panose="020B0503020204020204" charset="-122"/>
+            </a:endParaRPr>
           </a:p>
         </p:txBody>
       </p:sp>
@@ -13461,12 +14702,20 @@
                 <a:solidFill>
                   <a:srgbClr val="3B82F6"/>
                 </a:solidFill>
-                <a:latin typeface="Microsoft YaHei"/>
-                <a:ea typeface="Microsoft YaHei"/>
-                <a:cs typeface="Microsoft YaHei"/>
+                <a:latin typeface="微软雅黑" panose="020B0503020204020204" charset="-122"/>
+                <a:ea typeface="微软雅黑" panose="020B0503020204020204" charset="-122"/>
+                <a:cs typeface="微软雅黑" panose="020B0503020204020204" charset="-122"/>
               </a:rPr>
               <a:t>4 执行</a:t>
             </a:r>
+            <a:endParaRPr sz="1400" b="1">
+              <a:solidFill>
+                <a:srgbClr val="3B82F6"/>
+              </a:solidFill>
+              <a:latin typeface="微软雅黑" panose="020B0503020204020204" charset="-122"/>
+              <a:ea typeface="微软雅黑" panose="020B0503020204020204" charset="-122"/>
+              <a:cs typeface="微软雅黑" panose="020B0503020204020204" charset="-122"/>
+            </a:endParaRPr>
           </a:p>
         </p:txBody>
       </p:sp>
@@ -13498,12 +14747,20 @@
                 <a:solidFill>
                   <a:srgbClr val="8B9BB4"/>
                 </a:solidFill>
-                <a:latin typeface="Microsoft YaHei"/>
-                <a:ea typeface="Microsoft YaHei"/>
-                <a:cs typeface="Microsoft YaHei"/>
+                <a:latin typeface="微软雅黑" panose="020B0503020204020204" charset="-122"/>
+                <a:ea typeface="微软雅黑" panose="020B0503020204020204" charset="-122"/>
+                <a:cs typeface="微软雅黑" panose="020B0503020204020204" charset="-122"/>
               </a:rPr>
               <a:t>模拟层任务分派</a:t>
             </a:r>
+            <a:endParaRPr sz="1200" b="0">
+              <a:solidFill>
+                <a:srgbClr val="8B9BB4"/>
+              </a:solidFill>
+              <a:latin typeface="微软雅黑" panose="020B0503020204020204" charset="-122"/>
+              <a:ea typeface="微软雅黑" panose="020B0503020204020204" charset="-122"/>
+              <a:cs typeface="微软雅黑" panose="020B0503020204020204" charset="-122"/>
+            </a:endParaRPr>
           </a:p>
         </p:txBody>
       </p:sp>
@@ -13535,12 +14792,20 @@
                 <a:solidFill>
                   <a:srgbClr val="2DD4BF"/>
                 </a:solidFill>
-                <a:latin typeface="Microsoft YaHei"/>
-                <a:ea typeface="Microsoft YaHei"/>
-                <a:cs typeface="Microsoft YaHei"/>
+                <a:latin typeface="微软雅黑" panose="020B0503020204020204" charset="-122"/>
+                <a:ea typeface="微软雅黑" panose="020B0503020204020204" charset="-122"/>
+                <a:cs typeface="微软雅黑" panose="020B0503020204020204" charset="-122"/>
               </a:rPr>
               <a:t>→</a:t>
             </a:r>
+            <a:endParaRPr sz="1800" b="1">
+              <a:solidFill>
+                <a:srgbClr val="2DD4BF"/>
+              </a:solidFill>
+              <a:latin typeface="微软雅黑" panose="020B0503020204020204" charset="-122"/>
+              <a:ea typeface="微软雅黑" panose="020B0503020204020204" charset="-122"/>
+              <a:cs typeface="微软雅黑" panose="020B0503020204020204" charset="-122"/>
+            </a:endParaRPr>
           </a:p>
         </p:txBody>
       </p:sp>
@@ -13619,12 +14884,20 @@
                 <a:solidFill>
                   <a:srgbClr val="3B82F6"/>
                 </a:solidFill>
-                <a:latin typeface="Microsoft YaHei"/>
-                <a:ea typeface="Microsoft YaHei"/>
-                <a:cs typeface="Microsoft YaHei"/>
+                <a:latin typeface="微软雅黑" panose="020B0503020204020204" charset="-122"/>
+                <a:ea typeface="微软雅黑" panose="020B0503020204020204" charset="-122"/>
+                <a:cs typeface="微软雅黑" panose="020B0503020204020204" charset="-122"/>
               </a:rPr>
               <a:t>5 反馈</a:t>
             </a:r>
+            <a:endParaRPr sz="1400" b="1">
+              <a:solidFill>
+                <a:srgbClr val="3B82F6"/>
+              </a:solidFill>
+              <a:latin typeface="微软雅黑" panose="020B0503020204020204" charset="-122"/>
+              <a:ea typeface="微软雅黑" panose="020B0503020204020204" charset="-122"/>
+              <a:cs typeface="微软雅黑" panose="020B0503020204020204" charset="-122"/>
+            </a:endParaRPr>
           </a:p>
         </p:txBody>
       </p:sp>
@@ -13656,12 +14929,20 @@
                 <a:solidFill>
                   <a:srgbClr val="8B9BB4"/>
                 </a:solidFill>
-                <a:latin typeface="Microsoft YaHei"/>
-                <a:ea typeface="Microsoft YaHei"/>
-                <a:cs typeface="Microsoft YaHei"/>
+                <a:latin typeface="微软雅黑" panose="020B0503020204020204" charset="-122"/>
+                <a:ea typeface="微软雅黑" panose="020B0503020204020204" charset="-122"/>
+                <a:cs typeface="微软雅黑" panose="020B0503020204020204" charset="-122"/>
               </a:rPr>
               <a:t>成功/失败原因可见</a:t>
             </a:r>
+            <a:endParaRPr sz="1200" b="0">
+              <a:solidFill>
+                <a:srgbClr val="8B9BB4"/>
+              </a:solidFill>
+              <a:latin typeface="微软雅黑" panose="020B0503020204020204" charset="-122"/>
+              <a:ea typeface="微软雅黑" panose="020B0503020204020204" charset="-122"/>
+              <a:cs typeface="微软雅黑" panose="020B0503020204020204" charset="-122"/>
+            </a:endParaRPr>
           </a:p>
         </p:txBody>
       </p:sp>
@@ -13740,12 +15021,20 @@
                 <a:solidFill>
                   <a:srgbClr val="2DD4BF"/>
                 </a:solidFill>
-                <a:latin typeface="Microsoft YaHei"/>
-                <a:ea typeface="Microsoft YaHei"/>
-                <a:cs typeface="Microsoft YaHei"/>
+                <a:latin typeface="微软雅黑" panose="020B0503020204020204" charset="-122"/>
+                <a:ea typeface="微软雅黑" panose="020B0503020204020204" charset="-122"/>
+                <a:cs typeface="微软雅黑" panose="020B0503020204020204" charset="-122"/>
               </a:rPr>
               <a:t>示例军令</a:t>
             </a:r>
+            <a:endParaRPr sz="1500" b="1">
+              <a:solidFill>
+                <a:srgbClr val="2DD4BF"/>
+              </a:solidFill>
+              <a:latin typeface="微软雅黑" panose="020B0503020204020204" charset="-122"/>
+              <a:ea typeface="微软雅黑" panose="020B0503020204020204" charset="-122"/>
+              <a:cs typeface="微软雅黑" panose="020B0503020204020204" charset="-122"/>
+            </a:endParaRPr>
           </a:p>
         </p:txBody>
       </p:sp>
@@ -13781,12 +15070,20 @@
                 <a:solidFill>
                   <a:srgbClr val="E8EEF7"/>
                 </a:solidFill>
-                <a:latin typeface="Microsoft YaHei"/>
-                <a:ea typeface="Microsoft YaHei"/>
-                <a:cs typeface="Microsoft YaHei"/>
+                <a:latin typeface="微软雅黑" panose="020B0503020204020204" charset="-122"/>
+                <a:ea typeface="微软雅黑" panose="020B0503020204020204" charset="-122"/>
+                <a:cs typeface="微软雅黑" panose="020B0503020204020204" charset="-122"/>
               </a:rPr>
               <a:t>▸  第一侦察队前往北部中央</a:t>
             </a:r>
+            <a:endParaRPr sz="1400" b="0">
+              <a:solidFill>
+                <a:srgbClr val="E8EEF7"/>
+              </a:solidFill>
+              <a:latin typeface="微软雅黑" panose="020B0503020204020204" charset="-122"/>
+              <a:ea typeface="微软雅黑" panose="020B0503020204020204" charset="-122"/>
+              <a:cs typeface="微软雅黑" panose="020B0503020204020204" charset="-122"/>
+            </a:endParaRPr>
           </a:p>
           <a:p>
             <a:pPr>
@@ -13799,12 +15096,20 @@
                 <a:solidFill>
                   <a:srgbClr val="E8EEF7"/>
                 </a:solidFill>
-                <a:latin typeface="Microsoft YaHei"/>
-                <a:ea typeface="Microsoft YaHei"/>
-                <a:cs typeface="Microsoft YaHei"/>
+                <a:latin typeface="微软雅黑" panose="020B0503020204020204" charset="-122"/>
+                <a:ea typeface="微软雅黑" panose="020B0503020204020204" charset="-122"/>
+                <a:cs typeface="微软雅黑" panose="020B0503020204020204" charset="-122"/>
               </a:rPr>
               <a:t>▸  20名初始兵分化为工兵</a:t>
             </a:r>
+            <a:endParaRPr sz="1400" b="0">
+              <a:solidFill>
+                <a:srgbClr val="E8EEF7"/>
+              </a:solidFill>
+              <a:latin typeface="微软雅黑" panose="020B0503020204020204" charset="-122"/>
+              <a:ea typeface="微软雅黑" panose="020B0503020204020204" charset="-122"/>
+              <a:cs typeface="微软雅黑" panose="020B0503020204020204" charset="-122"/>
+            </a:endParaRPr>
           </a:p>
           <a:p>
             <a:pPr>
@@ -13817,12 +15122,20 @@
                 <a:solidFill>
                   <a:srgbClr val="E8EEF7"/>
                 </a:solidFill>
-                <a:latin typeface="Microsoft YaHei"/>
-                <a:ea typeface="Microsoft YaHei"/>
-                <a:cs typeface="Microsoft YaHei"/>
+                <a:latin typeface="微软雅黑" panose="020B0503020204020204" charset="-122"/>
+                <a:ea typeface="微软雅黑" panose="020B0503020204020204" charset="-122"/>
+                <a:cs typeface="微软雅黑" panose="020B0503020204020204" charset="-122"/>
               </a:rPr>
               <a:t>▸  工兵队在中央架桥</a:t>
             </a:r>
+            <a:endParaRPr sz="1400" b="0">
+              <a:solidFill>
+                <a:srgbClr val="E8EEF7"/>
+              </a:solidFill>
+              <a:latin typeface="微软雅黑" panose="020B0503020204020204" charset="-122"/>
+              <a:ea typeface="微软雅黑" panose="020B0503020204020204" charset="-122"/>
+              <a:cs typeface="微软雅黑" panose="020B0503020204020204" charset="-122"/>
+            </a:endParaRPr>
           </a:p>
           <a:p>
             <a:pPr>
@@ -13835,12 +15148,20 @@
                 <a:solidFill>
                   <a:srgbClr val="E8EEF7"/>
                 </a:solidFill>
-                <a:latin typeface="Microsoft YaHei"/>
-                <a:ea typeface="Microsoft YaHei"/>
-                <a:cs typeface="Microsoft YaHei"/>
+                <a:latin typeface="微软雅黑" panose="020B0503020204020204" charset="-122"/>
+                <a:ea typeface="微软雅黑" panose="020B0503020204020204" charset="-122"/>
+                <a:cs typeface="微软雅黑" panose="020B0503020204020204" charset="-122"/>
               </a:rPr>
               <a:t>▸  第1组集火敌方将领</a:t>
             </a:r>
+            <a:endParaRPr sz="1400" b="0">
+              <a:solidFill>
+                <a:srgbClr val="E8EEF7"/>
+              </a:solidFill>
+              <a:latin typeface="微软雅黑" panose="020B0503020204020204" charset="-122"/>
+              <a:ea typeface="微软雅黑" panose="020B0503020204020204" charset="-122"/>
+              <a:cs typeface="微软雅黑" panose="020B0503020204020204" charset="-122"/>
+            </a:endParaRPr>
           </a:p>
           <a:p>
             <a:pPr>
@@ -13853,12 +15174,20 @@
                 <a:solidFill>
                   <a:srgbClr val="E8EEF7"/>
                 </a:solidFill>
-                <a:latin typeface="Microsoft YaHei"/>
-                <a:ea typeface="Microsoft YaHei"/>
-                <a:cs typeface="Microsoft YaHei"/>
+                <a:latin typeface="微软雅黑" panose="020B0503020204020204" charset="-122"/>
+                <a:ea typeface="微软雅黑" panose="020B0503020204020204" charset="-122"/>
+                <a:cs typeface="微软雅黑" panose="020B0503020204020204" charset="-122"/>
               </a:rPr>
               <a:t>▸  第6组进入防御塔</a:t>
             </a:r>
+            <a:endParaRPr sz="1400" b="0">
+              <a:solidFill>
+                <a:srgbClr val="E8EEF7"/>
+              </a:solidFill>
+              <a:latin typeface="微软雅黑" panose="020B0503020204020204" charset="-122"/>
+              <a:ea typeface="微软雅黑" panose="020B0503020204020204" charset="-122"/>
+              <a:cs typeface="微软雅黑" panose="020B0503020204020204" charset="-122"/>
+            </a:endParaRPr>
           </a:p>
         </p:txBody>
       </p:sp>
@@ -13980,12 +15309,20 @@
                 <a:solidFill>
                   <a:srgbClr val="E8EEF7"/>
                 </a:solidFill>
-                <a:latin typeface="Microsoft YaHei"/>
-                <a:ea typeface="Microsoft YaHei"/>
-                <a:cs typeface="Microsoft YaHei"/>
+                <a:latin typeface="微软雅黑" panose="020B0503020204020204" charset="-122"/>
+                <a:ea typeface="微软雅黑" panose="020B0503020204020204" charset="-122"/>
+                <a:cs typeface="微软雅黑" panose="020B0503020204020204" charset="-122"/>
               </a:rPr>
               <a:t>工程细节</a:t>
             </a:r>
+            <a:endParaRPr sz="1400" b="1">
+              <a:solidFill>
+                <a:srgbClr val="E8EEF7"/>
+              </a:solidFill>
+              <a:latin typeface="微软雅黑" panose="020B0503020204020204" charset="-122"/>
+              <a:ea typeface="微软雅黑" panose="020B0503020204020204" charset="-122"/>
+              <a:cs typeface="微软雅黑" panose="020B0503020204020204" charset="-122"/>
+            </a:endParaRPr>
           </a:p>
         </p:txBody>
       </p:sp>
@@ -14017,9 +15354,9 @@
                 <a:solidFill>
                   <a:srgbClr val="8B9BB4"/>
                 </a:solidFill>
-                <a:latin typeface="Microsoft YaHei"/>
-                <a:ea typeface="Microsoft YaHei"/>
-                <a:cs typeface="Microsoft YaHei"/>
+                <a:latin typeface="微软雅黑" panose="020B0503020204020204" charset="-122"/>
+                <a:ea typeface="微软雅黑" panose="020B0503020204020204" charset="-122"/>
+                <a:cs typeface="微软雅黑" panose="020B0503020204020204" charset="-122"/>
               </a:rPr>
               <a:t>· 中文 IME 候选窗定位
 · 复合指令自动切分
@@ -14028,6 +15365,14 @@
 · 断网：R 重试 / O 离线 / Q 紧急存档
 · 指令书说明 AI 能力边界</a:t>
             </a:r>
+            <a:endParaRPr sz="1300" b="0">
+              <a:solidFill>
+                <a:srgbClr val="8B9BB4"/>
+              </a:solidFill>
+              <a:latin typeface="微软雅黑" panose="020B0503020204020204" charset="-122"/>
+              <a:ea typeface="微软雅黑" panose="020B0503020204020204" charset="-122"/>
+              <a:cs typeface="微软雅黑" panose="020B0503020204020204" charset="-122"/>
+            </a:endParaRPr>
           </a:p>
         </p:txBody>
       </p:sp>
@@ -14102,12 +15447,20 @@
                 <a:solidFill>
                   <a:srgbClr val="8B9BB4"/>
                 </a:solidFill>
-                <a:latin typeface="Microsoft YaHei"/>
-                <a:ea typeface="Microsoft YaHei"/>
-                <a:cs typeface="Microsoft YaHei"/>
+                <a:latin typeface="微软雅黑" panose="020B0503020204020204" charset="-122"/>
+                <a:ea typeface="微软雅黑" panose="020B0503020204020204" charset="-122"/>
+                <a:cs typeface="微软雅黑" panose="020B0503020204020204" charset="-122"/>
               </a:rPr>
               <a:t>小组作业答辩 · 指挥官战术对抗</a:t>
             </a:r>
+            <a:endParaRPr sz="1000" b="0">
+              <a:solidFill>
+                <a:srgbClr val="8B9BB4"/>
+              </a:solidFill>
+              <a:latin typeface="微软雅黑" panose="020B0503020204020204" charset="-122"/>
+              <a:ea typeface="微软雅黑" panose="020B0503020204020204" charset="-122"/>
+              <a:cs typeface="微软雅黑" panose="020B0503020204020204" charset="-122"/>
+            </a:endParaRPr>
           </a:p>
         </p:txBody>
       </p:sp>
@@ -14139,12 +15492,20 @@
                 <a:solidFill>
                   <a:srgbClr val="8B9BB4"/>
                 </a:solidFill>
-                <a:latin typeface="Microsoft YaHei"/>
-                <a:ea typeface="Microsoft YaHei"/>
-                <a:cs typeface="Microsoft YaHei"/>
+                <a:latin typeface="微软雅黑" panose="020B0503020204020204" charset="-122"/>
+                <a:ea typeface="微软雅黑" panose="020B0503020204020204" charset="-122"/>
+                <a:cs typeface="微软雅黑" panose="020B0503020204020204" charset="-122"/>
               </a:rPr>
               <a:t>07 / 13</a:t>
             </a:r>
+            <a:endParaRPr sz="1000" b="0">
+              <a:solidFill>
+                <a:srgbClr val="8B9BB4"/>
+              </a:solidFill>
+              <a:latin typeface="微软雅黑" panose="020B0503020204020204" charset="-122"/>
+              <a:ea typeface="微软雅黑" panose="020B0503020204020204" charset="-122"/>
+              <a:cs typeface="微软雅黑" panose="020B0503020204020204" charset="-122"/>
+            </a:endParaRPr>
           </a:p>
         </p:txBody>
       </p:sp>
@@ -14157,7 +15518,7 @@
 </file>
 
 <file path=ppt/slides/slide8.xml><?xml version="1.0" encoding="utf-8"?>
-<p:sld xmlns:a="http://schemas.openxmlformats.org/drawingml/2006/main" xmlns:p="http://schemas.openxmlformats.org/presentationml/2006/main" xmlns:r="http://schemas.openxmlformats.org/officeDocument/2006/relationships">
+<p:sld xmlns:a="http://schemas.openxmlformats.org/drawingml/2006/main" xmlns:r="http://schemas.openxmlformats.org/officeDocument/2006/relationships" xmlns:p="http://schemas.openxmlformats.org/presentationml/2006/main">
   <p:cSld>
     <p:bg>
       <p:bgPr>
@@ -14202,12 +15563,20 @@
                 <a:solidFill>
                   <a:srgbClr val="E8EEF7"/>
                 </a:solidFill>
-                <a:latin typeface="Microsoft YaHei"/>
-                <a:ea typeface="Microsoft YaHei"/>
-                <a:cs typeface="Microsoft YaHei"/>
+                <a:latin typeface="微软雅黑" panose="020B0503020204020204" charset="-122"/>
+                <a:ea typeface="微软雅黑" panose="020B0503020204020204" charset="-122"/>
+                <a:cs typeface="微软雅黑" panose="020B0503020204020204" charset="-122"/>
               </a:rPr>
               <a:t>核心功能 ③：本地 AI 与信息隔离</a:t>
             </a:r>
+            <a:endParaRPr sz="2800" b="1">
+              <a:solidFill>
+                <a:srgbClr val="E8EEF7"/>
+              </a:solidFill>
+              <a:latin typeface="微软雅黑" panose="020B0503020204020204" charset="-122"/>
+              <a:ea typeface="微软雅黑" panose="020B0503020204020204" charset="-122"/>
+              <a:cs typeface="微软雅黑" panose="020B0503020204020204" charset="-122"/>
+            </a:endParaRPr>
           </a:p>
         </p:txBody>
       </p:sp>
@@ -14329,12 +15698,20 @@
                 <a:solidFill>
                   <a:srgbClr val="E8EEF7"/>
                 </a:solidFill>
-                <a:latin typeface="Microsoft YaHei"/>
-                <a:ea typeface="Microsoft YaHei"/>
-                <a:cs typeface="Microsoft YaHei"/>
+                <a:latin typeface="微软雅黑" panose="020B0503020204020204" charset="-122"/>
+                <a:ea typeface="微软雅黑" panose="020B0503020204020204" charset="-122"/>
+                <a:cs typeface="微软雅黑" panose="020B0503020204020204" charset="-122"/>
               </a:rPr>
               <a:t>双层 AI</a:t>
             </a:r>
+            <a:endParaRPr sz="1400" b="1">
+              <a:solidFill>
+                <a:srgbClr val="E8EEF7"/>
+              </a:solidFill>
+              <a:latin typeface="微软雅黑" panose="020B0503020204020204" charset="-122"/>
+              <a:ea typeface="微软雅黑" panose="020B0503020204020204" charset="-122"/>
+              <a:cs typeface="微软雅黑" panose="020B0503020204020204" charset="-122"/>
+            </a:endParaRPr>
           </a:p>
         </p:txBody>
       </p:sp>
@@ -14366,14 +15743,22 @@
                 <a:solidFill>
                   <a:srgbClr val="8B9BB4"/>
                 </a:solidFill>
-                <a:latin typeface="Microsoft YaHei"/>
-                <a:ea typeface="Microsoft YaHei"/>
-                <a:cs typeface="Microsoft YaHei"/>
+                <a:latin typeface="微软雅黑" panose="020B0503020204020204" charset="-122"/>
+                <a:ea typeface="微软雅黑" panose="020B0503020204020204" charset="-122"/>
+                <a:cs typeface="微软雅黑" panose="020B0503020204020204" charset="-122"/>
               </a:rPr>
               <a:t>战略层 ~2s：目标、分兵、工程、征召
 战术层 ~0.25s：接敌、走位、护卫、撤退
 难度三档；自动作战可开关，手动随时覆盖</a:t>
             </a:r>
+            <a:endParaRPr sz="1300" b="0">
+              <a:solidFill>
+                <a:srgbClr val="8B9BB4"/>
+              </a:solidFill>
+              <a:latin typeface="微软雅黑" panose="020B0503020204020204" charset="-122"/>
+              <a:ea typeface="微软雅黑" panose="020B0503020204020204" charset="-122"/>
+              <a:cs typeface="微软雅黑" panose="020B0503020204020204" charset="-122"/>
+            </a:endParaRPr>
           </a:p>
         </p:txBody>
       </p:sp>
@@ -14495,12 +15880,20 @@
                 <a:solidFill>
                   <a:srgbClr val="E8EEF7"/>
                 </a:solidFill>
-                <a:latin typeface="Microsoft YaHei"/>
-                <a:ea typeface="Microsoft YaHei"/>
-                <a:cs typeface="Microsoft YaHei"/>
+                <a:latin typeface="微软雅黑" panose="020B0503020204020204" charset="-122"/>
+                <a:ea typeface="微软雅黑" panose="020B0503020204020204" charset="-122"/>
+                <a:cs typeface="微软雅黑" panose="020B0503020204020204" charset="-122"/>
               </a:rPr>
               <a:t>信息隔离怎么做</a:t>
             </a:r>
+            <a:endParaRPr sz="1400" b="1">
+              <a:solidFill>
+                <a:srgbClr val="E8EEF7"/>
+              </a:solidFill>
+              <a:latin typeface="微软雅黑" panose="020B0503020204020204" charset="-122"/>
+              <a:ea typeface="微软雅黑" panose="020B0503020204020204" charset="-122"/>
+              <a:cs typeface="微软雅黑" panose="020B0503020204020204" charset="-122"/>
+            </a:endParaRPr>
           </a:p>
         </p:txBody>
       </p:sp>
@@ -14532,15 +15925,23 @@
                 <a:solidFill>
                   <a:srgbClr val="8B9BB4"/>
                 </a:solidFill>
-                <a:latin typeface="Microsoft YaHei"/>
-                <a:ea typeface="Microsoft YaHei"/>
-                <a:cs typeface="Microsoft YaHei"/>
+                <a:latin typeface="微软雅黑" panose="020B0503020204020204" charset="-122"/>
+                <a:ea typeface="微软雅黑" panose="020B0503020204020204" charset="-122"/>
+                <a:cs typeface="微软雅黑" panose="020B0503020204020204" charset="-122"/>
               </a:rPr>
               <a:t>完整战场 → 阵营过滤 → Snapshot → AI/UI
 未探索区不显示真实地形
 寻路缓存只含己方已知桥
 统计与音效不做侧信道泄密</a:t>
             </a:r>
+            <a:endParaRPr sz="1300" b="0">
+              <a:solidFill>
+                <a:srgbClr val="8B9BB4"/>
+              </a:solidFill>
+              <a:latin typeface="微软雅黑" panose="020B0503020204020204" charset="-122"/>
+              <a:ea typeface="微软雅黑" panose="020B0503020204020204" charset="-122"/>
+              <a:cs typeface="微软雅黑" panose="020B0503020204020204" charset="-122"/>
+            </a:endParaRPr>
           </a:p>
         </p:txBody>
       </p:sp>
@@ -14662,12 +16063,20 @@
                 <a:solidFill>
                   <a:srgbClr val="E8EEF7"/>
                 </a:solidFill>
-                <a:latin typeface="Microsoft YaHei"/>
-                <a:ea typeface="Microsoft YaHei"/>
-                <a:cs typeface="Microsoft YaHei"/>
+                <a:latin typeface="微软雅黑" panose="020B0503020204020204" charset="-122"/>
+                <a:ea typeface="微软雅黑" panose="020B0503020204020204" charset="-122"/>
+                <a:cs typeface="微软雅黑" panose="020B0503020204020204" charset="-122"/>
               </a:rPr>
               <a:t>战术行为</a:t>
             </a:r>
+            <a:endParaRPr sz="1400" b="1">
+              <a:solidFill>
+                <a:srgbClr val="E8EEF7"/>
+              </a:solidFill>
+              <a:latin typeface="微软雅黑" panose="020B0503020204020204" charset="-122"/>
+              <a:ea typeface="微软雅黑" panose="020B0503020204020204" charset="-122"/>
+              <a:cs typeface="微软雅黑" panose="020B0503020204020204" charset="-122"/>
+            </a:endParaRPr>
           </a:p>
         </p:txBody>
       </p:sp>
@@ -14699,15 +16108,23 @@
                 <a:solidFill>
                   <a:srgbClr val="8B9BB4"/>
                 </a:solidFill>
-                <a:latin typeface="Microsoft YaHei"/>
-                <a:ea typeface="Microsoft YaHei"/>
-                <a:cs typeface="Microsoft YaHei"/>
+                <a:latin typeface="微软雅黑" panose="020B0503020204020204" charset="-122"/>
+                <a:ea typeface="微软雅黑" panose="020B0503020204020204" charset="-122"/>
+                <a:cs typeface="微软雅黑" panose="020B0503020204020204" charset="-122"/>
               </a:rPr>
               <a:t>侦察开图绕翼 · 低血后撤
 刺客集火将领 · 护卫拦截
 将领阵亡后进入拼命模式
 工兵按局势：桥 → 船 → 塔</a:t>
             </a:r>
+            <a:endParaRPr sz="1300" b="0">
+              <a:solidFill>
+                <a:srgbClr val="8B9BB4"/>
+              </a:solidFill>
+              <a:latin typeface="微软雅黑" panose="020B0503020204020204" charset="-122"/>
+              <a:ea typeface="微软雅黑" panose="020B0503020204020204" charset="-122"/>
+              <a:cs typeface="微软雅黑" panose="020B0503020204020204" charset="-122"/>
+            </a:endParaRPr>
           </a:p>
         </p:txBody>
       </p:sp>
@@ -14786,12 +16203,20 @@
                 <a:solidFill>
                   <a:srgbClr val="2DD4BF"/>
                 </a:solidFill>
-                <a:latin typeface="Microsoft YaHei"/>
-                <a:ea typeface="Microsoft YaHei"/>
-                <a:cs typeface="Microsoft YaHei"/>
+                <a:latin typeface="微软雅黑" panose="020B0503020204020204" charset="-122"/>
+                <a:ea typeface="微软雅黑" panose="020B0503020204020204" charset="-122"/>
+                <a:cs typeface="微软雅黑" panose="020B0503020204020204" charset="-122"/>
               </a:rPr>
               <a:t>公平性设计要点</a:t>
             </a:r>
+            <a:endParaRPr sz="1400" b="1">
+              <a:solidFill>
+                <a:srgbClr val="2DD4BF"/>
+              </a:solidFill>
+              <a:latin typeface="微软雅黑" panose="020B0503020204020204" charset="-122"/>
+              <a:ea typeface="微软雅黑" panose="020B0503020204020204" charset="-122"/>
+              <a:cs typeface="微软雅黑" panose="020B0503020204020204" charset="-122"/>
+            </a:endParaRPr>
           </a:p>
         </p:txBody>
       </p:sp>
@@ -14827,12 +16252,20 @@
                 <a:solidFill>
                   <a:srgbClr val="E8EEF7"/>
                 </a:solidFill>
-                <a:latin typeface="Microsoft YaHei"/>
-                <a:ea typeface="Microsoft YaHei"/>
-                <a:cs typeface="Microsoft YaHei"/>
+                <a:latin typeface="微软雅黑" panose="020B0503020204020204" charset="-122"/>
+                <a:ea typeface="微软雅黑" panose="020B0503020204020204" charset="-122"/>
+                <a:cs typeface="微软雅黑" panose="020B0503020204020204" charset="-122"/>
               </a:rPr>
               <a:t>▸  AI 不读完整战场对象、未发现坐标或对方秘密命令</a:t>
             </a:r>
+            <a:endParaRPr sz="1400" b="0">
+              <a:solidFill>
+                <a:srgbClr val="E8EEF7"/>
+              </a:solidFill>
+              <a:latin typeface="微软雅黑" panose="020B0503020204020204" charset="-122"/>
+              <a:ea typeface="微软雅黑" panose="020B0503020204020204" charset="-122"/>
+              <a:cs typeface="微软雅黑" panose="020B0503020204020204" charset="-122"/>
+            </a:endParaRPr>
           </a:p>
           <a:p>
             <a:pPr>
@@ -14845,12 +16278,20 @@
                 <a:solidFill>
                   <a:srgbClr val="E8EEF7"/>
                 </a:solidFill>
-                <a:latin typeface="Microsoft YaHei"/>
-                <a:ea typeface="Microsoft YaHei"/>
-                <a:cs typeface="Microsoft YaHei"/>
+                <a:latin typeface="微软雅黑" panose="020B0503020204020204" charset="-122"/>
+                <a:ea typeface="微软雅黑" panose="020B0503020204020204" charset="-122"/>
+                <a:cs typeface="微软雅黑" panose="020B0503020204020204" charset="-122"/>
               </a:rPr>
               <a:t>▸  界面不通过计数、音效泄露迷雾外实时敌情</a:t>
             </a:r>
+            <a:endParaRPr sz="1400" b="0">
+              <a:solidFill>
+                <a:srgbClr val="E8EEF7"/>
+              </a:solidFill>
+              <a:latin typeface="微软雅黑" panose="020B0503020204020204" charset="-122"/>
+              <a:ea typeface="微软雅黑" panose="020B0503020204020204" charset="-122"/>
+              <a:cs typeface="微软雅黑" panose="020B0503020204020204" charset="-122"/>
+            </a:endParaRPr>
           </a:p>
           <a:p>
             <a:pPr>
@@ -14863,12 +16304,20 @@
                 <a:solidFill>
                   <a:srgbClr val="E8EEF7"/>
                 </a:solidFill>
-                <a:latin typeface="Microsoft YaHei"/>
-                <a:ea typeface="Microsoft YaHei"/>
-                <a:cs typeface="Microsoft YaHei"/>
+                <a:latin typeface="微软雅黑" panose="020B0503020204020204" charset="-122"/>
+                <a:ea typeface="微软雅黑" panose="020B0503020204020204" charset="-122"/>
+                <a:cs typeface="微软雅黑" panose="020B0503020204020204" charset="-122"/>
               </a:rPr>
               <a:t>▸  公平靠数据边界，而不是让 AI“假装看不见”</a:t>
             </a:r>
+            <a:endParaRPr sz="1400" b="0">
+              <a:solidFill>
+                <a:srgbClr val="E8EEF7"/>
+              </a:solidFill>
+              <a:latin typeface="微软雅黑" panose="020B0503020204020204" charset="-122"/>
+              <a:ea typeface="微软雅黑" panose="020B0503020204020204" charset="-122"/>
+              <a:cs typeface="微软雅黑" panose="020B0503020204020204" charset="-122"/>
+            </a:endParaRPr>
           </a:p>
         </p:txBody>
       </p:sp>
@@ -14943,12 +16392,20 @@
                 <a:solidFill>
                   <a:srgbClr val="8B9BB4"/>
                 </a:solidFill>
-                <a:latin typeface="Microsoft YaHei"/>
-                <a:ea typeface="Microsoft YaHei"/>
-                <a:cs typeface="Microsoft YaHei"/>
+                <a:latin typeface="微软雅黑" panose="020B0503020204020204" charset="-122"/>
+                <a:ea typeface="微软雅黑" panose="020B0503020204020204" charset="-122"/>
+                <a:cs typeface="微软雅黑" panose="020B0503020204020204" charset="-122"/>
               </a:rPr>
               <a:t>小组作业答辩 · 指挥官战术对抗</a:t>
             </a:r>
+            <a:endParaRPr sz="1000" b="0">
+              <a:solidFill>
+                <a:srgbClr val="8B9BB4"/>
+              </a:solidFill>
+              <a:latin typeface="微软雅黑" panose="020B0503020204020204" charset="-122"/>
+              <a:ea typeface="微软雅黑" panose="020B0503020204020204" charset="-122"/>
+              <a:cs typeface="微软雅黑" panose="020B0503020204020204" charset="-122"/>
+            </a:endParaRPr>
           </a:p>
         </p:txBody>
       </p:sp>
@@ -14980,12 +16437,20 @@
                 <a:solidFill>
                   <a:srgbClr val="8B9BB4"/>
                 </a:solidFill>
-                <a:latin typeface="Microsoft YaHei"/>
-                <a:ea typeface="Microsoft YaHei"/>
-                <a:cs typeface="Microsoft YaHei"/>
+                <a:latin typeface="微软雅黑" panose="020B0503020204020204" charset="-122"/>
+                <a:ea typeface="微软雅黑" panose="020B0503020204020204" charset="-122"/>
+                <a:cs typeface="微软雅黑" panose="020B0503020204020204" charset="-122"/>
               </a:rPr>
               <a:t>08 / 13</a:t>
             </a:r>
+            <a:endParaRPr sz="1000" b="0">
+              <a:solidFill>
+                <a:srgbClr val="8B9BB4"/>
+              </a:solidFill>
+              <a:latin typeface="微软雅黑" panose="020B0503020204020204" charset="-122"/>
+              <a:ea typeface="微软雅黑" panose="020B0503020204020204" charset="-122"/>
+              <a:cs typeface="微软雅黑" panose="020B0503020204020204" charset="-122"/>
+            </a:endParaRPr>
           </a:p>
         </p:txBody>
       </p:sp>
@@ -14998,7 +16463,7 @@
 </file>
 
 <file path=ppt/slides/slide9.xml><?xml version="1.0" encoding="utf-8"?>
-<p:sld xmlns:a="http://schemas.openxmlformats.org/drawingml/2006/main" xmlns:p="http://schemas.openxmlformats.org/presentationml/2006/main" xmlns:r="http://schemas.openxmlformats.org/officeDocument/2006/relationships">
+<p:sld xmlns:a="http://schemas.openxmlformats.org/drawingml/2006/main" xmlns:r="http://schemas.openxmlformats.org/officeDocument/2006/relationships" xmlns:p="http://schemas.openxmlformats.org/presentationml/2006/main">
   <p:cSld>
     <p:bg>
       <p:bgPr>
@@ -15043,12 +16508,20 @@
                 <a:solidFill>
                   <a:srgbClr val="E8EEF7"/>
                 </a:solidFill>
-                <a:latin typeface="Microsoft YaHei"/>
-                <a:ea typeface="Microsoft YaHei"/>
-                <a:cs typeface="Microsoft YaHei"/>
+                <a:latin typeface="微软雅黑" panose="020B0503020204020204" charset="-122"/>
+                <a:ea typeface="微软雅黑" panose="020B0503020204020204" charset="-122"/>
+                <a:cs typeface="微软雅黑" panose="020B0503020204020204" charset="-122"/>
               </a:rPr>
               <a:t>技术难点：三个我们真正踩过的坑</a:t>
             </a:r>
+            <a:endParaRPr sz="2800" b="1">
+              <a:solidFill>
+                <a:srgbClr val="E8EEF7"/>
+              </a:solidFill>
+              <a:latin typeface="微软雅黑" panose="020B0503020204020204" charset="-122"/>
+              <a:ea typeface="微软雅黑" panose="020B0503020204020204" charset="-122"/>
+              <a:cs typeface="微软雅黑" panose="020B0503020204020204" charset="-122"/>
+            </a:endParaRPr>
           </a:p>
         </p:txBody>
       </p:sp>
@@ -15209,12 +16682,20 @@
                 <a:solidFill>
                   <a:srgbClr val="FFFFFF"/>
                 </a:solidFill>
-                <a:latin typeface="Microsoft YaHei"/>
-                <a:ea typeface="Microsoft YaHei"/>
-                <a:cs typeface="Microsoft YaHei"/>
+                <a:latin typeface="微软雅黑" panose="020B0503020204020204" charset="-122"/>
+                <a:ea typeface="微软雅黑" panose="020B0503020204020204" charset="-122"/>
+                <a:cs typeface="微软雅黑" panose="020B0503020204020204" charset="-122"/>
               </a:rPr>
               <a:t>难点</a:t>
             </a:r>
+            <a:endParaRPr sz="1300" b="1">
+              <a:solidFill>
+                <a:srgbClr val="FFFFFF"/>
+              </a:solidFill>
+              <a:latin typeface="微软雅黑" panose="020B0503020204020204" charset="-122"/>
+              <a:ea typeface="微软雅黑" panose="020B0503020204020204" charset="-122"/>
+              <a:cs typeface="微软雅黑" panose="020B0503020204020204" charset="-122"/>
+            </a:endParaRPr>
           </a:p>
         </p:txBody>
       </p:sp>
@@ -15246,12 +16727,20 @@
                 <a:solidFill>
                   <a:srgbClr val="FFFFFF"/>
                 </a:solidFill>
-                <a:latin typeface="Microsoft YaHei"/>
-                <a:ea typeface="Microsoft YaHei"/>
-                <a:cs typeface="Microsoft YaHei"/>
+                <a:latin typeface="微软雅黑" panose="020B0503020204020204" charset="-122"/>
+                <a:ea typeface="微软雅黑" panose="020B0503020204020204" charset="-122"/>
+                <a:cs typeface="微软雅黑" panose="020B0503020204020204" charset="-122"/>
               </a:rPr>
               <a:t>现象</a:t>
             </a:r>
+            <a:endParaRPr sz="1300" b="1">
+              <a:solidFill>
+                <a:srgbClr val="FFFFFF"/>
+              </a:solidFill>
+              <a:latin typeface="微软雅黑" panose="020B0503020204020204" charset="-122"/>
+              <a:ea typeface="微软雅黑" panose="020B0503020204020204" charset="-122"/>
+              <a:cs typeface="微软雅黑" panose="020B0503020204020204" charset="-122"/>
+            </a:endParaRPr>
           </a:p>
         </p:txBody>
       </p:sp>
@@ -15283,12 +16772,20 @@
                 <a:solidFill>
                   <a:srgbClr val="FFFFFF"/>
                 </a:solidFill>
-                <a:latin typeface="Microsoft YaHei"/>
-                <a:ea typeface="Microsoft YaHei"/>
-                <a:cs typeface="Microsoft YaHei"/>
+                <a:latin typeface="微软雅黑" panose="020B0503020204020204" charset="-122"/>
+                <a:ea typeface="微软雅黑" panose="020B0503020204020204" charset="-122"/>
+                <a:cs typeface="微软雅黑" panose="020B0503020204020204" charset="-122"/>
               </a:rPr>
               <a:t>解决方案</a:t>
             </a:r>
+            <a:endParaRPr sz="1300" b="1">
+              <a:solidFill>
+                <a:srgbClr val="FFFFFF"/>
+              </a:solidFill>
+              <a:latin typeface="微软雅黑" panose="020B0503020204020204" charset="-122"/>
+              <a:ea typeface="微软雅黑" panose="020B0503020204020204" charset="-122"/>
+              <a:cs typeface="微软雅黑" panose="020B0503020204020204" charset="-122"/>
+            </a:endParaRPr>
           </a:p>
         </p:txBody>
       </p:sp>
@@ -15455,12 +16952,20 @@
                 <a:solidFill>
                   <a:srgbClr val="E85D4C"/>
                 </a:solidFill>
-                <a:latin typeface="Microsoft YaHei"/>
-                <a:ea typeface="Microsoft YaHei"/>
-                <a:cs typeface="Microsoft YaHei"/>
+                <a:latin typeface="微软雅黑" panose="020B0503020204020204" charset="-122"/>
+                <a:ea typeface="微软雅黑" panose="020B0503020204020204" charset="-122"/>
+                <a:cs typeface="微软雅黑" panose="020B0503020204020204" charset="-122"/>
               </a:rPr>
               <a:t>千人性能</a:t>
             </a:r>
+            <a:endParaRPr sz="1300" b="1">
+              <a:solidFill>
+                <a:srgbClr val="E85D4C"/>
+              </a:solidFill>
+              <a:latin typeface="微软雅黑" panose="020B0503020204020204" charset="-122"/>
+              <a:ea typeface="微软雅黑" panose="020B0503020204020204" charset="-122"/>
+              <a:cs typeface="微软雅黑" panose="020B0503020204020204" charset="-122"/>
+            </a:endParaRPr>
           </a:p>
         </p:txBody>
       </p:sp>
@@ -15492,12 +16997,20 @@
                 <a:solidFill>
                   <a:srgbClr val="8B9BB4"/>
                 </a:solidFill>
-                <a:latin typeface="Microsoft YaHei"/>
-                <a:ea typeface="Microsoft YaHei"/>
-                <a:cs typeface="Microsoft YaHei"/>
+                <a:latin typeface="微软雅黑" panose="020B0503020204020204" charset="-122"/>
+                <a:ea typeface="微软雅黑" panose="020B0503020204020204" charset="-122"/>
+                <a:cs typeface="微软雅黑" panose="020B0503020204020204" charset="-122"/>
               </a:rPr>
               <a:t>1000 单位寻路/碰撞导致卡顿</a:t>
             </a:r>
+            <a:endParaRPr sz="1200" b="0">
+              <a:solidFill>
+                <a:srgbClr val="8B9BB4"/>
+              </a:solidFill>
+              <a:latin typeface="微软雅黑" panose="020B0503020204020204" charset="-122"/>
+              <a:ea typeface="微软雅黑" panose="020B0503020204020204" charset="-122"/>
+              <a:cs typeface="微软雅黑" panose="020B0503020204020204" charset="-122"/>
+            </a:endParaRPr>
           </a:p>
         </p:txBody>
       </p:sp>
@@ -15529,12 +17042,20 @@
                 <a:solidFill>
                   <a:srgbClr val="E8EEF7"/>
                 </a:solidFill>
-                <a:latin typeface="Microsoft YaHei"/>
-                <a:ea typeface="Microsoft YaHei"/>
-                <a:cs typeface="Microsoft YaHei"/>
+                <a:latin typeface="微软雅黑" panose="020B0503020204020204" charset="-122"/>
+                <a:ea typeface="微软雅黑" panose="020B0503020204020204" charset="-122"/>
+                <a:cs typeface="微软雅黑" panose="020B0503020204020204" charset="-122"/>
               </a:rPr>
               <a:t>固定时间步 + 空间哈希 + 流场共享路径 + 分频更新 + 地形缓存</a:t>
             </a:r>
+            <a:endParaRPr sz="1200" b="0">
+              <a:solidFill>
+                <a:srgbClr val="E8EEF7"/>
+              </a:solidFill>
+              <a:latin typeface="微软雅黑" panose="020B0503020204020204" charset="-122"/>
+              <a:ea typeface="微软雅黑" panose="020B0503020204020204" charset="-122"/>
+              <a:cs typeface="微软雅黑" panose="020B0503020204020204" charset="-122"/>
+            </a:endParaRPr>
           </a:p>
         </p:txBody>
       </p:sp>
@@ -15701,12 +17222,20 @@
                 <a:solidFill>
                   <a:srgbClr val="E85D4C"/>
                 </a:solidFill>
-                <a:latin typeface="Microsoft YaHei"/>
-                <a:ea typeface="Microsoft YaHei"/>
-                <a:cs typeface="Microsoft YaHei"/>
+                <a:latin typeface="微软雅黑" panose="020B0503020204020204" charset="-122"/>
+                <a:ea typeface="微软雅黑" panose="020B0503020204020204" charset="-122"/>
+                <a:cs typeface="微软雅黑" panose="020B0503020204020204" charset="-122"/>
               </a:rPr>
               <a:t>桥面拥堵错位</a:t>
             </a:r>
+            <a:endParaRPr sz="1300" b="1">
+              <a:solidFill>
+                <a:srgbClr val="E85D4C"/>
+              </a:solidFill>
+              <a:latin typeface="微软雅黑" panose="020B0503020204020204" charset="-122"/>
+              <a:ea typeface="微软雅黑" panose="020B0503020204020204" charset="-122"/>
+              <a:cs typeface="微软雅黑" panose="020B0503020204020204" charset="-122"/>
+            </a:endParaRPr>
           </a:p>
         </p:txBody>
       </p:sp>
@@ -15738,12 +17267,20 @@
                 <a:solidFill>
                   <a:srgbClr val="8B9BB4"/>
                 </a:solidFill>
-                <a:latin typeface="Microsoft YaHei"/>
-                <a:ea typeface="Microsoft YaHei"/>
-                <a:cs typeface="Microsoft YaHei"/>
+                <a:latin typeface="微软雅黑" panose="020B0503020204020204" charset="-122"/>
+                <a:ea typeface="微软雅黑" panose="020B0503020204020204" charset="-122"/>
+                <a:cs typeface="微软雅黑" panose="020B0503020204020204" charset="-122"/>
               </a:rPr>
               <a:t>桥上交战被碰撞推入开放水面</a:t>
             </a:r>
+            <a:endParaRPr sz="1200" b="0">
+              <a:solidFill>
+                <a:srgbClr val="8B9BB4"/>
+              </a:solidFill>
+              <a:latin typeface="微软雅黑" panose="020B0503020204020204" charset="-122"/>
+              <a:ea typeface="微软雅黑" panose="020B0503020204020204" charset="-122"/>
+              <a:cs typeface="微软雅黑" panose="020B0503020204020204" charset="-122"/>
+            </a:endParaRPr>
           </a:p>
         </p:txBody>
       </p:sp>
@@ -15775,12 +17312,20 @@
                 <a:solidFill>
                   <a:srgbClr val="E8EEF7"/>
                 </a:solidFill>
-                <a:latin typeface="Microsoft YaHei"/>
-                <a:ea typeface="Microsoft YaHei"/>
-                <a:cs typeface="Microsoft YaHei"/>
+                <a:latin typeface="微软雅黑" panose="020B0503020204020204" charset="-122"/>
+                <a:ea typeface="微软雅黑" panose="020B0503020204020204" charset="-122"/>
+                <a:cs typeface="微软雅黑" panose="020B0503020204020204" charset="-122"/>
               </a:rPr>
               <a:t>逐帧渡河合法性校验 + 定向矩形桥面通行区约束</a:t>
             </a:r>
+            <a:endParaRPr sz="1200" b="0">
+              <a:solidFill>
+                <a:srgbClr val="E8EEF7"/>
+              </a:solidFill>
+              <a:latin typeface="微软雅黑" panose="020B0503020204020204" charset="-122"/>
+              <a:ea typeface="微软雅黑" panose="020B0503020204020204" charset="-122"/>
+              <a:cs typeface="微软雅黑" panose="020B0503020204020204" charset="-122"/>
+            </a:endParaRPr>
           </a:p>
         </p:txBody>
       </p:sp>
@@ -15947,12 +17492,20 @@
                 <a:solidFill>
                   <a:srgbClr val="E85D4C"/>
                 </a:solidFill>
-                <a:latin typeface="Microsoft YaHei"/>
-                <a:ea typeface="Microsoft YaHei"/>
-                <a:cs typeface="Microsoft YaHei"/>
+                <a:latin typeface="微软雅黑" panose="020B0503020204020204" charset="-122"/>
+                <a:ea typeface="微软雅黑" panose="020B0503020204020204" charset="-122"/>
+                <a:cs typeface="微软雅黑" panose="020B0503020204020204" charset="-122"/>
               </a:rPr>
               <a:t>自动作战僵持</a:t>
             </a:r>
+            <a:endParaRPr sz="1300" b="1">
+              <a:solidFill>
+                <a:srgbClr val="E85D4C"/>
+              </a:solidFill>
+              <a:latin typeface="微软雅黑" panose="020B0503020204020204" charset="-122"/>
+              <a:ea typeface="微软雅黑" panose="020B0503020204020204" charset="-122"/>
+              <a:cs typeface="微软雅黑" panose="020B0503020204020204" charset="-122"/>
+            </a:endParaRPr>
           </a:p>
         </p:txBody>
       </p:sp>
@@ -15984,12 +17537,20 @@
                 <a:solidFill>
                   <a:srgbClr val="8B9BB4"/>
                 </a:solidFill>
-                <a:latin typeface="Microsoft YaHei"/>
-                <a:ea typeface="Microsoft YaHei"/>
-                <a:cs typeface="Microsoft YaHei"/>
+                <a:latin typeface="微软雅黑" panose="020B0503020204020204" charset="-122"/>
+                <a:ea typeface="微软雅黑" panose="020B0503020204020204" charset="-122"/>
+                <a:cs typeface="微软雅黑" panose="020B0503020204020204" charset="-122"/>
               </a:rPr>
               <a:t>桥未完工时改派造船，双方隔河挂机</a:t>
             </a:r>
+            <a:endParaRPr sz="1200" b="0">
+              <a:solidFill>
+                <a:srgbClr val="8B9BB4"/>
+              </a:solidFill>
+              <a:latin typeface="微软雅黑" panose="020B0503020204020204" charset="-122"/>
+              <a:ea typeface="微软雅黑" panose="020B0503020204020204" charset="-122"/>
+              <a:cs typeface="微软雅黑" panose="020B0503020204020204" charset="-122"/>
+            </a:endParaRPr>
           </a:p>
         </p:txBody>
       </p:sp>
@@ -16021,12 +17582,20 @@
                 <a:solidFill>
                   <a:srgbClr val="E8EEF7"/>
                 </a:solidFill>
-                <a:latin typeface="Microsoft YaHei"/>
-                <a:ea typeface="Microsoft YaHei"/>
-                <a:cs typeface="Microsoft YaHei"/>
+                <a:latin typeface="微软雅黑" panose="020B0503020204020204" charset="-122"/>
+                <a:ea typeface="微软雅黑" panose="020B0503020204020204" charset="-122"/>
+                <a:cs typeface="微软雅黑" panose="020B0503020204020204" charset="-122"/>
               </a:rPr>
               <a:t>AI 工程优先级：优先架桥，未完成不切换造船</a:t>
             </a:r>
+            <a:endParaRPr sz="1200" b="0">
+              <a:solidFill>
+                <a:srgbClr val="E8EEF7"/>
+              </a:solidFill>
+              <a:latin typeface="微软雅黑" panose="020B0503020204020204" charset="-122"/>
+              <a:ea typeface="微软雅黑" panose="020B0503020204020204" charset="-122"/>
+              <a:cs typeface="微软雅黑" panose="020B0503020204020204" charset="-122"/>
+            </a:endParaRPr>
           </a:p>
         </p:txBody>
       </p:sp>
@@ -16193,12 +17762,20 @@
                 <a:solidFill>
                   <a:srgbClr val="E85D4C"/>
                 </a:solidFill>
-                <a:latin typeface="Microsoft YaHei"/>
-                <a:ea typeface="Microsoft YaHei"/>
-                <a:cs typeface="Microsoft YaHei"/>
+                <a:latin typeface="微软雅黑" panose="020B0503020204020204" charset="-122"/>
+                <a:ea typeface="微软雅黑" panose="020B0503020204020204" charset="-122"/>
+                <a:cs typeface="微软雅黑" panose="020B0503020204020204" charset="-122"/>
               </a:rPr>
               <a:t>高分屏模糊</a:t>
             </a:r>
+            <a:endParaRPr sz="1300" b="1">
+              <a:solidFill>
+                <a:srgbClr val="E85D4C"/>
+              </a:solidFill>
+              <a:latin typeface="微软雅黑" panose="020B0503020204020204" charset="-122"/>
+              <a:ea typeface="微软雅黑" panose="020B0503020204020204" charset="-122"/>
+              <a:cs typeface="微软雅黑" panose="020B0503020204020204" charset="-122"/>
+            </a:endParaRPr>
           </a:p>
         </p:txBody>
       </p:sp>
@@ -16230,12 +17807,20 @@
                 <a:solidFill>
                   <a:srgbClr val="8B9BB4"/>
                 </a:solidFill>
-                <a:latin typeface="Microsoft YaHei"/>
-                <a:ea typeface="Microsoft YaHei"/>
-                <a:cs typeface="Microsoft YaHei"/>
+                <a:latin typeface="微软雅黑" panose="020B0503020204020204" charset="-122"/>
+                <a:ea typeface="微软雅黑" panose="020B0503020204020204" charset="-122"/>
+                <a:cs typeface="微软雅黑" panose="020B0503020204020204" charset="-122"/>
               </a:rPr>
               <a:t>文字与像素战场放大后发虚</a:t>
             </a:r>
+            <a:endParaRPr sz="1200" b="0">
+              <a:solidFill>
+                <a:srgbClr val="8B9BB4"/>
+              </a:solidFill>
+              <a:latin typeface="微软雅黑" panose="020B0503020204020204" charset="-122"/>
+              <a:ea typeface="微软雅黑" panose="020B0503020204020204" charset="-122"/>
+              <a:cs typeface="微软雅黑" panose="020B0503020204020204" charset="-122"/>
+            </a:endParaRPr>
           </a:p>
         </p:txBody>
       </p:sp>
@@ -16267,12 +17852,20 @@
                 <a:solidFill>
                   <a:srgbClr val="E8EEF7"/>
                 </a:solidFill>
-                <a:latin typeface="Microsoft YaHei"/>
-                <a:ea typeface="Microsoft YaHei"/>
-                <a:cs typeface="Microsoft YaHei"/>
+                <a:latin typeface="微软雅黑" panose="020B0503020204020204" charset="-122"/>
+                <a:ea typeface="微软雅黑" panose="020B0503020204020204" charset="-122"/>
+                <a:cs typeface="微软雅黑" panose="020B0503020204020204" charset="-122"/>
               </a:rPr>
               <a:t>SCALED + 最近邻战场缩放 + 文字按最终分辨率重绘</a:t>
             </a:r>
+            <a:endParaRPr sz="1200" b="0">
+              <a:solidFill>
+                <a:srgbClr val="E8EEF7"/>
+              </a:solidFill>
+              <a:latin typeface="微软雅黑" panose="020B0503020204020204" charset="-122"/>
+              <a:ea typeface="微软雅黑" panose="020B0503020204020204" charset="-122"/>
+              <a:cs typeface="微软雅黑" panose="020B0503020204020204" charset="-122"/>
+            </a:endParaRPr>
           </a:p>
         </p:txBody>
       </p:sp>
@@ -16439,12 +18032,20 @@
                 <a:solidFill>
                   <a:srgbClr val="E85D4C"/>
                 </a:solidFill>
-                <a:latin typeface="Microsoft YaHei"/>
-                <a:ea typeface="Microsoft YaHei"/>
-                <a:cs typeface="Microsoft YaHei"/>
+                <a:latin typeface="微软雅黑" panose="020B0503020204020204" charset="-122"/>
+                <a:ea typeface="微软雅黑" panose="020B0503020204020204" charset="-122"/>
+                <a:cs typeface="微软雅黑" panose="020B0503020204020204" charset="-122"/>
               </a:rPr>
               <a:t>断网打断体验</a:t>
             </a:r>
+            <a:endParaRPr sz="1300" b="1">
+              <a:solidFill>
+                <a:srgbClr val="E85D4C"/>
+              </a:solidFill>
+              <a:latin typeface="微软雅黑" panose="020B0503020204020204" charset="-122"/>
+              <a:ea typeface="微软雅黑" panose="020B0503020204020204" charset="-122"/>
+              <a:cs typeface="微软雅黑" panose="020B0503020204020204" charset="-122"/>
+            </a:endParaRPr>
           </a:p>
         </p:txBody>
       </p:sp>
@@ -16476,12 +18077,20 @@
                 <a:solidFill>
                   <a:srgbClr val="8B9BB4"/>
                 </a:solidFill>
-                <a:latin typeface="Microsoft YaHei"/>
-                <a:ea typeface="Microsoft YaHei"/>
-                <a:cs typeface="Microsoft YaHei"/>
+                <a:latin typeface="微软雅黑" panose="020B0503020204020204" charset="-122"/>
+                <a:ea typeface="微软雅黑" panose="020B0503020204020204" charset="-122"/>
+                <a:cs typeface="微软雅黑" panose="020B0503020204020204" charset="-122"/>
               </a:rPr>
               <a:t>大模型/语音失败导致无法继续</a:t>
             </a:r>
+            <a:endParaRPr sz="1200" b="0">
+              <a:solidFill>
+                <a:srgbClr val="8B9BB4"/>
+              </a:solidFill>
+              <a:latin typeface="微软雅黑" panose="020B0503020204020204" charset="-122"/>
+              <a:ea typeface="微软雅黑" panose="020B0503020204020204" charset="-122"/>
+              <a:cs typeface="微软雅黑" panose="020B0503020204020204" charset="-122"/>
+            </a:endParaRPr>
           </a:p>
         </p:txBody>
       </p:sp>
@@ -16513,12 +18122,20 @@
                 <a:solidFill>
                   <a:srgbClr val="E8EEF7"/>
                 </a:solidFill>
-                <a:latin typeface="Microsoft YaHei"/>
-                <a:ea typeface="Microsoft YaHei"/>
-                <a:cs typeface="Microsoft YaHei"/>
+                <a:latin typeface="微软雅黑" panose="020B0503020204020204" charset="-122"/>
+                <a:ea typeface="微软雅黑" panose="020B0503020204020204" charset="-122"/>
+                <a:cs typeface="微软雅黑" panose="020B0503020204020204" charset="-122"/>
               </a:rPr>
               <a:t>本地规则解析器兜底 + 暂停/重试/离线/紧急存档</a:t>
             </a:r>
+            <a:endParaRPr sz="1200" b="0">
+              <a:solidFill>
+                <a:srgbClr val="E8EEF7"/>
+              </a:solidFill>
+              <a:latin typeface="微软雅黑" panose="020B0503020204020204" charset="-122"/>
+              <a:ea typeface="微软雅黑" panose="020B0503020204020204" charset="-122"/>
+              <a:cs typeface="微软雅黑" panose="020B0503020204020204" charset="-122"/>
+            </a:endParaRPr>
           </a:p>
         </p:txBody>
       </p:sp>
@@ -16593,12 +18210,20 @@
                 <a:solidFill>
                   <a:srgbClr val="8B9BB4"/>
                 </a:solidFill>
-                <a:latin typeface="Microsoft YaHei"/>
-                <a:ea typeface="Microsoft YaHei"/>
-                <a:cs typeface="Microsoft YaHei"/>
+                <a:latin typeface="微软雅黑" panose="020B0503020204020204" charset="-122"/>
+                <a:ea typeface="微软雅黑" panose="020B0503020204020204" charset="-122"/>
+                <a:cs typeface="微软雅黑" panose="020B0503020204020204" charset="-122"/>
               </a:rPr>
               <a:t>小组作业答辩 · 指挥官战术对抗</a:t>
             </a:r>
+            <a:endParaRPr sz="1000" b="0">
+              <a:solidFill>
+                <a:srgbClr val="8B9BB4"/>
+              </a:solidFill>
+              <a:latin typeface="微软雅黑" panose="020B0503020204020204" charset="-122"/>
+              <a:ea typeface="微软雅黑" panose="020B0503020204020204" charset="-122"/>
+              <a:cs typeface="微软雅黑" panose="020B0503020204020204" charset="-122"/>
+            </a:endParaRPr>
           </a:p>
         </p:txBody>
       </p:sp>
@@ -16630,12 +18255,20 @@
                 <a:solidFill>
                   <a:srgbClr val="8B9BB4"/>
                 </a:solidFill>
-                <a:latin typeface="Microsoft YaHei"/>
-                <a:ea typeface="Microsoft YaHei"/>
-                <a:cs typeface="Microsoft YaHei"/>
+                <a:latin typeface="微软雅黑" panose="020B0503020204020204" charset="-122"/>
+                <a:ea typeface="微软雅黑" panose="020B0503020204020204" charset="-122"/>
+                <a:cs typeface="微软雅黑" panose="020B0503020204020204" charset="-122"/>
               </a:rPr>
               <a:t>09 / 13</a:t>
             </a:r>
+            <a:endParaRPr sz="1000" b="0">
+              <a:solidFill>
+                <a:srgbClr val="8B9BB4"/>
+              </a:solidFill>
+              <a:latin typeface="微软雅黑" panose="020B0503020204020204" charset="-122"/>
+              <a:ea typeface="微软雅黑" panose="020B0503020204020204" charset="-122"/>
+              <a:cs typeface="微软雅黑" panose="020B0503020204020204" charset="-122"/>
+            </a:endParaRPr>
           </a:p>
         </p:txBody>
       </p:sp>
@@ -16963,7 +18596,11 @@
       </a:style>
     </a:lnDef>
   </a:objectDefaults>
-  <a:extraClrSchemeLst/>
+  <a:extLst>
+    <a:ext uri="{05A4C25C-085E-4340-85A3-A5531E510DB2}">
+      <thm15:themeFamily xmlns:thm15="http://schemas.microsoft.com/office/thememl/2012/main" name="Office Theme" id="{62F939B6-93AF-4DB8-9C6B-D6C7DFDC589F}" vid="{4A3C46E8-61CC-4603-A589-7422A47A8E4A}"/>
+    </a:ext>
+  </a:extLst>
 </a:theme>
 </file>
 
@@ -17283,6 +18920,10 @@
       </a:style>
     </a:lnDef>
   </a:objectDefaults>
-  <a:extraClrSchemeLst/>
+  <a:extLst>
+    <a:ext uri="{05A4C25C-085E-4340-85A3-A5531E510DB2}">
+      <thm15:themeFamily xmlns:thm15="http://schemas.microsoft.com/office/thememl/2012/main" name="Office Theme" id="{62F939B6-93AF-4DB8-9C6B-D6C7DFDC589F}" vid="{4A3C46E8-61CC-4603-A589-7422A47A8E4A}"/>
+    </a:ext>
+  </a:extLst>
 </a:theme>
 </file>